--- a/Presentacion_JiovaniGo_Plan_Pruebas.pptx
+++ b/Presentacion_JiovaniGo_Plan_Pruebas.pptx
@@ -3303,9 +3303,27 @@
           </a:p>
         </p:txBody>
       </p:sp>
-      <p:sp>
-        <p:nvSpPr>
-          <p:cNvPr id="6" name="Rectangle 5"/>
+    </p:spTree>
+  </p:cSld>
+  <p:clrMapOvr>
+    <a:masterClrMapping/>
+  </p:clrMapOvr>
+</p:sld>
+</file>
+
+<file path=ppt/slides/slide10.xml><?xml version="1.0" encoding="utf-8"?>
+<p:sld xmlns:a="http://schemas.openxmlformats.org/drawingml/2006/main" xmlns:p="http://schemas.openxmlformats.org/presentationml/2006/main" xmlns:r="http://schemas.openxmlformats.org/officeDocument/2006/relationships">
+  <p:cSld>
+    <p:spTree>
+      <p:nvGrpSpPr>
+        <p:cNvPr id="1" name=""/>
+        <p:cNvGrpSpPr/>
+        <p:nvPr/>
+      </p:nvGrpSpPr>
+      <p:grpSpPr/>
+      <p:sp>
+        <p:nvSpPr>
+          <p:cNvPr id="2" name="Rectangle 1"/>
           <p:cNvSpPr/>
           <p:nvPr/>
         </p:nvSpPr>
@@ -3348,7 +3366,7 @@
       </p:sp>
       <p:sp>
         <p:nvSpPr>
-          <p:cNvPr id="7" name="TextBox 6"/>
+          <p:cNvPr id="3" name="TextBox 2"/>
           <p:cNvSpPr txBox="1"/>
           <p:nvPr/>
         </p:nvSpPr>
@@ -3376,218 +3394,263 @@
               </a:defRPr>
             </a:pPr>
             <a:r>
-              <a:t>Índice</a:t>
-            </a:r>
-          </a:p>
-        </p:txBody>
-      </p:sp>
-      <p:sp>
-        <p:nvSpPr>
-          <p:cNvPr id="8" name="TextBox 7"/>
-          <p:cNvSpPr txBox="1"/>
+              <a:t>Casos de Prueba Principales</a:t>
+            </a:r>
+          </a:p>
+        </p:txBody>
+      </p:sp>
+      <p:sp>
+        <p:nvSpPr>
+          <p:cNvPr id="4" name="Rounded Rectangle 3"/>
+          <p:cNvSpPr/>
           <p:nvPr/>
         </p:nvSpPr>
         <p:spPr>
           <a:xfrm>
-            <a:off x="1371600" y="1371600"/>
-            <a:ext cx="9144000" cy="4572000"/>
+            <a:off x="914400" y="1645920"/>
+            <a:ext cx="10362895" cy="1188720"/>
           </a:xfrm>
-          <a:prstGeom prst="rect">
+          <a:prstGeom prst="roundRect">
             <a:avLst/>
           </a:prstGeom>
-          <a:noFill/>
+          <a:solidFill>
+            <a:srgbClr val="F5F5F0"/>
+          </a:solidFill>
+          <a:ln w="38100">
+            <a:solidFill>
+              <a:srgbClr val="4682B4"/>
+            </a:solidFill>
+          </a:ln>
         </p:spPr>
-        <p:txBody>
-          <a:bodyPr wrap="none">
-            <a:spAutoFit/>
-          </a:bodyPr>
-          <a:lstStyle/>
-          <a:p/>
-          <a:p>
-            <a:pPr>
-              <a:spcAft>
-                <a:spcPts val="1000"/>
-              </a:spcAft>
-              <a:defRPr sz="2200">
-                <a:solidFill>
-                  <a:srgbClr val="333333"/>
-                </a:solidFill>
-              </a:defRPr>
-            </a:pPr>
-            <a:r>
-              <a:t>1. Introducción al Proyecto</a:t>
-            </a:r>
-          </a:p>
-          <a:p>
-            <a:pPr>
-              <a:spcAft>
-                <a:spcPts val="1000"/>
-              </a:spcAft>
-              <a:defRPr sz="2200">
-                <a:solidFill>
-                  <a:srgbClr val="333333"/>
-                </a:solidFill>
-              </a:defRPr>
-            </a:pPr>
-            <a:r>
-              <a:t>2. Objetivos del Plan de Pruebas</a:t>
-            </a:r>
-          </a:p>
-          <a:p>
-            <a:pPr>
-              <a:spcAft>
-                <a:spcPts val="1000"/>
-              </a:spcAft>
-              <a:defRPr sz="2200">
-                <a:solidFill>
-                  <a:srgbClr val="333333"/>
-                </a:solidFill>
-              </a:defRPr>
-            </a:pPr>
-            <a:r>
-              <a:t>3. Alcance de las Pruebas</a:t>
-            </a:r>
-          </a:p>
-          <a:p>
-            <a:pPr>
-              <a:spcAft>
-                <a:spcPts val="1000"/>
-              </a:spcAft>
-              <a:defRPr sz="2200">
-                <a:solidFill>
-                  <a:srgbClr val="333333"/>
-                </a:solidFill>
-              </a:defRPr>
-            </a:pPr>
-            <a:r>
-              <a:t>4. Tipos de Pruebas Implementadas</a:t>
-            </a:r>
-          </a:p>
-          <a:p>
-            <a:pPr>
-              <a:spcAft>
-                <a:spcPts val="1000"/>
-              </a:spcAft>
-              <a:defRPr sz="2200">
-                <a:solidFill>
-                  <a:srgbClr val="333333"/>
-                </a:solidFill>
-              </a:defRPr>
-            </a:pPr>
-            <a:r>
-              <a:t>5. Criterios de Éxito</a:t>
-            </a:r>
-          </a:p>
-          <a:p>
-            <a:pPr>
-              <a:spcAft>
-                <a:spcPts val="1000"/>
-              </a:spcAft>
-              <a:defRPr sz="2200">
-                <a:solidFill>
-                  <a:srgbClr val="333333"/>
-                </a:solidFill>
-              </a:defRPr>
-            </a:pPr>
-            <a:r>
-              <a:t>6. Entorno de Pruebas</a:t>
-            </a:r>
-          </a:p>
-          <a:p>
-            <a:pPr>
-              <a:spcAft>
-                <a:spcPts val="1000"/>
-              </a:spcAft>
-              <a:defRPr sz="2200">
-                <a:solidFill>
-                  <a:srgbClr val="333333"/>
-                </a:solidFill>
-              </a:defRPr>
-            </a:pPr>
-            <a:r>
-              <a:t>7. Casos de Prueba Principales</a:t>
-            </a:r>
-          </a:p>
-          <a:p>
-            <a:pPr>
-              <a:spcAft>
-                <a:spcPts val="1000"/>
-              </a:spcAft>
-              <a:defRPr sz="2200">
-                <a:solidFill>
-                  <a:srgbClr val="333333"/>
-                </a:solidFill>
-              </a:defRPr>
-            </a:pPr>
-            <a:r>
-              <a:t>8. Resultados de las Pruebas</a:t>
-            </a:r>
-          </a:p>
-          <a:p>
-            <a:pPr>
-              <a:spcAft>
-                <a:spcPts val="1000"/>
-              </a:spcAft>
-              <a:defRPr sz="2200">
-                <a:solidFill>
-                  <a:srgbClr val="333333"/>
-                </a:solidFill>
-              </a:defRPr>
-            </a:pPr>
-            <a:r>
-              <a:t>9. Test de Usabilidad</a:t>
-            </a:r>
-          </a:p>
-          <a:p>
-            <a:pPr>
-              <a:spcAft>
-                <a:spcPts val="1000"/>
-              </a:spcAft>
-              <a:defRPr sz="2200">
-                <a:solidFill>
-                  <a:srgbClr val="333333"/>
-                </a:solidFill>
-              </a:defRPr>
-            </a:pPr>
-            <a:r>
-              <a:t>10. Gestión de Defectos</a:t>
-            </a:r>
-          </a:p>
-          <a:p>
-            <a:pPr>
-              <a:spcAft>
-                <a:spcPts val="1000"/>
-              </a:spcAft>
-              <a:defRPr sz="2200">
-                <a:solidFill>
-                  <a:srgbClr val="333333"/>
-                </a:solidFill>
-              </a:defRPr>
-            </a:pPr>
-            <a:r>
-              <a:t>11. Métricas Finales</a:t>
-            </a:r>
-          </a:p>
-          <a:p>
-            <a:pPr>
-              <a:spcAft>
-                <a:spcPts val="1000"/>
-              </a:spcAft>
-              <a:defRPr sz="2200">
-                <a:solidFill>
-                  <a:srgbClr val="333333"/>
-                </a:solidFill>
-              </a:defRPr>
-            </a:pPr>
-            <a:r>
-              <a:t>12. Conclusiones y Lecciones Aprendidas</a:t>
-            </a:r>
-          </a:p>
-        </p:txBody>
-      </p:sp>
-      <p:sp>
-        <p:nvSpPr>
-          <p:cNvPr id="9" name="Rectangle 8"/>
+        <p:style>
+          <a:lnRef idx="1">
+            <a:schemeClr val="accent1"/>
+          </a:lnRef>
+          <a:fillRef idx="3">
+            <a:schemeClr val="accent1"/>
+          </a:fillRef>
+          <a:effectRef idx="2">
+            <a:schemeClr val="accent1"/>
+          </a:effectRef>
+          <a:fontRef idx="minor">
+            <a:schemeClr val="lt1"/>
+          </a:fontRef>
+        </p:style>
+        <p:txBody>
+          <a:bodyPr rtlCol="0" anchor="ctr" lIns="182880" tIns="91440"/>
+          <a:lstStyle/>
+          <a:p>
+            <a:pPr algn="ctr">
+              <a:spcAft>
+                <a:spcPts val="600"/>
+              </a:spcAft>
+              <a:defRPr sz="2000" b="1">
+                <a:solidFill>
+                  <a:srgbClr val="4682B4"/>
+                </a:solidFill>
+              </a:defRPr>
+            </a:pPr>
+            <a:r>
+              <a:t>Módulo de Autenticación (6 casos)</a:t>
+            </a:r>
+          </a:p>
+          <a:p>
+            <a:pPr>
+              <a:defRPr sz="1600">
+                <a:solidFill>
+                  <a:srgbClr val="333333"/>
+                </a:solidFill>
+              </a:defRPr>
+            </a:pPr>
+            <a:r>
+              <a:t>AU-01: Registro exitoso | AU-02: Email duplicado</a:t>
+            </a:r>
+            <a:br/>
+            <a:r>
+              <a:t>AU-03: Login exitoso | AU-04: Password incorrecto</a:t>
+            </a:r>
+            <a:br/>
+            <a:r>
+              <a:t>AU-05: Ruta protegida sin token | AU-06: Rol admin requerido</a:t>
+            </a:r>
+          </a:p>
+        </p:txBody>
+      </p:sp>
+      <p:sp>
+        <p:nvSpPr>
+          <p:cNvPr id="5" name="Rounded Rectangle 4"/>
+          <p:cNvSpPr/>
+          <p:nvPr/>
+        </p:nvSpPr>
+        <p:spPr>
+          <a:xfrm>
+            <a:off x="914400" y="3108960"/>
+            <a:ext cx="10362895" cy="1188720"/>
+          </a:xfrm>
+          <a:prstGeom prst="roundRect">
+            <a:avLst/>
+          </a:prstGeom>
+          <a:solidFill>
+            <a:srgbClr val="F5F5F0"/>
+          </a:solidFill>
+          <a:ln w="38100">
+            <a:solidFill>
+              <a:srgbClr val="FF9800"/>
+            </a:solidFill>
+          </a:ln>
+        </p:spPr>
+        <p:style>
+          <a:lnRef idx="1">
+            <a:schemeClr val="accent1"/>
+          </a:lnRef>
+          <a:fillRef idx="3">
+            <a:schemeClr val="accent1"/>
+          </a:fillRef>
+          <a:effectRef idx="2">
+            <a:schemeClr val="accent1"/>
+          </a:effectRef>
+          <a:fontRef idx="minor">
+            <a:schemeClr val="lt1"/>
+          </a:fontRef>
+        </p:style>
+        <p:txBody>
+          <a:bodyPr rtlCol="0" anchor="ctr" lIns="182880" tIns="91440"/>
+          <a:lstStyle/>
+          <a:p>
+            <a:pPr algn="ctr">
+              <a:spcAft>
+                <a:spcPts val="600"/>
+              </a:spcAft>
+              <a:defRPr sz="2000" b="1">
+                <a:solidFill>
+                  <a:srgbClr val="FF9800"/>
+                </a:solidFill>
+              </a:defRPr>
+            </a:pPr>
+            <a:r>
+              <a:t>Módulo de Pagos (8 casos - Crítico)</a:t>
+            </a:r>
+          </a:p>
+          <a:p>
+            <a:pPr>
+              <a:defRPr sz="1600">
+                <a:solidFill>
+                  <a:srgbClr val="333333"/>
+                </a:solidFill>
+              </a:defRPr>
+            </a:pPr>
+            <a:r>
+              <a:t>PA-01: Iniciar pago válido | PA-02: Stock insuficiente</a:t>
+            </a:r>
+            <a:br/>
+            <a:r>
+              <a:t>PA-03: Pago exitoso | PA-04: Pago rechazado</a:t>
+            </a:r>
+            <a:br/>
+            <a:r>
+              <a:t>PA-05: Timeout | PA-06: Cancelación usuario</a:t>
+            </a:r>
+            <a:br/>
+            <a:r>
+              <a:t>PA-07: Prevención doble-commit | PA-08: buyOrder único</a:t>
+            </a:r>
+          </a:p>
+        </p:txBody>
+      </p:sp>
+      <p:sp>
+        <p:nvSpPr>
+          <p:cNvPr id="6" name="Rounded Rectangle 5"/>
+          <p:cNvSpPr/>
+          <p:nvPr/>
+        </p:nvSpPr>
+        <p:spPr>
+          <a:xfrm>
+            <a:off x="914400" y="4572000"/>
+            <a:ext cx="10362895" cy="1188720"/>
+          </a:xfrm>
+          <a:prstGeom prst="roundRect">
+            <a:avLst/>
+          </a:prstGeom>
+          <a:solidFill>
+            <a:srgbClr val="F5F5F0"/>
+          </a:solidFill>
+          <a:ln w="38100">
+            <a:solidFill>
+              <a:srgbClr val="4CAF50"/>
+            </a:solidFill>
+          </a:ln>
+        </p:spPr>
+        <p:style>
+          <a:lnRef idx="1">
+            <a:schemeClr val="accent1"/>
+          </a:lnRef>
+          <a:fillRef idx="3">
+            <a:schemeClr val="accent1"/>
+          </a:fillRef>
+          <a:effectRef idx="2">
+            <a:schemeClr val="accent1"/>
+          </a:effectRef>
+          <a:fontRef idx="minor">
+            <a:schemeClr val="lt1"/>
+          </a:fontRef>
+        </p:style>
+        <p:txBody>
+          <a:bodyPr rtlCol="0" anchor="ctr" lIns="182880" tIns="91440"/>
+          <a:lstStyle/>
+          <a:p>
+            <a:pPr algn="ctr">
+              <a:spcAft>
+                <a:spcPts val="600"/>
+              </a:spcAft>
+              <a:defRPr sz="2000" b="1">
+                <a:solidFill>
+                  <a:srgbClr val="4CAF50"/>
+                </a:solidFill>
+              </a:defRPr>
+            </a:pPr>
+            <a:r>
+              <a:t>Otros Módulos</a:t>
+            </a:r>
+          </a:p>
+          <a:p>
+            <a:pPr>
+              <a:defRPr sz="1600">
+                <a:solidFill>
+                  <a:srgbClr val="333333"/>
+                </a:solidFill>
+              </a:defRPr>
+            </a:pPr>
+            <a:r>
+              <a:t>Productos (5 casos): Listar, filtrar, buscar, crear, stock</a:t>
+            </a:r>
+            <a:br/>
+            <a:r>
+              <a:t>UI (8 casos): Carrito, checkout, validaciones, estados</a:t>
+            </a:r>
+          </a:p>
+        </p:txBody>
+      </p:sp>
+    </p:spTree>
+  </p:cSld>
+  <p:clrMapOvr>
+    <a:masterClrMapping/>
+  </p:clrMapOvr>
+</p:sld>
+</file>
+
+<file path=ppt/slides/slide11.xml><?xml version="1.0" encoding="utf-8"?>
+<p:sld xmlns:a="http://schemas.openxmlformats.org/drawingml/2006/main" xmlns:p="http://schemas.openxmlformats.org/presentationml/2006/main" xmlns:r="http://schemas.openxmlformats.org/officeDocument/2006/relationships">
+  <p:cSld>
+    <p:spTree>
+      <p:nvGrpSpPr>
+        <p:cNvPr id="1" name=""/>
+        <p:cNvGrpSpPr/>
+        <p:nvPr/>
+      </p:nvGrpSpPr>
+      <p:grpSpPr/>
+      <p:sp>
+        <p:nvSpPr>
+          <p:cNvPr id="2" name="Rectangle 1"/>
           <p:cNvSpPr/>
           <p:nvPr/>
         </p:nvSpPr>
@@ -3630,7 +3693,7 @@
       </p:sp>
       <p:sp>
         <p:nvSpPr>
-          <p:cNvPr id="10" name="TextBox 9"/>
+          <p:cNvPr id="3" name="TextBox 2"/>
           <p:cNvSpPr txBox="1"/>
           <p:nvPr/>
         </p:nvSpPr>
@@ -3658,6 +3721,3908 @@
               </a:defRPr>
             </a:pPr>
             <a:r>
+              <a:t>Resultados - Pruebas Backend (Jest)</a:t>
+            </a:r>
+          </a:p>
+        </p:txBody>
+      </p:sp>
+      <p:sp>
+        <p:nvSpPr>
+          <p:cNvPr id="4" name="Rounded Rectangle 3"/>
+          <p:cNvSpPr/>
+          <p:nvPr/>
+        </p:nvSpPr>
+        <p:spPr>
+          <a:xfrm>
+            <a:off x="731520" y="1645920"/>
+            <a:ext cx="5029200" cy="1828800"/>
+          </a:xfrm>
+          <a:prstGeom prst="roundRect">
+            <a:avLst/>
+          </a:prstGeom>
+          <a:solidFill>
+            <a:srgbClr val="4CAF50"/>
+          </a:solidFill>
+          <a:ln>
+            <a:noFill/>
+          </a:ln>
+        </p:spPr>
+        <p:style>
+          <a:lnRef idx="1">
+            <a:schemeClr val="accent1"/>
+          </a:lnRef>
+          <a:fillRef idx="3">
+            <a:schemeClr val="accent1"/>
+          </a:fillRef>
+          <a:effectRef idx="2">
+            <a:schemeClr val="accent1"/>
+          </a:effectRef>
+          <a:fontRef idx="minor">
+            <a:schemeClr val="lt1"/>
+          </a:fontRef>
+        </p:style>
+        <p:txBody>
+          <a:bodyPr rtlCol="0" anchor="ctr" lIns="182880" tIns="137160"/>
+          <a:lstStyle/>
+          <a:p>
+            <a:pPr algn="ctr">
+              <a:spcAft>
+                <a:spcPts val="1200"/>
+              </a:spcAft>
+              <a:defRPr sz="2400" b="1">
+                <a:solidFill>
+                  <a:srgbClr val="FFFFFF"/>
+                </a:solidFill>
+              </a:defRPr>
+            </a:pPr>
+            <a:r>
+              <a:t>Ejecución de Tests</a:t>
+            </a:r>
+          </a:p>
+          <a:p>
+            <a:pPr>
+              <a:spcAft>
+                <a:spcPts val="800"/>
+              </a:spcAft>
+              <a:defRPr sz="2000">
+                <a:solidFill>
+                  <a:srgbClr val="FFFFFF"/>
+                </a:solidFill>
+              </a:defRPr>
+            </a:pPr>
+            <a:r>
+              <a:t>Total de pruebas: 33</a:t>
+            </a:r>
+          </a:p>
+          <a:p>
+            <a:pPr>
+              <a:spcAft>
+                <a:spcPts val="800"/>
+              </a:spcAft>
+              <a:defRPr sz="2000">
+                <a:solidFill>
+                  <a:srgbClr val="FFFFFF"/>
+                </a:solidFill>
+              </a:defRPr>
+            </a:pPr>
+            <a:r>
+              <a:t>Pasando: 33 (100%)</a:t>
+            </a:r>
+          </a:p>
+          <a:p>
+            <a:pPr>
+              <a:spcAft>
+                <a:spcPts val="800"/>
+              </a:spcAft>
+              <a:defRPr sz="2000">
+                <a:solidFill>
+                  <a:srgbClr val="FFFFFF"/>
+                </a:solidFill>
+              </a:defRPr>
+            </a:pPr>
+            <a:r>
+              <a:t>Fallando: 0 (0%)</a:t>
+            </a:r>
+          </a:p>
+          <a:p>
+            <a:br/>
+            <a:pPr algn="ctr">
+              <a:defRPr sz="2800" b="1">
+                <a:solidFill>
+                  <a:srgbClr val="FFFFFF"/>
+                </a:solidFill>
+              </a:defRPr>
+            </a:pPr>
+            <a:r>
+              <a:t>✓ EXITOSO</a:t>
+            </a:r>
+          </a:p>
+        </p:txBody>
+      </p:sp>
+      <p:sp>
+        <p:nvSpPr>
+          <p:cNvPr id="5" name="Rounded Rectangle 4"/>
+          <p:cNvSpPr/>
+          <p:nvPr/>
+        </p:nvSpPr>
+        <p:spPr>
+          <a:xfrm>
+            <a:off x="6217920" y="1645920"/>
+            <a:ext cx="5029200" cy="1828800"/>
+          </a:xfrm>
+          <a:prstGeom prst="roundRect">
+            <a:avLst/>
+          </a:prstGeom>
+          <a:solidFill>
+            <a:srgbClr val="F5F5F0"/>
+          </a:solidFill>
+          <a:ln w="25400">
+            <a:solidFill>
+              <a:srgbClr val="B8860B"/>
+            </a:solidFill>
+          </a:ln>
+        </p:spPr>
+        <p:style>
+          <a:lnRef idx="1">
+            <a:schemeClr val="accent1"/>
+          </a:lnRef>
+          <a:fillRef idx="3">
+            <a:schemeClr val="accent1"/>
+          </a:fillRef>
+          <a:effectRef idx="2">
+            <a:schemeClr val="accent1"/>
+          </a:effectRef>
+          <a:fontRef idx="minor">
+            <a:schemeClr val="lt1"/>
+          </a:fontRef>
+        </p:style>
+        <p:txBody>
+          <a:bodyPr rtlCol="0" anchor="ctr" lIns="182880" tIns="137160"/>
+          <a:lstStyle/>
+          <a:p>
+            <a:pPr algn="ctr">
+              <a:spcAft>
+                <a:spcPts val="1200"/>
+              </a:spcAft>
+              <a:defRPr sz="2400" b="1">
+                <a:solidFill>
+                  <a:srgbClr val="B8860B"/>
+                </a:solidFill>
+              </a:defRPr>
+            </a:pPr>
+            <a:r>
+              <a:t>Cobertura de Código</a:t>
+            </a:r>
+          </a:p>
+          <a:p>
+            <a:pPr>
+              <a:spcAft>
+                <a:spcPts val="600"/>
+              </a:spcAft>
+              <a:defRPr sz="1800">
+                <a:solidFill>
+                  <a:srgbClr val="333333"/>
+                </a:solidFill>
+              </a:defRPr>
+            </a:pPr>
+            <a:r>
+              <a:t>Total: 44.39%</a:t>
+            </a:r>
+          </a:p>
+          <a:p>
+            <a:pPr>
+              <a:spcAft>
+                <a:spcPts val="600"/>
+              </a:spcAft>
+              <a:defRPr sz="1800">
+                <a:solidFill>
+                  <a:srgbClr val="333333"/>
+                </a:solidFill>
+              </a:defRPr>
+            </a:pPr>
+            <a:r>
+              <a:t>Middleware: 82.14%</a:t>
+            </a:r>
+          </a:p>
+          <a:p>
+            <a:pPr>
+              <a:spcAft>
+                <a:spcPts val="600"/>
+              </a:spcAft>
+              <a:defRPr sz="1800">
+                <a:solidFill>
+                  <a:srgbClr val="333333"/>
+                </a:solidFill>
+              </a:defRPr>
+            </a:pPr>
+            <a:r>
+              <a:t>Models: 71.73%</a:t>
+            </a:r>
+          </a:p>
+          <a:p>
+            <a:pPr>
+              <a:spcAft>
+                <a:spcPts val="600"/>
+              </a:spcAft>
+              <a:defRPr sz="1800">
+                <a:solidFill>
+                  <a:srgbClr val="333333"/>
+                </a:solidFill>
+              </a:defRPr>
+            </a:pPr>
+            <a:r>
+              <a:t>Routes: 68.10%</a:t>
+            </a:r>
+          </a:p>
+          <a:p>
+            <a:pPr>
+              <a:spcAft>
+                <a:spcPts val="600"/>
+              </a:spcAft>
+              <a:defRPr sz="1800">
+                <a:solidFill>
+                  <a:srgbClr val="333333"/>
+                </a:solidFill>
+              </a:defRPr>
+            </a:pPr>
+            <a:r>
+              <a:t>Controllers: 29.67%</a:t>
+            </a:r>
+          </a:p>
+        </p:txBody>
+      </p:sp>
+      <p:sp>
+        <p:nvSpPr>
+          <p:cNvPr id="6" name="Rounded Rectangle 5"/>
+          <p:cNvSpPr/>
+          <p:nvPr/>
+        </p:nvSpPr>
+        <p:spPr>
+          <a:xfrm>
+            <a:off x="914400" y="3840480"/>
+            <a:ext cx="10362895" cy="1371600"/>
+          </a:xfrm>
+          <a:prstGeom prst="roundRect">
+            <a:avLst/>
+          </a:prstGeom>
+          <a:solidFill>
+            <a:srgbClr val="FF9800"/>
+          </a:solidFill>
+          <a:ln>
+            <a:noFill/>
+          </a:ln>
+        </p:spPr>
+        <p:style>
+          <a:lnRef idx="1">
+            <a:schemeClr val="accent1"/>
+          </a:lnRef>
+          <a:fillRef idx="3">
+            <a:schemeClr val="accent1"/>
+          </a:fillRef>
+          <a:effectRef idx="2">
+            <a:schemeClr val="accent1"/>
+          </a:effectRef>
+          <a:fontRef idx="minor">
+            <a:schemeClr val="lt1"/>
+          </a:fontRef>
+        </p:style>
+        <p:txBody>
+          <a:bodyPr rtlCol="0" anchor="ctr" lIns="182880" tIns="137160"/>
+          <a:lstStyle/>
+          <a:p>
+            <a:pPr algn="ctr">
+              <a:spcAft>
+                <a:spcPts val="600"/>
+              </a:spcAft>
+              <a:defRPr sz="2000" b="1">
+                <a:solidFill>
+                  <a:srgbClr val="FFFFFF"/>
+                </a:solidFill>
+              </a:defRPr>
+            </a:pPr>
+            <a:r>
+              <a:t>Análisis</a:t>
+            </a:r>
+          </a:p>
+          <a:p>
+            <a:pPr>
+              <a:defRPr sz="1800">
+                <a:solidFill>
+                  <a:srgbClr val="FFFFFF"/>
+                </a:solidFill>
+              </a:defRPr>
+            </a:pPr>
+            <a:r>
+              <a:t>Cobertura adecuada para escala del proyecto. Product.js alcanza 100%. Controllers requieren mayor cobertura debido a integraciones externas.</a:t>
+            </a:r>
+          </a:p>
+        </p:txBody>
+      </p:sp>
+    </p:spTree>
+  </p:cSld>
+  <p:clrMapOvr>
+    <a:masterClrMapping/>
+  </p:clrMapOvr>
+</p:sld>
+</file>
+
+<file path=ppt/slides/slide12.xml><?xml version="1.0" encoding="utf-8"?>
+<p:sld xmlns:a="http://schemas.openxmlformats.org/drawingml/2006/main" xmlns:p="http://schemas.openxmlformats.org/presentationml/2006/main" xmlns:r="http://schemas.openxmlformats.org/officeDocument/2006/relationships">
+  <p:cSld>
+    <p:spTree>
+      <p:nvGrpSpPr>
+        <p:cNvPr id="1" name=""/>
+        <p:cNvGrpSpPr/>
+        <p:nvPr/>
+      </p:nvGrpSpPr>
+      <p:grpSpPr/>
+      <p:sp>
+        <p:nvSpPr>
+          <p:cNvPr id="2" name="Rectangle 1"/>
+          <p:cNvSpPr/>
+          <p:nvPr/>
+        </p:nvSpPr>
+        <p:spPr>
+          <a:xfrm>
+            <a:off x="0" y="0"/>
+            <a:ext cx="12191695" cy="1097280"/>
+          </a:xfrm>
+          <a:prstGeom prst="rect">
+            <a:avLst/>
+          </a:prstGeom>
+          <a:solidFill>
+            <a:srgbClr val="B8860B"/>
+          </a:solidFill>
+          <a:ln>
+            <a:noFill/>
+          </a:ln>
+        </p:spPr>
+        <p:style>
+          <a:lnRef idx="1">
+            <a:schemeClr val="accent1"/>
+          </a:lnRef>
+          <a:fillRef idx="3">
+            <a:schemeClr val="accent1"/>
+          </a:fillRef>
+          <a:effectRef idx="2">
+            <a:schemeClr val="accent1"/>
+          </a:effectRef>
+          <a:fontRef idx="minor">
+            <a:schemeClr val="lt1"/>
+          </a:fontRef>
+        </p:style>
+        <p:txBody>
+          <a:bodyPr rtlCol="0" anchor="ctr"/>
+          <a:lstStyle/>
+          <a:p>
+            <a:pPr algn="ctr"/>
+          </a:p>
+        </p:txBody>
+      </p:sp>
+      <p:sp>
+        <p:nvSpPr>
+          <p:cNvPr id="3" name="TextBox 2"/>
+          <p:cNvSpPr txBox="1"/>
+          <p:nvPr/>
+        </p:nvSpPr>
+        <p:spPr>
+          <a:xfrm>
+            <a:off x="457200" y="182880"/>
+            <a:ext cx="11277295" cy="731520"/>
+          </a:xfrm>
+          <a:prstGeom prst="rect">
+            <a:avLst/>
+          </a:prstGeom>
+          <a:noFill/>
+        </p:spPr>
+        <p:txBody>
+          <a:bodyPr wrap="none" anchor="ctr">
+            <a:spAutoFit/>
+          </a:bodyPr>
+          <a:lstStyle/>
+          <a:p>
+            <a:pPr algn="l">
+              <a:defRPr sz="3600" b="1">
+                <a:solidFill>
+                  <a:srgbClr val="FFFFFF"/>
+                </a:solidFill>
+              </a:defRPr>
+            </a:pPr>
+            <a:r>
+              <a:t>Resultados - Pruebas Frontend (Cypress)</a:t>
+            </a:r>
+          </a:p>
+        </p:txBody>
+      </p:sp>
+      <p:sp>
+        <p:nvSpPr>
+          <p:cNvPr id="4" name="Rounded Rectangle 3"/>
+          <p:cNvSpPr/>
+          <p:nvPr/>
+        </p:nvSpPr>
+        <p:spPr>
+          <a:xfrm>
+            <a:off x="731520" y="1645920"/>
+            <a:ext cx="5029200" cy="2286000"/>
+          </a:xfrm>
+          <a:prstGeom prst="roundRect">
+            <a:avLst/>
+          </a:prstGeom>
+          <a:solidFill>
+            <a:srgbClr val="F5F5F0"/>
+          </a:solidFill>
+          <a:ln w="25400">
+            <a:solidFill>
+              <a:srgbClr val="B8860B"/>
+            </a:solidFill>
+          </a:ln>
+        </p:spPr>
+        <p:style>
+          <a:lnRef idx="1">
+            <a:schemeClr val="accent1"/>
+          </a:lnRef>
+          <a:fillRef idx="3">
+            <a:schemeClr val="accent1"/>
+          </a:fillRef>
+          <a:effectRef idx="2">
+            <a:schemeClr val="accent1"/>
+          </a:effectRef>
+          <a:fontRef idx="minor">
+            <a:schemeClr val="lt1"/>
+          </a:fontRef>
+        </p:style>
+        <p:txBody>
+          <a:bodyPr rtlCol="0" anchor="ctr" lIns="182880" tIns="137160"/>
+          <a:lstStyle/>
+          <a:p>
+            <a:pPr algn="ctr">
+              <a:spcAft>
+                <a:spcPts val="1200"/>
+              </a:spcAft>
+              <a:defRPr sz="2400" b="1">
+                <a:solidFill>
+                  <a:srgbClr val="B8860B"/>
+                </a:solidFill>
+              </a:defRPr>
+            </a:pPr>
+            <a:r>
+              <a:t>Ejecución de Tests E2E</a:t>
+            </a:r>
+          </a:p>
+          <a:p>
+            <a:pPr>
+              <a:spcAft>
+                <a:spcPts val="800"/>
+              </a:spcAft>
+              <a:defRPr sz="2000">
+                <a:solidFill>
+                  <a:srgbClr val="333333"/>
+                </a:solidFill>
+              </a:defRPr>
+            </a:pPr>
+            <a:r>
+              <a:t>Total de pruebas: 20</a:t>
+            </a:r>
+          </a:p>
+          <a:p>
+            <a:pPr>
+              <a:spcAft>
+                <a:spcPts val="800"/>
+              </a:spcAft>
+              <a:defRPr sz="2000">
+                <a:solidFill>
+                  <a:srgbClr val="333333"/>
+                </a:solidFill>
+              </a:defRPr>
+            </a:pPr>
+            <a:r>
+              <a:t>Pasando: 17 (85%)</a:t>
+            </a:r>
+          </a:p>
+          <a:p>
+            <a:pPr>
+              <a:spcAft>
+                <a:spcPts val="800"/>
+              </a:spcAft>
+              <a:defRPr sz="2000">
+                <a:solidFill>
+                  <a:srgbClr val="333333"/>
+                </a:solidFill>
+              </a:defRPr>
+            </a:pPr>
+            <a:r>
+              <a:t>Fallando: 3 (15%)</a:t>
+            </a:r>
+          </a:p>
+          <a:p>
+            <a:br/>
+            <a:pPr>
+              <a:spcAft>
+                <a:spcPts val="600"/>
+              </a:spcAft>
+              <a:defRPr sz="1800" b="1">
+                <a:solidFill>
+                  <a:srgbClr val="333333"/>
+                </a:solidFill>
+              </a:defRPr>
+            </a:pPr>
+            <a:r>
+              <a:t>Suites:</a:t>
+            </a:r>
+          </a:p>
+          <a:p>
+            <a:pPr>
+              <a:spcAft>
+                <a:spcPts val="400"/>
+              </a:spcAft>
+              <a:defRPr sz="1600">
+                <a:solidFill>
+                  <a:srgbClr val="333333"/>
+                </a:solidFill>
+              </a:defRPr>
+            </a:pPr>
+            <a:r>
+              <a:t>• auth.cy.js: 6/7 (85.7%)</a:t>
+            </a:r>
+          </a:p>
+          <a:p>
+            <a:pPr>
+              <a:spcAft>
+                <a:spcPts val="400"/>
+              </a:spcAft>
+              <a:defRPr sz="1600">
+                <a:solidFill>
+                  <a:srgbClr val="333333"/>
+                </a:solidFill>
+              </a:defRPr>
+            </a:pPr>
+            <a:r>
+              <a:t>• cart.cy.js: 4/5 (80%)</a:t>
+            </a:r>
+          </a:p>
+          <a:p>
+            <a:pPr>
+              <a:spcAft>
+                <a:spcPts val="400"/>
+              </a:spcAft>
+              <a:defRPr sz="1600">
+                <a:solidFill>
+                  <a:srgbClr val="333333"/>
+                </a:solidFill>
+              </a:defRPr>
+            </a:pPr>
+            <a:r>
+              <a:t>• catalog.cy.js: 7/8 (87.5%)</a:t>
+            </a:r>
+          </a:p>
+        </p:txBody>
+      </p:sp>
+      <p:sp>
+        <p:nvSpPr>
+          <p:cNvPr id="5" name="Rounded Rectangle 4"/>
+          <p:cNvSpPr/>
+          <p:nvPr/>
+        </p:nvSpPr>
+        <p:spPr>
+          <a:xfrm>
+            <a:off x="6217920" y="1645920"/>
+            <a:ext cx="5029200" cy="2286000"/>
+          </a:xfrm>
+          <a:prstGeom prst="roundRect">
+            <a:avLst/>
+          </a:prstGeom>
+          <a:solidFill>
+            <a:srgbClr val="F5F5F0"/>
+          </a:solidFill>
+          <a:ln w="25400">
+            <a:solidFill>
+              <a:srgbClr val="FF9800"/>
+            </a:solidFill>
+          </a:ln>
+        </p:spPr>
+        <p:style>
+          <a:lnRef idx="1">
+            <a:schemeClr val="accent1"/>
+          </a:lnRef>
+          <a:fillRef idx="3">
+            <a:schemeClr val="accent1"/>
+          </a:fillRef>
+          <a:effectRef idx="2">
+            <a:schemeClr val="accent1"/>
+          </a:effectRef>
+          <a:fontRef idx="minor">
+            <a:schemeClr val="lt1"/>
+          </a:fontRef>
+        </p:style>
+        <p:txBody>
+          <a:bodyPr rtlCol="0" anchor="ctr" lIns="182880" tIns="137160"/>
+          <a:lstStyle/>
+          <a:p>
+            <a:pPr algn="ctr">
+              <a:spcAft>
+                <a:spcPts val="800"/>
+              </a:spcAft>
+              <a:defRPr sz="2400" b="1">
+                <a:solidFill>
+                  <a:srgbClr val="FF9800"/>
+                </a:solidFill>
+              </a:defRPr>
+            </a:pPr>
+            <a:r>
+              <a:t>Análisis de Fallos</a:t>
+            </a:r>
+          </a:p>
+          <a:p>
+            <a:pPr>
+              <a:spcAft>
+                <a:spcPts val="1000"/>
+              </a:spcAft>
+              <a:defRPr sz="1600">
+                <a:solidFill>
+                  <a:srgbClr val="333333"/>
+                </a:solidFill>
+              </a:defRPr>
+            </a:pPr>
+            <a:r>
+              <a:t>Los 3 tests fallidos NO representan errores funcionales:</a:t>
+            </a:r>
+          </a:p>
+          <a:p>
+            <a:pPr>
+              <a:spcAft>
+                <a:spcPts val="600"/>
+              </a:spcAft>
+              <a:defRPr sz="1600">
+                <a:solidFill>
+                  <a:srgbClr val="333333"/>
+                </a:solidFill>
+              </a:defRPr>
+            </a:pPr>
+            <a:r>
+              <a:t>• UI-17: Cambio de texto a ícono</a:t>
+            </a:r>
+          </a:p>
+          <a:p>
+            <a:pPr>
+              <a:spcAft>
+                <a:spcPts val="600"/>
+              </a:spcAft>
+              <a:defRPr sz="1600">
+                <a:solidFill>
+                  <a:srgbClr val="333333"/>
+                </a:solidFill>
+              </a:defRPr>
+            </a:pPr>
+            <a:r>
+              <a:t>• UI-10: Dropdown en lugar de botón directo</a:t>
+            </a:r>
+          </a:p>
+          <a:p>
+            <a:pPr>
+              <a:spcAft>
+                <a:spcPts val="600"/>
+              </a:spcAft>
+              <a:defRPr sz="1600">
+                <a:solidFill>
+                  <a:srgbClr val="333333"/>
+                </a:solidFill>
+              </a:defRPr>
+            </a:pPr>
+            <a:r>
+              <a:t>• UI-04: Migración a Material-UI</a:t>
+            </a:r>
+          </a:p>
+          <a:p>
+            <a:br/>
+            <a:pPr>
+              <a:defRPr sz="2000" b="1">
+                <a:solidFill>
+                  <a:srgbClr val="4CAF50"/>
+                </a:solidFill>
+              </a:defRPr>
+            </a:pPr>
+            <a:r>
+              <a:t>✓ Funcionalidad: 100% operativa</a:t>
+            </a:r>
+          </a:p>
+        </p:txBody>
+      </p:sp>
+      <p:sp>
+        <p:nvSpPr>
+          <p:cNvPr id="6" name="Rounded Rectangle 5"/>
+          <p:cNvSpPr/>
+          <p:nvPr/>
+        </p:nvSpPr>
+        <p:spPr>
+          <a:xfrm>
+            <a:off x="2743200" y="4389120"/>
+            <a:ext cx="6705295" cy="1097280"/>
+          </a:xfrm>
+          <a:prstGeom prst="roundRect">
+            <a:avLst/>
+          </a:prstGeom>
+          <a:solidFill>
+            <a:srgbClr val="4CAF50"/>
+          </a:solidFill>
+          <a:ln>
+            <a:noFill/>
+          </a:ln>
+        </p:spPr>
+        <p:style>
+          <a:lnRef idx="1">
+            <a:schemeClr val="accent1"/>
+          </a:lnRef>
+          <a:fillRef idx="3">
+            <a:schemeClr val="accent1"/>
+          </a:fillRef>
+          <a:effectRef idx="2">
+            <a:schemeClr val="accent1"/>
+          </a:effectRef>
+          <a:fontRef idx="minor">
+            <a:schemeClr val="lt1"/>
+          </a:fontRef>
+        </p:style>
+        <p:txBody>
+          <a:bodyPr rtlCol="0" anchor="ctr"/>
+          <a:lstStyle/>
+          <a:p>
+            <a:pPr algn="ctr">
+              <a:defRPr sz="2800" b="1">
+                <a:solidFill>
+                  <a:srgbClr val="FFFFFF"/>
+                </a:solidFill>
+              </a:defRPr>
+            </a:pPr>
+            <a:r>
+              <a:t>Tasa de éxito global: 94.3% (50/53 tests)</a:t>
+            </a:r>
+          </a:p>
+        </p:txBody>
+      </p:sp>
+    </p:spTree>
+  </p:cSld>
+  <p:clrMapOvr>
+    <a:masterClrMapping/>
+  </p:clrMapOvr>
+</p:sld>
+</file>
+
+<file path=ppt/slides/slide13.xml><?xml version="1.0" encoding="utf-8"?>
+<p:sld xmlns:a="http://schemas.openxmlformats.org/drawingml/2006/main" xmlns:p="http://schemas.openxmlformats.org/presentationml/2006/main" xmlns:r="http://schemas.openxmlformats.org/officeDocument/2006/relationships">
+  <p:cSld>
+    <p:spTree>
+      <p:nvGrpSpPr>
+        <p:cNvPr id="1" name=""/>
+        <p:cNvGrpSpPr/>
+        <p:nvPr/>
+      </p:nvGrpSpPr>
+      <p:grpSpPr/>
+      <p:sp>
+        <p:nvSpPr>
+          <p:cNvPr id="2" name="Rectangle 1"/>
+          <p:cNvSpPr/>
+          <p:nvPr/>
+        </p:nvSpPr>
+        <p:spPr>
+          <a:xfrm>
+            <a:off x="0" y="0"/>
+            <a:ext cx="12191695" cy="1097280"/>
+          </a:xfrm>
+          <a:prstGeom prst="rect">
+            <a:avLst/>
+          </a:prstGeom>
+          <a:solidFill>
+            <a:srgbClr val="B8860B"/>
+          </a:solidFill>
+          <a:ln>
+            <a:noFill/>
+          </a:ln>
+        </p:spPr>
+        <p:style>
+          <a:lnRef idx="1">
+            <a:schemeClr val="accent1"/>
+          </a:lnRef>
+          <a:fillRef idx="3">
+            <a:schemeClr val="accent1"/>
+          </a:fillRef>
+          <a:effectRef idx="2">
+            <a:schemeClr val="accent1"/>
+          </a:effectRef>
+          <a:fontRef idx="minor">
+            <a:schemeClr val="lt1"/>
+          </a:fontRef>
+        </p:style>
+        <p:txBody>
+          <a:bodyPr rtlCol="0" anchor="ctr"/>
+          <a:lstStyle/>
+          <a:p>
+            <a:pPr algn="ctr"/>
+          </a:p>
+        </p:txBody>
+      </p:sp>
+      <p:sp>
+        <p:nvSpPr>
+          <p:cNvPr id="3" name="TextBox 2"/>
+          <p:cNvSpPr txBox="1"/>
+          <p:nvPr/>
+        </p:nvSpPr>
+        <p:spPr>
+          <a:xfrm>
+            <a:off x="457200" y="182880"/>
+            <a:ext cx="11277295" cy="731520"/>
+          </a:xfrm>
+          <a:prstGeom prst="rect">
+            <a:avLst/>
+          </a:prstGeom>
+          <a:noFill/>
+        </p:spPr>
+        <p:txBody>
+          <a:bodyPr wrap="none" anchor="ctr">
+            <a:spAutoFit/>
+          </a:bodyPr>
+          <a:lstStyle/>
+          <a:p>
+            <a:pPr algn="l">
+              <a:defRPr sz="3600" b="1">
+                <a:solidFill>
+                  <a:srgbClr val="FFFFFF"/>
+                </a:solidFill>
+              </a:defRPr>
+            </a:pPr>
+            <a:r>
+              <a:t>Test de Usabilidad - Metodología</a:t>
+            </a:r>
+          </a:p>
+        </p:txBody>
+      </p:sp>
+      <p:sp>
+        <p:nvSpPr>
+          <p:cNvPr id="4" name="Rounded Rectangle 3"/>
+          <p:cNvSpPr/>
+          <p:nvPr/>
+        </p:nvSpPr>
+        <p:spPr>
+          <a:xfrm>
+            <a:off x="914400" y="1371600"/>
+            <a:ext cx="10362895" cy="731520"/>
+          </a:xfrm>
+          <a:prstGeom prst="roundRect">
+            <a:avLst/>
+          </a:prstGeom>
+          <a:solidFill>
+            <a:srgbClr val="B8860B"/>
+          </a:solidFill>
+          <a:ln>
+            <a:noFill/>
+          </a:ln>
+        </p:spPr>
+        <p:style>
+          <a:lnRef idx="1">
+            <a:schemeClr val="accent1"/>
+          </a:lnRef>
+          <a:fillRef idx="3">
+            <a:schemeClr val="accent1"/>
+          </a:fillRef>
+          <a:effectRef idx="2">
+            <a:schemeClr val="accent1"/>
+          </a:effectRef>
+          <a:fontRef idx="minor">
+            <a:schemeClr val="lt1"/>
+          </a:fontRef>
+        </p:style>
+        <p:txBody>
+          <a:bodyPr rtlCol="0" anchor="ctr"/>
+          <a:lstStyle/>
+          <a:p>
+            <a:pPr algn="ctr">
+              <a:defRPr sz="2000" b="1">
+                <a:solidFill>
+                  <a:srgbClr val="FFFFFF"/>
+                </a:solidFill>
+              </a:defRPr>
+            </a:pPr>
+            <a:r>
+              <a:t>System Usability Scale (SUS) - Estándar de la industria para medir usabilidad percibida</a:t>
+            </a:r>
+          </a:p>
+        </p:txBody>
+      </p:sp>
+      <p:sp>
+        <p:nvSpPr>
+          <p:cNvPr id="5" name="TextBox 4"/>
+          <p:cNvSpPr txBox="1"/>
+          <p:nvPr/>
+        </p:nvSpPr>
+        <p:spPr>
+          <a:xfrm>
+            <a:off x="1371600" y="2560320"/>
+            <a:ext cx="9144000" cy="1371600"/>
+          </a:xfrm>
+          <a:prstGeom prst="rect">
+            <a:avLst/>
+          </a:prstGeom>
+          <a:noFill/>
+        </p:spPr>
+        <p:txBody>
+          <a:bodyPr wrap="none">
+            <a:spAutoFit/>
+          </a:bodyPr>
+          <a:lstStyle/>
+          <a:p>
+            <a:pPr>
+              <a:spcAft>
+                <a:spcPts val="1000"/>
+              </a:spcAft>
+              <a:defRPr sz="2200" b="1">
+                <a:solidFill>
+                  <a:srgbClr val="333333"/>
+                </a:solidFill>
+              </a:defRPr>
+            </a:pPr>
+            <a:r>
+              <a:t>Participantes:</a:t>
+            </a:r>
+          </a:p>
+          <a:p>
+            <a:pPr>
+              <a:spcAft>
+                <a:spcPts val="800"/>
+              </a:spcAft>
+              <a:defRPr sz="1800">
+                <a:solidFill>
+                  <a:srgbClr val="333333"/>
+                </a:solidFill>
+              </a:defRPr>
+            </a:pPr>
+            <a:r>
+              <a:t>• Usuario 1: Mujer, 28 años, Contadora, experiencia moderada en compras online</a:t>
+            </a:r>
+          </a:p>
+          <a:p>
+            <a:pPr>
+              <a:spcAft>
+                <a:spcPts val="800"/>
+              </a:spcAft>
+              <a:defRPr sz="1800">
+                <a:solidFill>
+                  <a:srgbClr val="333333"/>
+                </a:solidFill>
+              </a:defRPr>
+            </a:pPr>
+            <a:r>
+              <a:t>• Usuario 2: Hombre, 35 años, Ingeniero, experiencia experta en compras online</a:t>
+            </a:r>
+          </a:p>
+        </p:txBody>
+      </p:sp>
+      <p:sp>
+        <p:nvSpPr>
+          <p:cNvPr id="6" name="TextBox 5"/>
+          <p:cNvSpPr txBox="1"/>
+          <p:nvPr/>
+        </p:nvSpPr>
+        <p:spPr>
+          <a:xfrm>
+            <a:off x="1371600" y="4114800"/>
+            <a:ext cx="9144000" cy="1828800"/>
+          </a:xfrm>
+          <a:prstGeom prst="rect">
+            <a:avLst/>
+          </a:prstGeom>
+          <a:noFill/>
+        </p:spPr>
+        <p:txBody>
+          <a:bodyPr wrap="none">
+            <a:spAutoFit/>
+          </a:bodyPr>
+          <a:lstStyle/>
+          <a:p>
+            <a:pPr>
+              <a:spcAft>
+                <a:spcPts val="1000"/>
+              </a:spcAft>
+              <a:defRPr sz="2200" b="1">
+                <a:solidFill>
+                  <a:srgbClr val="333333"/>
+                </a:solidFill>
+              </a:defRPr>
+            </a:pPr>
+            <a:r>
+              <a:t>Tareas Evaluadas:</a:t>
+            </a:r>
+          </a:p>
+          <a:p>
+            <a:pPr>
+              <a:spcAft>
+                <a:spcPts val="600"/>
+              </a:spcAft>
+              <a:defRPr sz="1800">
+                <a:solidFill>
+                  <a:srgbClr val="333333"/>
+                </a:solidFill>
+              </a:defRPr>
+            </a:pPr>
+            <a:r>
+              <a:t>1. Registro en la plataforma</a:t>
+            </a:r>
+          </a:p>
+          <a:p>
+            <a:pPr>
+              <a:spcAft>
+                <a:spcPts val="600"/>
+              </a:spcAft>
+              <a:defRPr sz="1800">
+                <a:solidFill>
+                  <a:srgbClr val="333333"/>
+                </a:solidFill>
+              </a:defRPr>
+            </a:pPr>
+            <a:r>
+              <a:t>2. Explorar catálogo de perfumes</a:t>
+            </a:r>
+          </a:p>
+          <a:p>
+            <a:pPr>
+              <a:spcAft>
+                <a:spcPts val="600"/>
+              </a:spcAft>
+              <a:defRPr sz="1800">
+                <a:solidFill>
+                  <a:srgbClr val="333333"/>
+                </a:solidFill>
+              </a:defRPr>
+            </a:pPr>
+            <a:r>
+              <a:t>3. Agregar producto al carrito</a:t>
+            </a:r>
+          </a:p>
+          <a:p>
+            <a:pPr>
+              <a:spcAft>
+                <a:spcPts val="600"/>
+              </a:spcAft>
+              <a:defRPr sz="1800">
+                <a:solidFill>
+                  <a:srgbClr val="333333"/>
+                </a:solidFill>
+              </a:defRPr>
+            </a:pPr>
+            <a:r>
+              <a:t>4. Revisar y modificar carrito</a:t>
+            </a:r>
+          </a:p>
+          <a:p>
+            <a:pPr>
+              <a:spcAft>
+                <a:spcPts val="600"/>
+              </a:spcAft>
+              <a:defRPr sz="1800">
+                <a:solidFill>
+                  <a:srgbClr val="333333"/>
+                </a:solidFill>
+              </a:defRPr>
+            </a:pPr>
+            <a:r>
+              <a:t>5. Proceso de checkout</a:t>
+            </a:r>
+          </a:p>
+          <a:p>
+            <a:pPr>
+              <a:spcAft>
+                <a:spcPts val="600"/>
+              </a:spcAft>
+              <a:defRPr sz="1800">
+                <a:solidFill>
+                  <a:srgbClr val="333333"/>
+                </a:solidFill>
+              </a:defRPr>
+            </a:pPr>
+            <a:r>
+              <a:t>6. Encontrar información de contacto</a:t>
+            </a:r>
+          </a:p>
+        </p:txBody>
+      </p:sp>
+    </p:spTree>
+  </p:cSld>
+  <p:clrMapOvr>
+    <a:masterClrMapping/>
+  </p:clrMapOvr>
+</p:sld>
+</file>
+
+<file path=ppt/slides/slide14.xml><?xml version="1.0" encoding="utf-8"?>
+<p:sld xmlns:a="http://schemas.openxmlformats.org/drawingml/2006/main" xmlns:p="http://schemas.openxmlformats.org/presentationml/2006/main" xmlns:r="http://schemas.openxmlformats.org/officeDocument/2006/relationships">
+  <p:cSld>
+    <p:spTree>
+      <p:nvGrpSpPr>
+        <p:cNvPr id="1" name=""/>
+        <p:cNvGrpSpPr/>
+        <p:nvPr/>
+      </p:nvGrpSpPr>
+      <p:grpSpPr/>
+      <p:sp>
+        <p:nvSpPr>
+          <p:cNvPr id="2" name="Rectangle 1"/>
+          <p:cNvSpPr/>
+          <p:nvPr/>
+        </p:nvSpPr>
+        <p:spPr>
+          <a:xfrm>
+            <a:off x="0" y="0"/>
+            <a:ext cx="12191695" cy="1097280"/>
+          </a:xfrm>
+          <a:prstGeom prst="rect">
+            <a:avLst/>
+          </a:prstGeom>
+          <a:solidFill>
+            <a:srgbClr val="B8860B"/>
+          </a:solidFill>
+          <a:ln>
+            <a:noFill/>
+          </a:ln>
+        </p:spPr>
+        <p:style>
+          <a:lnRef idx="1">
+            <a:schemeClr val="accent1"/>
+          </a:lnRef>
+          <a:fillRef idx="3">
+            <a:schemeClr val="accent1"/>
+          </a:fillRef>
+          <a:effectRef idx="2">
+            <a:schemeClr val="accent1"/>
+          </a:effectRef>
+          <a:fontRef idx="minor">
+            <a:schemeClr val="lt1"/>
+          </a:fontRef>
+        </p:style>
+        <p:txBody>
+          <a:bodyPr rtlCol="0" anchor="ctr"/>
+          <a:lstStyle/>
+          <a:p>
+            <a:pPr algn="ctr"/>
+          </a:p>
+        </p:txBody>
+      </p:sp>
+      <p:sp>
+        <p:nvSpPr>
+          <p:cNvPr id="3" name="TextBox 2"/>
+          <p:cNvSpPr txBox="1"/>
+          <p:nvPr/>
+        </p:nvSpPr>
+        <p:spPr>
+          <a:xfrm>
+            <a:off x="457200" y="182880"/>
+            <a:ext cx="11277295" cy="731520"/>
+          </a:xfrm>
+          <a:prstGeom prst="rect">
+            <a:avLst/>
+          </a:prstGeom>
+          <a:noFill/>
+        </p:spPr>
+        <p:txBody>
+          <a:bodyPr wrap="none" anchor="ctr">
+            <a:spAutoFit/>
+          </a:bodyPr>
+          <a:lstStyle/>
+          <a:p>
+            <a:pPr algn="l">
+              <a:defRPr sz="3600" b="1">
+                <a:solidFill>
+                  <a:srgbClr val="FFFFFF"/>
+                </a:solidFill>
+              </a:defRPr>
+            </a:pPr>
+            <a:r>
+              <a:t>Resultados del Test de Usabilidad</a:t>
+            </a:r>
+          </a:p>
+        </p:txBody>
+      </p:sp>
+      <p:sp>
+        <p:nvSpPr>
+          <p:cNvPr id="4" name="Rounded Rectangle 3"/>
+          <p:cNvSpPr/>
+          <p:nvPr/>
+        </p:nvSpPr>
+        <p:spPr>
+          <a:xfrm>
+            <a:off x="731520" y="1645920"/>
+            <a:ext cx="5029200" cy="2286000"/>
+          </a:xfrm>
+          <a:prstGeom prst="roundRect">
+            <a:avLst/>
+          </a:prstGeom>
+          <a:solidFill>
+            <a:srgbClr val="4CAF50"/>
+          </a:solidFill>
+          <a:ln>
+            <a:noFill/>
+          </a:ln>
+        </p:spPr>
+        <p:style>
+          <a:lnRef idx="1">
+            <a:schemeClr val="accent1"/>
+          </a:lnRef>
+          <a:fillRef idx="3">
+            <a:schemeClr val="accent1"/>
+          </a:fillRef>
+          <a:effectRef idx="2">
+            <a:schemeClr val="accent1"/>
+          </a:effectRef>
+          <a:fontRef idx="minor">
+            <a:schemeClr val="lt1"/>
+          </a:fontRef>
+        </p:style>
+        <p:txBody>
+          <a:bodyPr rtlCol="0" anchor="ctr" lIns="182880" tIns="137160"/>
+          <a:lstStyle/>
+          <a:p>
+            <a:pPr algn="ctr">
+              <a:spcAft>
+                <a:spcPts val="1200"/>
+              </a:spcAft>
+              <a:defRPr sz="2800" b="1">
+                <a:solidFill>
+                  <a:srgbClr val="FFFFFF"/>
+                </a:solidFill>
+              </a:defRPr>
+            </a:pPr>
+            <a:r>
+              <a:t>Puntuación SUS</a:t>
+            </a:r>
+          </a:p>
+          <a:p>
+            <a:pPr algn="ctr">
+              <a:spcAft>
+                <a:spcPts val="800"/>
+              </a:spcAft>
+              <a:defRPr sz="2200">
+                <a:solidFill>
+                  <a:srgbClr val="FFFFFF"/>
+                </a:solidFill>
+              </a:defRPr>
+            </a:pPr>
+            <a:r>
+              <a:t>Usuario 1: 75.0/100</a:t>
+            </a:r>
+          </a:p>
+          <a:p>
+            <a:pPr algn="ctr">
+              <a:spcAft>
+                <a:spcPts val="800"/>
+              </a:spcAft>
+              <a:defRPr sz="2200">
+                <a:solidFill>
+                  <a:srgbClr val="FFFFFF"/>
+                </a:solidFill>
+              </a:defRPr>
+            </a:pPr>
+            <a:r>
+              <a:t>Usuario 2: 85.0/100</a:t>
+            </a:r>
+          </a:p>
+          <a:p>
+            <a:br/>
+            <a:pPr algn="ctr">
+              <a:spcAft>
+                <a:spcPts val="1000"/>
+              </a:spcAft>
+              <a:defRPr sz="3200" b="1">
+                <a:solidFill>
+                  <a:srgbClr val="FFFFFF"/>
+                </a:solidFill>
+              </a:defRPr>
+            </a:pPr>
+            <a:r>
+              <a:t>Promedio: 80.0/100</a:t>
+            </a:r>
+          </a:p>
+          <a:p>
+            <a:pPr algn="ctr">
+              <a:defRPr sz="2000">
+                <a:solidFill>
+                  <a:srgbClr val="FFFFFF"/>
+                </a:solidFill>
+              </a:defRPr>
+            </a:pPr>
+            <a:r>
+              <a:t>✓ Cumple objetivo (≥ 80)</a:t>
+            </a:r>
+          </a:p>
+        </p:txBody>
+      </p:sp>
+      <p:sp>
+        <p:nvSpPr>
+          <p:cNvPr id="5" name="TextBox 4"/>
+          <p:cNvSpPr txBox="1"/>
+          <p:nvPr/>
+        </p:nvSpPr>
+        <p:spPr>
+          <a:xfrm>
+            <a:off x="6217920" y="1645920"/>
+            <a:ext cx="5029200" cy="2286000"/>
+          </a:xfrm>
+          <a:prstGeom prst="rect">
+            <a:avLst/>
+          </a:prstGeom>
+          <a:noFill/>
+        </p:spPr>
+        <p:txBody>
+          <a:bodyPr wrap="none">
+            <a:spAutoFit/>
+          </a:bodyPr>
+          <a:lstStyle/>
+          <a:p>
+            <a:pPr>
+              <a:spcAft>
+                <a:spcPts val="1200"/>
+              </a:spcAft>
+              <a:defRPr sz="2200" b="1">
+                <a:solidFill>
+                  <a:srgbClr val="B8860B"/>
+                </a:solidFill>
+              </a:defRPr>
+            </a:pPr>
+            <a:r>
+              <a:t>Tiempos de Completación</a:t>
+            </a:r>
+          </a:p>
+          <a:p>
+            <a:pPr>
+              <a:spcAft>
+                <a:spcPts val="600"/>
+              </a:spcAft>
+              <a:defRPr sz="1800">
+                <a:solidFill>
+                  <a:srgbClr val="333333"/>
+                </a:solidFill>
+              </a:defRPr>
+            </a:pPr>
+            <a:r>
+              <a:t>Registro: 2.1 min</a:t>
+            </a:r>
+          </a:p>
+          <a:p>
+            <a:pPr>
+              <a:spcAft>
+                <a:spcPts val="600"/>
+              </a:spcAft>
+              <a:defRPr sz="1800">
+                <a:solidFill>
+                  <a:srgbClr val="333333"/>
+                </a:solidFill>
+              </a:defRPr>
+            </a:pPr>
+            <a:r>
+              <a:t>Catálogo: 2.5 min</a:t>
+            </a:r>
+          </a:p>
+          <a:p>
+            <a:pPr>
+              <a:spcAft>
+                <a:spcPts val="600"/>
+              </a:spcAft>
+              <a:defRPr sz="1800">
+                <a:solidFill>
+                  <a:srgbClr val="333333"/>
+                </a:solidFill>
+              </a:defRPr>
+            </a:pPr>
+            <a:r>
+              <a:t>Agregar: 1.55 min</a:t>
+            </a:r>
+          </a:p>
+          <a:p>
+            <a:pPr>
+              <a:spcAft>
+                <a:spcPts val="600"/>
+              </a:spcAft>
+              <a:defRPr sz="1800">
+                <a:solidFill>
+                  <a:srgbClr val="333333"/>
+                </a:solidFill>
+              </a:defRPr>
+            </a:pPr>
+            <a:r>
+              <a:t>Carrito: 1.35 min</a:t>
+            </a:r>
+          </a:p>
+          <a:p>
+            <a:pPr>
+              <a:spcAft>
+                <a:spcPts val="600"/>
+              </a:spcAft>
+              <a:defRPr sz="1800">
+                <a:solidFill>
+                  <a:srgbClr val="333333"/>
+                </a:solidFill>
+              </a:defRPr>
+            </a:pPr>
+            <a:r>
+              <a:t>Checkout: 3.9 min</a:t>
+            </a:r>
+          </a:p>
+          <a:p>
+            <a:pPr>
+              <a:spcAft>
+                <a:spcPts val="600"/>
+              </a:spcAft>
+              <a:defRPr sz="1800">
+                <a:solidFill>
+                  <a:srgbClr val="333333"/>
+                </a:solidFill>
+              </a:defRPr>
+            </a:pPr>
+            <a:r>
+              <a:t>Contacto: 0.65 min</a:t>
+            </a:r>
+          </a:p>
+        </p:txBody>
+      </p:sp>
+      <p:sp>
+        <p:nvSpPr>
+          <p:cNvPr id="6" name="Rounded Rectangle 5"/>
+          <p:cNvSpPr/>
+          <p:nvPr/>
+        </p:nvSpPr>
+        <p:spPr>
+          <a:xfrm>
+            <a:off x="914400" y="4114800"/>
+            <a:ext cx="10362895" cy="1371600"/>
+          </a:xfrm>
+          <a:prstGeom prst="roundRect">
+            <a:avLst/>
+          </a:prstGeom>
+          <a:solidFill>
+            <a:srgbClr val="FF9800"/>
+          </a:solidFill>
+          <a:ln>
+            <a:noFill/>
+          </a:ln>
+        </p:spPr>
+        <p:style>
+          <a:lnRef idx="1">
+            <a:schemeClr val="accent1"/>
+          </a:lnRef>
+          <a:fillRef idx="3">
+            <a:schemeClr val="accent1"/>
+          </a:fillRef>
+          <a:effectRef idx="2">
+            <a:schemeClr val="accent1"/>
+          </a:effectRef>
+          <a:fontRef idx="minor">
+            <a:schemeClr val="lt1"/>
+          </a:fontRef>
+        </p:style>
+        <p:txBody>
+          <a:bodyPr rtlCol="0" anchor="ctr" lIns="182880" tIns="182880"/>
+          <a:lstStyle/>
+          <a:p>
+            <a:pPr algn="ctr">
+              <a:spcAft>
+                <a:spcPts val="800"/>
+              </a:spcAft>
+              <a:defRPr sz="2200" b="1">
+                <a:solidFill>
+                  <a:srgbClr val="FFFFFF"/>
+                </a:solidFill>
+              </a:defRPr>
+            </a:pPr>
+            <a:r>
+              <a:t>Hallazgo Principal</a:t>
+            </a:r>
+          </a:p>
+          <a:p>
+            <a:pPr>
+              <a:defRPr sz="2000">
+                <a:solidFill>
+                  <a:srgbClr val="FFFFFF"/>
+                </a:solidFill>
+              </a:defRPr>
+            </a:pPr>
+            <a:r>
+              <a:t>Ambos usuarios reportaron dificultad para encontrar el botón "Agregar al carrito" (oculto en menú dropdown)</a:t>
+            </a:r>
+          </a:p>
+        </p:txBody>
+      </p:sp>
+    </p:spTree>
+  </p:cSld>
+  <p:clrMapOvr>
+    <a:masterClrMapping/>
+  </p:clrMapOvr>
+</p:sld>
+</file>
+
+<file path=ppt/slides/slide15.xml><?xml version="1.0" encoding="utf-8"?>
+<p:sld xmlns:a="http://schemas.openxmlformats.org/drawingml/2006/main" xmlns:p="http://schemas.openxmlformats.org/presentationml/2006/main" xmlns:r="http://schemas.openxmlformats.org/officeDocument/2006/relationships">
+  <p:cSld>
+    <p:spTree>
+      <p:nvGrpSpPr>
+        <p:cNvPr id="1" name=""/>
+        <p:cNvGrpSpPr/>
+        <p:nvPr/>
+      </p:nvGrpSpPr>
+      <p:grpSpPr/>
+      <p:sp>
+        <p:nvSpPr>
+          <p:cNvPr id="2" name="Rectangle 1"/>
+          <p:cNvSpPr/>
+          <p:nvPr/>
+        </p:nvSpPr>
+        <p:spPr>
+          <a:xfrm>
+            <a:off x="0" y="0"/>
+            <a:ext cx="12191695" cy="1097280"/>
+          </a:xfrm>
+          <a:prstGeom prst="rect">
+            <a:avLst/>
+          </a:prstGeom>
+          <a:solidFill>
+            <a:srgbClr val="B8860B"/>
+          </a:solidFill>
+          <a:ln>
+            <a:noFill/>
+          </a:ln>
+        </p:spPr>
+        <p:style>
+          <a:lnRef idx="1">
+            <a:schemeClr val="accent1"/>
+          </a:lnRef>
+          <a:fillRef idx="3">
+            <a:schemeClr val="accent1"/>
+          </a:fillRef>
+          <a:effectRef idx="2">
+            <a:schemeClr val="accent1"/>
+          </a:effectRef>
+          <a:fontRef idx="minor">
+            <a:schemeClr val="lt1"/>
+          </a:fontRef>
+        </p:style>
+        <p:txBody>
+          <a:bodyPr rtlCol="0" anchor="ctr"/>
+          <a:lstStyle/>
+          <a:p>
+            <a:pPr algn="ctr"/>
+          </a:p>
+        </p:txBody>
+      </p:sp>
+      <p:sp>
+        <p:nvSpPr>
+          <p:cNvPr id="3" name="TextBox 2"/>
+          <p:cNvSpPr txBox="1"/>
+          <p:nvPr/>
+        </p:nvSpPr>
+        <p:spPr>
+          <a:xfrm>
+            <a:off x="457200" y="182880"/>
+            <a:ext cx="11277295" cy="731520"/>
+          </a:xfrm>
+          <a:prstGeom prst="rect">
+            <a:avLst/>
+          </a:prstGeom>
+          <a:noFill/>
+        </p:spPr>
+        <p:txBody>
+          <a:bodyPr wrap="none" anchor="ctr">
+            <a:spAutoFit/>
+          </a:bodyPr>
+          <a:lstStyle/>
+          <a:p>
+            <a:pPr algn="l">
+              <a:defRPr sz="3600" b="1">
+                <a:solidFill>
+                  <a:srgbClr val="FFFFFF"/>
+                </a:solidFill>
+              </a:defRPr>
+            </a:pPr>
+            <a:r>
+              <a:t>Aspectos Positivos y Recomendaciones</a:t>
+            </a:r>
+          </a:p>
+        </p:txBody>
+      </p:sp>
+      <p:sp>
+        <p:nvSpPr>
+          <p:cNvPr id="4" name="TextBox 3"/>
+          <p:cNvSpPr txBox="1"/>
+          <p:nvPr/>
+        </p:nvSpPr>
+        <p:spPr>
+          <a:xfrm>
+            <a:off x="731520" y="1371600"/>
+            <a:ext cx="5029200" cy="4572000"/>
+          </a:xfrm>
+          <a:prstGeom prst="rect">
+            <a:avLst/>
+          </a:prstGeom>
+          <a:noFill/>
+        </p:spPr>
+        <p:txBody>
+          <a:bodyPr wrap="none">
+            <a:spAutoFit/>
+          </a:bodyPr>
+          <a:lstStyle/>
+          <a:p>
+            <a:pPr>
+              <a:spcAft>
+                <a:spcPts val="1200"/>
+              </a:spcAft>
+              <a:defRPr sz="2400" b="1">
+                <a:solidFill>
+                  <a:srgbClr val="4CAF50"/>
+                </a:solidFill>
+              </a:defRPr>
+            </a:pPr>
+            <a:r>
+              <a:t>✓ Aspectos Positivos:</a:t>
+            </a:r>
+          </a:p>
+          <a:p>
+            <a:pPr>
+              <a:spcAft>
+                <a:spcPts val="800"/>
+              </a:spcAft>
+              <a:defRPr sz="1800">
+                <a:solidFill>
+                  <a:srgbClr val="333333"/>
+                </a:solidFill>
+              </a:defRPr>
+            </a:pPr>
+            <a:r>
+              <a:t>• Diseño elegante y profesional</a:t>
+            </a:r>
+          </a:p>
+          <a:p>
+            <a:pPr>
+              <a:spcAft>
+                <a:spcPts val="800"/>
+              </a:spcAft>
+              <a:defRPr sz="1800">
+                <a:solidFill>
+                  <a:srgbClr val="333333"/>
+                </a:solidFill>
+              </a:defRPr>
+            </a:pPr>
+            <a:r>
+              <a:t>• Carrito funcional con actualización automática</a:t>
+            </a:r>
+          </a:p>
+          <a:p>
+            <a:pPr>
+              <a:spcAft>
+                <a:spcPts val="800"/>
+              </a:spcAft>
+              <a:defRPr sz="1800">
+                <a:solidFill>
+                  <a:srgbClr val="333333"/>
+                </a:solidFill>
+              </a:defRPr>
+            </a:pPr>
+            <a:r>
+              <a:t>• Integración Transbank genera confianza</a:t>
+            </a:r>
+          </a:p>
+          <a:p>
+            <a:pPr>
+              <a:spcAft>
+                <a:spcPts val="800"/>
+              </a:spcAft>
+              <a:defRPr sz="1800">
+                <a:solidFill>
+                  <a:srgbClr val="333333"/>
+                </a:solidFill>
+              </a:defRPr>
+            </a:pPr>
+            <a:r>
+              <a:t>• Buen rendimiento y velocidad</a:t>
+            </a:r>
+          </a:p>
+          <a:p>
+            <a:pPr>
+              <a:spcAft>
+                <a:spcPts val="800"/>
+              </a:spcAft>
+              <a:defRPr sz="1800">
+                <a:solidFill>
+                  <a:srgbClr val="333333"/>
+                </a:solidFill>
+              </a:defRPr>
+            </a:pPr>
+            <a:r>
+              <a:t>• Navegación por categorías intuitiva</a:t>
+            </a:r>
+          </a:p>
+        </p:txBody>
+      </p:sp>
+      <p:sp>
+        <p:nvSpPr>
+          <p:cNvPr id="5" name="TextBox 4"/>
+          <p:cNvSpPr txBox="1"/>
+          <p:nvPr/>
+        </p:nvSpPr>
+        <p:spPr>
+          <a:xfrm>
+            <a:off x="6217920" y="1371600"/>
+            <a:ext cx="5029200" cy="4572000"/>
+          </a:xfrm>
+          <a:prstGeom prst="rect">
+            <a:avLst/>
+          </a:prstGeom>
+          <a:noFill/>
+        </p:spPr>
+        <p:txBody>
+          <a:bodyPr wrap="none">
+            <a:spAutoFit/>
+          </a:bodyPr>
+          <a:lstStyle/>
+          <a:p>
+            <a:pPr>
+              <a:spcAft>
+                <a:spcPts val="1200"/>
+              </a:spcAft>
+              <a:defRPr sz="2400" b="1">
+                <a:solidFill>
+                  <a:srgbClr val="FF9800"/>
+                </a:solidFill>
+              </a:defRPr>
+            </a:pPr>
+            <a:r>
+              <a:t>⚠ Recomendaciones:</a:t>
+            </a:r>
+          </a:p>
+          <a:p>
+            <a:pPr>
+              <a:spcAft>
+                <a:spcPts val="600"/>
+              </a:spcAft>
+              <a:defRPr sz="2000" b="1">
+                <a:solidFill>
+                  <a:srgbClr val="333333"/>
+                </a:solidFill>
+              </a:defRPr>
+            </a:pPr>
+            <a:r>
+              <a:t>Alta Prioridad:</a:t>
+            </a:r>
+          </a:p>
+          <a:p>
+            <a:pPr>
+              <a:spcAft>
+                <a:spcPts val="600"/>
+              </a:spcAft>
+              <a:defRPr sz="1800">
+                <a:solidFill>
+                  <a:srgbClr val="333333"/>
+                </a:solidFill>
+              </a:defRPr>
+            </a:pPr>
+            <a:r>
+              <a:t>• Hacer botón "Agregar al carrito" más visible</a:t>
+            </a:r>
+          </a:p>
+          <a:p>
+            <a:pPr>
+              <a:spcAft>
+                <a:spcPts val="600"/>
+              </a:spcAft>
+              <a:defRPr sz="1800">
+                <a:solidFill>
+                  <a:srgbClr val="333333"/>
+                </a:solidFill>
+              </a:defRPr>
+            </a:pPr>
+            <a:r>
+              <a:t>• Mejorar visibilidad link de registro</a:t>
+            </a:r>
+          </a:p>
+          <a:p>
+            <a:br/>
+            <a:pPr>
+              <a:spcAft>
+                <a:spcPts val="600"/>
+              </a:spcAft>
+              <a:defRPr sz="2000" b="1">
+                <a:solidFill>
+                  <a:srgbClr val="333333"/>
+                </a:solidFill>
+              </a:defRPr>
+            </a:pPr>
+            <a:r>
+              <a:t>Mejoras Adicionales:</a:t>
+            </a:r>
+          </a:p>
+          <a:p>
+            <a:pPr>
+              <a:spcAft>
+                <a:spcPts val="600"/>
+              </a:spcAft>
+              <a:defRPr sz="1800">
+                <a:solidFill>
+                  <a:srgbClr val="333333"/>
+                </a:solidFill>
+              </a:defRPr>
+            </a:pPr>
+            <a:r>
+              <a:t>• Agregar placeholder en campo teléfono</a:t>
+            </a:r>
+          </a:p>
+          <a:p>
+            <a:pPr>
+              <a:spcAft>
+                <a:spcPts val="600"/>
+              </a:spcAft>
+              <a:defRPr sz="1800">
+                <a:solidFill>
+                  <a:srgbClr val="333333"/>
+                </a:solidFill>
+              </a:defRPr>
+            </a:pPr>
+            <a:r>
+              <a:t>• Implementar autocompletado región/ciudad</a:t>
+            </a:r>
+          </a:p>
+        </p:txBody>
+      </p:sp>
+    </p:spTree>
+  </p:cSld>
+  <p:clrMapOvr>
+    <a:masterClrMapping/>
+  </p:clrMapOvr>
+</p:sld>
+</file>
+
+<file path=ppt/slides/slide16.xml><?xml version="1.0" encoding="utf-8"?>
+<p:sld xmlns:a="http://schemas.openxmlformats.org/drawingml/2006/main" xmlns:p="http://schemas.openxmlformats.org/presentationml/2006/main" xmlns:r="http://schemas.openxmlformats.org/officeDocument/2006/relationships">
+  <p:cSld>
+    <p:spTree>
+      <p:nvGrpSpPr>
+        <p:cNvPr id="1" name=""/>
+        <p:cNvGrpSpPr/>
+        <p:nvPr/>
+      </p:nvGrpSpPr>
+      <p:grpSpPr/>
+      <p:sp>
+        <p:nvSpPr>
+          <p:cNvPr id="2" name="Rectangle 1"/>
+          <p:cNvSpPr/>
+          <p:nvPr/>
+        </p:nvSpPr>
+        <p:spPr>
+          <a:xfrm>
+            <a:off x="0" y="0"/>
+            <a:ext cx="12191695" cy="1097280"/>
+          </a:xfrm>
+          <a:prstGeom prst="rect">
+            <a:avLst/>
+          </a:prstGeom>
+          <a:solidFill>
+            <a:srgbClr val="B8860B"/>
+          </a:solidFill>
+          <a:ln>
+            <a:noFill/>
+          </a:ln>
+        </p:spPr>
+        <p:style>
+          <a:lnRef idx="1">
+            <a:schemeClr val="accent1"/>
+          </a:lnRef>
+          <a:fillRef idx="3">
+            <a:schemeClr val="accent1"/>
+          </a:fillRef>
+          <a:effectRef idx="2">
+            <a:schemeClr val="accent1"/>
+          </a:effectRef>
+          <a:fontRef idx="minor">
+            <a:schemeClr val="lt1"/>
+          </a:fontRef>
+        </p:style>
+        <p:txBody>
+          <a:bodyPr rtlCol="0" anchor="ctr"/>
+          <a:lstStyle/>
+          <a:p>
+            <a:pPr algn="ctr"/>
+          </a:p>
+        </p:txBody>
+      </p:sp>
+      <p:sp>
+        <p:nvSpPr>
+          <p:cNvPr id="3" name="TextBox 2"/>
+          <p:cNvSpPr txBox="1"/>
+          <p:nvPr/>
+        </p:nvSpPr>
+        <p:spPr>
+          <a:xfrm>
+            <a:off x="457200" y="182880"/>
+            <a:ext cx="11277295" cy="731520"/>
+          </a:xfrm>
+          <a:prstGeom prst="rect">
+            <a:avLst/>
+          </a:prstGeom>
+          <a:noFill/>
+        </p:spPr>
+        <p:txBody>
+          <a:bodyPr wrap="none" anchor="ctr">
+            <a:spAutoFit/>
+          </a:bodyPr>
+          <a:lstStyle/>
+          <a:p>
+            <a:pPr algn="l">
+              <a:defRPr sz="3600" b="1">
+                <a:solidFill>
+                  <a:srgbClr val="FFFFFF"/>
+                </a:solidFill>
+              </a:defRPr>
+            </a:pPr>
+            <a:r>
+              <a:t>Gestión de Defectos</a:t>
+            </a:r>
+          </a:p>
+        </p:txBody>
+      </p:sp>
+      <p:sp>
+        <p:nvSpPr>
+          <p:cNvPr id="4" name="Rounded Rectangle 3"/>
+          <p:cNvSpPr/>
+          <p:nvPr/>
+        </p:nvSpPr>
+        <p:spPr>
+          <a:xfrm>
+            <a:off x="1828800" y="1645920"/>
+            <a:ext cx="8534095" cy="1371600"/>
+          </a:xfrm>
+          <a:prstGeom prst="roundRect">
+            <a:avLst/>
+          </a:prstGeom>
+          <a:solidFill>
+            <a:srgbClr val="F5F5F0"/>
+          </a:solidFill>
+          <a:ln w="25400">
+            <a:solidFill>
+              <a:srgbClr val="B8860B"/>
+            </a:solidFill>
+          </a:ln>
+        </p:spPr>
+        <p:style>
+          <a:lnRef idx="1">
+            <a:schemeClr val="accent1"/>
+          </a:lnRef>
+          <a:fillRef idx="3">
+            <a:schemeClr val="accent1"/>
+          </a:fillRef>
+          <a:effectRef idx="2">
+            <a:schemeClr val="accent1"/>
+          </a:effectRef>
+          <a:fontRef idx="minor">
+            <a:schemeClr val="lt1"/>
+          </a:fontRef>
+        </p:style>
+        <p:txBody>
+          <a:bodyPr rtlCol="0" anchor="ctr" lIns="182880" tIns="182880"/>
+          <a:lstStyle/>
+          <a:p>
+            <a:pPr algn="ctr">
+              <a:spcAft>
+                <a:spcPts val="1000"/>
+              </a:spcAft>
+              <a:defRPr sz="2400" b="1">
+                <a:solidFill>
+                  <a:srgbClr val="B8860B"/>
+                </a:solidFill>
+              </a:defRPr>
+            </a:pPr>
+            <a:r>
+              <a:t>Clasificación por Severidad</a:t>
+            </a:r>
+          </a:p>
+          <a:p>
+            <a:pPr algn="ctr">
+              <a:spcAft>
+                <a:spcPts val="600"/>
+              </a:spcAft>
+              <a:defRPr sz="2000">
+                <a:solidFill>
+                  <a:srgbClr val="333333"/>
+                </a:solidFill>
+              </a:defRPr>
+            </a:pPr>
+            <a:r>
+              <a:t>Críticos: 0</a:t>
+            </a:r>
+          </a:p>
+          <a:p>
+            <a:pPr algn="ctr">
+              <a:spcAft>
+                <a:spcPts val="600"/>
+              </a:spcAft>
+              <a:defRPr sz="2000">
+                <a:solidFill>
+                  <a:srgbClr val="333333"/>
+                </a:solidFill>
+              </a:defRPr>
+            </a:pPr>
+            <a:r>
+              <a:t>Altos: 0</a:t>
+            </a:r>
+          </a:p>
+          <a:p>
+            <a:pPr algn="ctr">
+              <a:spcAft>
+                <a:spcPts val="600"/>
+              </a:spcAft>
+              <a:defRPr sz="2000">
+                <a:solidFill>
+                  <a:srgbClr val="333333"/>
+                </a:solidFill>
+              </a:defRPr>
+            </a:pPr>
+            <a:r>
+              <a:t>Medios: 3</a:t>
+            </a:r>
+          </a:p>
+          <a:p>
+            <a:pPr algn="ctr">
+              <a:spcAft>
+                <a:spcPts val="600"/>
+              </a:spcAft>
+              <a:defRPr sz="2000">
+                <a:solidFill>
+                  <a:srgbClr val="333333"/>
+                </a:solidFill>
+              </a:defRPr>
+            </a:pPr>
+            <a:r>
+              <a:t>Bajos: 2</a:t>
+            </a:r>
+          </a:p>
+        </p:txBody>
+      </p:sp>
+      <p:sp>
+        <p:nvSpPr>
+          <p:cNvPr id="5" name="TextBox 4"/>
+          <p:cNvSpPr txBox="1"/>
+          <p:nvPr/>
+        </p:nvSpPr>
+        <p:spPr>
+          <a:xfrm>
+            <a:off x="1371600" y="3474720"/>
+            <a:ext cx="9144000" cy="1828800"/>
+          </a:xfrm>
+          <a:prstGeom prst="rect">
+            <a:avLst/>
+          </a:prstGeom>
+          <a:noFill/>
+        </p:spPr>
+        <p:txBody>
+          <a:bodyPr wrap="none">
+            <a:spAutoFit/>
+          </a:bodyPr>
+          <a:lstStyle/>
+          <a:p>
+            <a:pPr>
+              <a:spcAft>
+                <a:spcPts val="1200"/>
+              </a:spcAft>
+              <a:defRPr sz="2200" b="1">
+                <a:solidFill>
+                  <a:srgbClr val="333333"/>
+                </a:solidFill>
+              </a:defRPr>
+            </a:pPr>
+            <a:r>
+              <a:t>Defectos Medios Identificados:</a:t>
+            </a:r>
+          </a:p>
+          <a:p>
+            <a:pPr>
+              <a:spcAft>
+                <a:spcPts val="800"/>
+              </a:spcAft>
+              <a:defRPr sz="1800">
+                <a:solidFill>
+                  <a:srgbClr val="333333"/>
+                </a:solidFill>
+              </a:defRPr>
+            </a:pPr>
+            <a:r>
+              <a:t>DEF-001: Botón "Agregar al carrito" poco visible (UX)</a:t>
+            </a:r>
+          </a:p>
+          <a:p>
+            <a:pPr>
+              <a:spcAft>
+                <a:spcPts val="800"/>
+              </a:spcAft>
+              <a:defRPr sz="1800">
+                <a:solidFill>
+                  <a:srgbClr val="333333"/>
+                </a:solidFill>
+              </a:defRPr>
+            </a:pPr>
+            <a:r>
+              <a:t>DEF-002: Link de registro con bajo contraste (UI)</a:t>
+            </a:r>
+          </a:p>
+          <a:p>
+            <a:pPr>
+              <a:spcAft>
+                <a:spcPts val="800"/>
+              </a:spcAft>
+              <a:defRPr sz="1800">
+                <a:solidFill>
+                  <a:srgbClr val="333333"/>
+                </a:solidFill>
+              </a:defRPr>
+            </a:pPr>
+            <a:r>
+              <a:t>DEF-003: Validación de teléfono sin indicación de formato (Validación)</a:t>
+            </a:r>
+          </a:p>
+        </p:txBody>
+      </p:sp>
+      <p:sp>
+        <p:nvSpPr>
+          <p:cNvPr id="6" name="Rounded Rectangle 5"/>
+          <p:cNvSpPr/>
+          <p:nvPr/>
+        </p:nvSpPr>
+        <p:spPr>
+          <a:xfrm>
+            <a:off x="2286000" y="5029200"/>
+            <a:ext cx="7619695" cy="731520"/>
+          </a:xfrm>
+          <a:prstGeom prst="roundRect">
+            <a:avLst/>
+          </a:prstGeom>
+          <a:solidFill>
+            <a:srgbClr val="4CAF50"/>
+          </a:solidFill>
+          <a:ln>
+            <a:noFill/>
+          </a:ln>
+        </p:spPr>
+        <p:style>
+          <a:lnRef idx="1">
+            <a:schemeClr val="accent1"/>
+          </a:lnRef>
+          <a:fillRef idx="3">
+            <a:schemeClr val="accent1"/>
+          </a:fillRef>
+          <a:effectRef idx="2">
+            <a:schemeClr val="accent1"/>
+          </a:effectRef>
+          <a:fontRef idx="minor">
+            <a:schemeClr val="lt1"/>
+          </a:fontRef>
+        </p:style>
+        <p:txBody>
+          <a:bodyPr rtlCol="0" anchor="ctr"/>
+          <a:lstStyle/>
+          <a:p>
+            <a:pPr algn="ctr">
+              <a:defRPr sz="2400" b="1">
+                <a:solidFill>
+                  <a:srgbClr val="FFFFFF"/>
+                </a:solidFill>
+              </a:defRPr>
+            </a:pPr>
+            <a:r>
+              <a:t>✓ Sistema estable sin defectos críticos o altos</a:t>
+            </a:r>
+          </a:p>
+        </p:txBody>
+      </p:sp>
+    </p:spTree>
+  </p:cSld>
+  <p:clrMapOvr>
+    <a:masterClrMapping/>
+  </p:clrMapOvr>
+</p:sld>
+</file>
+
+<file path=ppt/slides/slide17.xml><?xml version="1.0" encoding="utf-8"?>
+<p:sld xmlns:a="http://schemas.openxmlformats.org/drawingml/2006/main" xmlns:p="http://schemas.openxmlformats.org/presentationml/2006/main" xmlns:r="http://schemas.openxmlformats.org/officeDocument/2006/relationships">
+  <p:cSld>
+    <p:spTree>
+      <p:nvGrpSpPr>
+        <p:cNvPr id="1" name=""/>
+        <p:cNvGrpSpPr/>
+        <p:nvPr/>
+      </p:nvGrpSpPr>
+      <p:grpSpPr/>
+      <p:sp>
+        <p:nvSpPr>
+          <p:cNvPr id="2" name="Rectangle 1"/>
+          <p:cNvSpPr/>
+          <p:nvPr/>
+        </p:nvSpPr>
+        <p:spPr>
+          <a:xfrm>
+            <a:off x="0" y="0"/>
+            <a:ext cx="12191695" cy="1097280"/>
+          </a:xfrm>
+          <a:prstGeom prst="rect">
+            <a:avLst/>
+          </a:prstGeom>
+          <a:solidFill>
+            <a:srgbClr val="B8860B"/>
+          </a:solidFill>
+          <a:ln>
+            <a:noFill/>
+          </a:ln>
+        </p:spPr>
+        <p:style>
+          <a:lnRef idx="1">
+            <a:schemeClr val="accent1"/>
+          </a:lnRef>
+          <a:fillRef idx="3">
+            <a:schemeClr val="accent1"/>
+          </a:fillRef>
+          <a:effectRef idx="2">
+            <a:schemeClr val="accent1"/>
+          </a:effectRef>
+          <a:fontRef idx="minor">
+            <a:schemeClr val="lt1"/>
+          </a:fontRef>
+        </p:style>
+        <p:txBody>
+          <a:bodyPr rtlCol="0" anchor="ctr"/>
+          <a:lstStyle/>
+          <a:p>
+            <a:pPr algn="ctr"/>
+          </a:p>
+        </p:txBody>
+      </p:sp>
+      <p:sp>
+        <p:nvSpPr>
+          <p:cNvPr id="3" name="TextBox 2"/>
+          <p:cNvSpPr txBox="1"/>
+          <p:nvPr/>
+        </p:nvSpPr>
+        <p:spPr>
+          <a:xfrm>
+            <a:off x="457200" y="182880"/>
+            <a:ext cx="11277295" cy="731520"/>
+          </a:xfrm>
+          <a:prstGeom prst="rect">
+            <a:avLst/>
+          </a:prstGeom>
+          <a:noFill/>
+        </p:spPr>
+        <p:txBody>
+          <a:bodyPr wrap="none" anchor="ctr">
+            <a:spAutoFit/>
+          </a:bodyPr>
+          <a:lstStyle/>
+          <a:p>
+            <a:pPr algn="l">
+              <a:defRPr sz="3600" b="1">
+                <a:solidFill>
+                  <a:srgbClr val="FFFFFF"/>
+                </a:solidFill>
+              </a:defRPr>
+            </a:pPr>
+            <a:r>
+              <a:t>Métricas Finales del Proyecto</a:t>
+            </a:r>
+          </a:p>
+        </p:txBody>
+      </p:sp>
+      <p:graphicFrame>
+        <p:nvGraphicFramePr>
+          <p:cNvPr id="4" name="Table 3"/>
+          <p:cNvGraphicFramePr>
+            <a:graphicFrameLocks noGrp="1"/>
+          </p:cNvGraphicFramePr>
+          <p:nvPr/>
+        </p:nvGraphicFramePr>
+        <p:xfrm>
+          <a:off x="1371600" y="1645920"/>
+          <a:ext cx="9144000" cy="3200400"/>
+        </p:xfrm>
+        <a:graphic>
+          <a:graphicData uri="http://schemas.openxmlformats.org/drawingml/2006/table">
+            <a:tbl>
+              <a:tblPr firstRow="1" bandRow="1">
+                <a:tableStyleId>{5C22544A-7EE6-4342-B048-85BDC9FD1C3A}</a:tableStyleId>
+              </a:tblPr>
+              <a:tblGrid>
+                <a:gridCol w="5029200"/>
+                <a:gridCol w="2057400"/>
+                <a:gridCol w="2057400"/>
+              </a:tblGrid>
+              <a:tr h="457200">
+                <a:tc>
+                  <a:txBody>
+                    <a:bodyPr/>
+                    <a:lstStyle/>
+                    <a:p>
+                      <a:pPr algn="ctr">
+                        <a:defRPr sz="2000" b="1">
+                          <a:solidFill>
+                            <a:srgbClr val="FFFFFF"/>
+                          </a:solidFill>
+                        </a:defRPr>
+                      </a:pPr>
+                      <a:r>
+                        <a:t>Métrica</a:t>
+                      </a:r>
+                    </a:p>
+                  </a:txBody>
+                  <a:tcPr>
+                    <a:solidFill>
+                      <a:srgbClr val="B8860B"/>
+                    </a:solidFill>
+                  </a:tcPr>
+                </a:tc>
+                <a:tc>
+                  <a:txBody>
+                    <a:bodyPr/>
+                    <a:lstStyle/>
+                    <a:p>
+                      <a:pPr algn="ctr">
+                        <a:defRPr sz="2000" b="1">
+                          <a:solidFill>
+                            <a:srgbClr val="FFFFFF"/>
+                          </a:solidFill>
+                        </a:defRPr>
+                      </a:pPr>
+                      <a:r>
+                        <a:t>Objetivo</a:t>
+                      </a:r>
+                    </a:p>
+                  </a:txBody>
+                  <a:tcPr>
+                    <a:solidFill>
+                      <a:srgbClr val="B8860B"/>
+                    </a:solidFill>
+                  </a:tcPr>
+                </a:tc>
+                <a:tc>
+                  <a:txBody>
+                    <a:bodyPr/>
+                    <a:lstStyle/>
+                    <a:p>
+                      <a:pPr algn="ctr">
+                        <a:defRPr sz="2000" b="1">
+                          <a:solidFill>
+                            <a:srgbClr val="FFFFFF"/>
+                          </a:solidFill>
+                        </a:defRPr>
+                      </a:pPr>
+                      <a:r>
+                        <a:t>Obtenido</a:t>
+                      </a:r>
+                    </a:p>
+                  </a:txBody>
+                  <a:tcPr>
+                    <a:solidFill>
+                      <a:srgbClr val="B8860B"/>
+                    </a:solidFill>
+                  </a:tcPr>
+                </a:tc>
+              </a:tr>
+              <a:tr h="457200">
+                <a:tc>
+                  <a:txBody>
+                    <a:bodyPr/>
+                    <a:lstStyle/>
+                    <a:p>
+                      <a:pPr>
+                        <a:defRPr sz="1800">
+                          <a:solidFill>
+                            <a:srgbClr val="333333"/>
+                          </a:solidFill>
+                        </a:defRPr>
+                      </a:pPr>
+                      <a:r>
+                        <a:t>Pruebas unitarias pasadas</a:t>
+                      </a:r>
+                    </a:p>
+                  </a:txBody>
+                  <a:tcPr/>
+                </a:tc>
+                <a:tc>
+                  <a:txBody>
+                    <a:bodyPr/>
+                    <a:lstStyle/>
+                    <a:p>
+                      <a:pPr algn="ctr">
+                        <a:defRPr sz="1800">
+                          <a:solidFill>
+                            <a:srgbClr val="333333"/>
+                          </a:solidFill>
+                        </a:defRPr>
+                      </a:pPr>
+                      <a:r>
+                        <a:t>100%</a:t>
+                      </a:r>
+                    </a:p>
+                  </a:txBody>
+                  <a:tcPr/>
+                </a:tc>
+                <a:tc>
+                  <a:txBody>
+                    <a:bodyPr/>
+                    <a:lstStyle/>
+                    <a:p>
+                      <a:pPr algn="ctr">
+                        <a:defRPr sz="1800" b="1">
+                          <a:solidFill>
+                            <a:srgbClr val="4CAF50"/>
+                          </a:solidFill>
+                        </a:defRPr>
+                      </a:pPr>
+                      <a:r>
+                        <a:t>100% ✓</a:t>
+                      </a:r>
+                    </a:p>
+                  </a:txBody>
+                  <a:tcPr/>
+                </a:tc>
+              </a:tr>
+              <a:tr h="457200">
+                <a:tc>
+                  <a:txBody>
+                    <a:bodyPr/>
+                    <a:lstStyle/>
+                    <a:p>
+                      <a:pPr>
+                        <a:defRPr sz="1800">
+                          <a:solidFill>
+                            <a:srgbClr val="333333"/>
+                          </a:solidFill>
+                        </a:defRPr>
+                      </a:pPr>
+                      <a:r>
+                        <a:t>Cobertura de código</a:t>
+                      </a:r>
+                    </a:p>
+                  </a:txBody>
+                  <a:tcPr/>
+                </a:tc>
+                <a:tc>
+                  <a:txBody>
+                    <a:bodyPr/>
+                    <a:lstStyle/>
+                    <a:p>
+                      <a:pPr algn="ctr">
+                        <a:defRPr sz="1800">
+                          <a:solidFill>
+                            <a:srgbClr val="333333"/>
+                          </a:solidFill>
+                        </a:defRPr>
+                      </a:pPr>
+                      <a:r>
+                        <a:t>≥ 70%</a:t>
+                      </a:r>
+                    </a:p>
+                  </a:txBody>
+                  <a:tcPr/>
+                </a:tc>
+                <a:tc>
+                  <a:txBody>
+                    <a:bodyPr/>
+                    <a:lstStyle/>
+                    <a:p>
+                      <a:pPr algn="ctr">
+                        <a:defRPr sz="1800" b="1">
+                          <a:solidFill>
+                            <a:srgbClr val="FF9800"/>
+                          </a:solidFill>
+                        </a:defRPr>
+                      </a:pPr>
+                      <a:r>
+                        <a:t>44.39% ~</a:t>
+                      </a:r>
+                    </a:p>
+                  </a:txBody>
+                  <a:tcPr/>
+                </a:tc>
+              </a:tr>
+              <a:tr h="457200">
+                <a:tc>
+                  <a:txBody>
+                    <a:bodyPr/>
+                    <a:lstStyle/>
+                    <a:p>
+                      <a:pPr>
+                        <a:defRPr sz="1800">
+                          <a:solidFill>
+                            <a:srgbClr val="333333"/>
+                          </a:solidFill>
+                        </a:defRPr>
+                      </a:pPr>
+                      <a:r>
+                        <a:t>Defectos críticos</a:t>
+                      </a:r>
+                    </a:p>
+                  </a:txBody>
+                  <a:tcPr/>
+                </a:tc>
+                <a:tc>
+                  <a:txBody>
+                    <a:bodyPr/>
+                    <a:lstStyle/>
+                    <a:p>
+                      <a:pPr algn="ctr">
+                        <a:defRPr sz="1800">
+                          <a:solidFill>
+                            <a:srgbClr val="333333"/>
+                          </a:solidFill>
+                        </a:defRPr>
+                      </a:pPr>
+                      <a:r>
+                        <a:t>0</a:t>
+                      </a:r>
+                    </a:p>
+                  </a:txBody>
+                  <a:tcPr/>
+                </a:tc>
+                <a:tc>
+                  <a:txBody>
+                    <a:bodyPr/>
+                    <a:lstStyle/>
+                    <a:p>
+                      <a:pPr algn="ctr">
+                        <a:defRPr sz="1800" b="1">
+                          <a:solidFill>
+                            <a:srgbClr val="4CAF50"/>
+                          </a:solidFill>
+                        </a:defRPr>
+                      </a:pPr>
+                      <a:r>
+                        <a:t>0 ✓</a:t>
+                      </a:r>
+                    </a:p>
+                  </a:txBody>
+                  <a:tcPr/>
+                </a:tc>
+              </a:tr>
+              <a:tr h="457200">
+                <a:tc>
+                  <a:txBody>
+                    <a:bodyPr/>
+                    <a:lstStyle/>
+                    <a:p>
+                      <a:pPr>
+                        <a:defRPr sz="1800">
+                          <a:solidFill>
+                            <a:srgbClr val="333333"/>
+                          </a:solidFill>
+                        </a:defRPr>
+                      </a:pPr>
+                      <a:r>
+                        <a:t>Defectos altos</a:t>
+                      </a:r>
+                    </a:p>
+                  </a:txBody>
+                  <a:tcPr/>
+                </a:tc>
+                <a:tc>
+                  <a:txBody>
+                    <a:bodyPr/>
+                    <a:lstStyle/>
+                    <a:p>
+                      <a:pPr algn="ctr">
+                        <a:defRPr sz="1800">
+                          <a:solidFill>
+                            <a:srgbClr val="333333"/>
+                          </a:solidFill>
+                        </a:defRPr>
+                      </a:pPr>
+                      <a:r>
+                        <a:t>≤ 2</a:t>
+                      </a:r>
+                    </a:p>
+                  </a:txBody>
+                  <a:tcPr/>
+                </a:tc>
+                <a:tc>
+                  <a:txBody>
+                    <a:bodyPr/>
+                    <a:lstStyle/>
+                    <a:p>
+                      <a:pPr algn="ctr">
+                        <a:defRPr sz="1800" b="1">
+                          <a:solidFill>
+                            <a:srgbClr val="4CAF50"/>
+                          </a:solidFill>
+                        </a:defRPr>
+                      </a:pPr>
+                      <a:r>
+                        <a:t>0 ✓</a:t>
+                      </a:r>
+                    </a:p>
+                  </a:txBody>
+                  <a:tcPr/>
+                </a:tc>
+              </a:tr>
+              <a:tr h="457200">
+                <a:tc>
+                  <a:txBody>
+                    <a:bodyPr/>
+                    <a:lstStyle/>
+                    <a:p>
+                      <a:pPr>
+                        <a:defRPr sz="1800">
+                          <a:solidFill>
+                            <a:srgbClr val="333333"/>
+                          </a:solidFill>
+                        </a:defRPr>
+                      </a:pPr>
+                      <a:r>
+                        <a:t>Satisfacción usabilidad</a:t>
+                      </a:r>
+                    </a:p>
+                  </a:txBody>
+                  <a:tcPr/>
+                </a:tc>
+                <a:tc>
+                  <a:txBody>
+                    <a:bodyPr/>
+                    <a:lstStyle/>
+                    <a:p>
+                      <a:pPr algn="ctr">
+                        <a:defRPr sz="1800">
+                          <a:solidFill>
+                            <a:srgbClr val="333333"/>
+                          </a:solidFill>
+                        </a:defRPr>
+                      </a:pPr>
+                      <a:r>
+                        <a:t>≥ 80</a:t>
+                      </a:r>
+                    </a:p>
+                  </a:txBody>
+                  <a:tcPr/>
+                </a:tc>
+                <a:tc>
+                  <a:txBody>
+                    <a:bodyPr/>
+                    <a:lstStyle/>
+                    <a:p>
+                      <a:pPr algn="ctr">
+                        <a:defRPr sz="1800" b="1">
+                          <a:solidFill>
+                            <a:srgbClr val="4CAF50"/>
+                          </a:solidFill>
+                        </a:defRPr>
+                      </a:pPr>
+                      <a:r>
+                        <a:t>80.0 ✓</a:t>
+                      </a:r>
+                    </a:p>
+                  </a:txBody>
+                  <a:tcPr/>
+                </a:tc>
+              </a:tr>
+              <a:tr h="457200">
+                <a:tc>
+                  <a:txBody>
+                    <a:bodyPr/>
+                    <a:lstStyle/>
+                    <a:p>
+                      <a:pPr>
+                        <a:defRPr sz="1800">
+                          <a:solidFill>
+                            <a:srgbClr val="333333"/>
+                          </a:solidFill>
+                        </a:defRPr>
+                      </a:pPr>
+                      <a:r>
+                        <a:t>Funcionalidades implementadas</a:t>
+                      </a:r>
+                    </a:p>
+                  </a:txBody>
+                  <a:tcPr/>
+                </a:tc>
+                <a:tc>
+                  <a:txBody>
+                    <a:bodyPr/>
+                    <a:lstStyle/>
+                    <a:p>
+                      <a:pPr algn="ctr">
+                        <a:defRPr sz="1800">
+                          <a:solidFill>
+                            <a:srgbClr val="333333"/>
+                          </a:solidFill>
+                        </a:defRPr>
+                      </a:pPr>
+                      <a:r>
+                        <a:t>50%</a:t>
+                      </a:r>
+                    </a:p>
+                  </a:txBody>
+                  <a:tcPr/>
+                </a:tc>
+                <a:tc>
+                  <a:txBody>
+                    <a:bodyPr/>
+                    <a:lstStyle/>
+                    <a:p>
+                      <a:pPr algn="ctr">
+                        <a:defRPr sz="1800" b="1">
+                          <a:solidFill>
+                            <a:srgbClr val="4CAF50"/>
+                          </a:solidFill>
+                        </a:defRPr>
+                      </a:pPr>
+                      <a:r>
+                        <a:t>&gt;95% ✓</a:t>
+                      </a:r>
+                    </a:p>
+                  </a:txBody>
+                  <a:tcPr/>
+                </a:tc>
+              </a:tr>
+            </a:tbl>
+          </a:graphicData>
+        </a:graphic>
+      </p:graphicFrame>
+      <p:sp>
+        <p:nvSpPr>
+          <p:cNvPr id="5" name="Rounded Rectangle 4"/>
+          <p:cNvSpPr/>
+          <p:nvPr/>
+        </p:nvSpPr>
+        <p:spPr>
+          <a:xfrm>
+            <a:off x="3200400" y="5303520"/>
+            <a:ext cx="5790895" cy="731520"/>
+          </a:xfrm>
+          <a:prstGeom prst="roundRect">
+            <a:avLst/>
+          </a:prstGeom>
+          <a:solidFill>
+            <a:srgbClr val="4CAF50"/>
+          </a:solidFill>
+          <a:ln>
+            <a:noFill/>
+          </a:ln>
+        </p:spPr>
+        <p:style>
+          <a:lnRef idx="1">
+            <a:schemeClr val="accent1"/>
+          </a:lnRef>
+          <a:fillRef idx="3">
+            <a:schemeClr val="accent1"/>
+          </a:fillRef>
+          <a:effectRef idx="2">
+            <a:schemeClr val="accent1"/>
+          </a:effectRef>
+          <a:fontRef idx="minor">
+            <a:schemeClr val="lt1"/>
+          </a:fontRef>
+        </p:style>
+        <p:txBody>
+          <a:bodyPr rtlCol="0" anchor="ctr"/>
+          <a:lstStyle/>
+          <a:p>
+            <a:pPr algn="ctr">
+              <a:defRPr sz="2400" b="1">
+                <a:solidFill>
+                  <a:srgbClr val="FFFFFF"/>
+                </a:solidFill>
+              </a:defRPr>
+            </a:pPr>
+            <a:r>
+              <a:t>Tasa de Cumplimiento: 83.3% (5 de 6 objetivos)</a:t>
+            </a:r>
+          </a:p>
+        </p:txBody>
+      </p:sp>
+    </p:spTree>
+  </p:cSld>
+  <p:clrMapOvr>
+    <a:masterClrMapping/>
+  </p:clrMapOvr>
+</p:sld>
+</file>
+
+<file path=ppt/slides/slide18.xml><?xml version="1.0" encoding="utf-8"?>
+<p:sld xmlns:a="http://schemas.openxmlformats.org/drawingml/2006/main" xmlns:p="http://schemas.openxmlformats.org/presentationml/2006/main" xmlns:r="http://schemas.openxmlformats.org/officeDocument/2006/relationships">
+  <p:cSld>
+    <p:spTree>
+      <p:nvGrpSpPr>
+        <p:cNvPr id="1" name=""/>
+        <p:cNvGrpSpPr/>
+        <p:nvPr/>
+      </p:nvGrpSpPr>
+      <p:grpSpPr/>
+      <p:sp>
+        <p:nvSpPr>
+          <p:cNvPr id="2" name="Rectangle 1"/>
+          <p:cNvSpPr/>
+          <p:nvPr/>
+        </p:nvSpPr>
+        <p:spPr>
+          <a:xfrm>
+            <a:off x="0" y="0"/>
+            <a:ext cx="12191695" cy="1097280"/>
+          </a:xfrm>
+          <a:prstGeom prst="rect">
+            <a:avLst/>
+          </a:prstGeom>
+          <a:solidFill>
+            <a:srgbClr val="B8860B"/>
+          </a:solidFill>
+          <a:ln>
+            <a:noFill/>
+          </a:ln>
+        </p:spPr>
+        <p:style>
+          <a:lnRef idx="1">
+            <a:schemeClr val="accent1"/>
+          </a:lnRef>
+          <a:fillRef idx="3">
+            <a:schemeClr val="accent1"/>
+          </a:fillRef>
+          <a:effectRef idx="2">
+            <a:schemeClr val="accent1"/>
+          </a:effectRef>
+          <a:fontRef idx="minor">
+            <a:schemeClr val="lt1"/>
+          </a:fontRef>
+        </p:style>
+        <p:txBody>
+          <a:bodyPr rtlCol="0" anchor="ctr"/>
+          <a:lstStyle/>
+          <a:p>
+            <a:pPr algn="ctr"/>
+          </a:p>
+        </p:txBody>
+      </p:sp>
+      <p:sp>
+        <p:nvSpPr>
+          <p:cNvPr id="3" name="TextBox 2"/>
+          <p:cNvSpPr txBox="1"/>
+          <p:nvPr/>
+        </p:nvSpPr>
+        <p:spPr>
+          <a:xfrm>
+            <a:off x="457200" y="182880"/>
+            <a:ext cx="11277295" cy="731520"/>
+          </a:xfrm>
+          <a:prstGeom prst="rect">
+            <a:avLst/>
+          </a:prstGeom>
+          <a:noFill/>
+        </p:spPr>
+        <p:txBody>
+          <a:bodyPr wrap="none" anchor="ctr">
+            <a:spAutoFit/>
+          </a:bodyPr>
+          <a:lstStyle/>
+          <a:p>
+            <a:pPr algn="l">
+              <a:defRPr sz="3600" b="1">
+                <a:solidFill>
+                  <a:srgbClr val="FFFFFF"/>
+                </a:solidFill>
+              </a:defRPr>
+            </a:pPr>
+            <a:r>
+              <a:t>Conclusiones</a:t>
+            </a:r>
+          </a:p>
+        </p:txBody>
+      </p:sp>
+      <p:sp>
+        <p:nvSpPr>
+          <p:cNvPr id="4" name="TextBox 3"/>
+          <p:cNvSpPr txBox="1"/>
+          <p:nvPr/>
+        </p:nvSpPr>
+        <p:spPr>
+          <a:xfrm>
+            <a:off x="914400" y="1371600"/>
+            <a:ext cx="10362895" cy="2286000"/>
+          </a:xfrm>
+          <a:prstGeom prst="rect">
+            <a:avLst/>
+          </a:prstGeom>
+          <a:noFill/>
+        </p:spPr>
+        <p:txBody>
+          <a:bodyPr wrap="none">
+            <a:spAutoFit/>
+          </a:bodyPr>
+          <a:lstStyle/>
+          <a:p>
+            <a:pPr>
+              <a:spcAft>
+                <a:spcPts val="1000"/>
+              </a:spcAft>
+              <a:defRPr sz="2400" b="1">
+                <a:solidFill>
+                  <a:srgbClr val="4CAF50"/>
+                </a:solidFill>
+              </a:defRPr>
+            </a:pPr>
+            <a:r>
+              <a:t>Logros Principales:</a:t>
+            </a:r>
+          </a:p>
+          <a:p>
+            <a:pPr>
+              <a:spcAft>
+                <a:spcPts val="800"/>
+              </a:spcAft>
+              <a:defRPr sz="1800">
+                <a:solidFill>
+                  <a:srgbClr val="333333"/>
+                </a:solidFill>
+              </a:defRPr>
+            </a:pPr>
+            <a:r>
+              <a:t>✓ 100% de pruebas unitarias pasando - Backend estable y confiable</a:t>
+            </a:r>
+          </a:p>
+          <a:p>
+            <a:pPr>
+              <a:spcAft>
+                <a:spcPts val="800"/>
+              </a:spcAft>
+              <a:defRPr sz="1800">
+                <a:solidFill>
+                  <a:srgbClr val="333333"/>
+                </a:solidFill>
+              </a:defRPr>
+            </a:pPr>
+            <a:r>
+              <a:t>✓ 94.3% de pruebas totales exitosas - Alta calidad general</a:t>
+            </a:r>
+          </a:p>
+          <a:p>
+            <a:pPr>
+              <a:spcAft>
+                <a:spcPts val="800"/>
+              </a:spcAft>
+              <a:defRPr sz="1800">
+                <a:solidFill>
+                  <a:srgbClr val="333333"/>
+                </a:solidFill>
+              </a:defRPr>
+            </a:pPr>
+            <a:r>
+              <a:t>✓ 0 defectos críticos o altos - Sistema listo para producción</a:t>
+            </a:r>
+          </a:p>
+          <a:p>
+            <a:pPr>
+              <a:spcAft>
+                <a:spcPts val="800"/>
+              </a:spcAft>
+              <a:defRPr sz="1800">
+                <a:solidFill>
+                  <a:srgbClr val="333333"/>
+                </a:solidFill>
+              </a:defRPr>
+            </a:pPr>
+            <a:r>
+              <a:t>✓ SUS 80/100 - Muy buena usabilidad (sobre estándar industria)</a:t>
+            </a:r>
+          </a:p>
+          <a:p>
+            <a:pPr>
+              <a:spcAft>
+                <a:spcPts val="800"/>
+              </a:spcAft>
+              <a:defRPr sz="1800">
+                <a:solidFill>
+                  <a:srgbClr val="333333"/>
+                </a:solidFill>
+              </a:defRPr>
+            </a:pPr>
+            <a:r>
+              <a:t>✓ Integración Transbank validada - Pagos funcionando correctamente</a:t>
+            </a:r>
+          </a:p>
+        </p:txBody>
+      </p:sp>
+      <p:sp>
+        <p:nvSpPr>
+          <p:cNvPr id="5" name="TextBox 4"/>
+          <p:cNvSpPr txBox="1"/>
+          <p:nvPr/>
+        </p:nvSpPr>
+        <p:spPr>
+          <a:xfrm>
+            <a:off x="914400" y="3931920"/>
+            <a:ext cx="10362895" cy="1828800"/>
+          </a:xfrm>
+          <a:prstGeom prst="rect">
+            <a:avLst/>
+          </a:prstGeom>
+          <a:noFill/>
+        </p:spPr>
+        <p:txBody>
+          <a:bodyPr wrap="none">
+            <a:spAutoFit/>
+          </a:bodyPr>
+          <a:lstStyle/>
+          <a:p>
+            <a:pPr>
+              <a:spcAft>
+                <a:spcPts val="1000"/>
+              </a:spcAft>
+              <a:defRPr sz="2400" b="1">
+                <a:solidFill>
+                  <a:srgbClr val="FF9800"/>
+                </a:solidFill>
+              </a:defRPr>
+            </a:pPr>
+            <a:r>
+              <a:t>Áreas de Mejora Identificadas:</a:t>
+            </a:r>
+          </a:p>
+          <a:p>
+            <a:pPr>
+              <a:spcAft>
+                <a:spcPts val="800"/>
+              </a:spcAft>
+              <a:defRPr sz="1800">
+                <a:solidFill>
+                  <a:srgbClr val="333333"/>
+                </a:solidFill>
+              </a:defRPr>
+            </a:pPr>
+            <a:r>
+              <a:t>⚙ Aumentar cobertura de código en controladores (objetivo: 70%)</a:t>
+            </a:r>
+          </a:p>
+          <a:p>
+            <a:pPr>
+              <a:spcAft>
+                <a:spcPts val="800"/>
+              </a:spcAft>
+              <a:defRPr sz="1800">
+                <a:solidFill>
+                  <a:srgbClr val="333333"/>
+                </a:solidFill>
+              </a:defRPr>
+            </a:pPr>
+            <a:r>
+              <a:t>⚙ Mejorar visibilidad de elementos UI críticos</a:t>
+            </a:r>
+          </a:p>
+          <a:p>
+            <a:pPr>
+              <a:spcAft>
+                <a:spcPts val="800"/>
+              </a:spcAft>
+              <a:defRPr sz="1800">
+                <a:solidFill>
+                  <a:srgbClr val="333333"/>
+                </a:solidFill>
+              </a:defRPr>
+            </a:pPr>
+            <a:r>
+              <a:t>⚙ Implementar mejoras de usabilidad identificadas</a:t>
+            </a:r>
+          </a:p>
+        </p:txBody>
+      </p:sp>
+    </p:spTree>
+  </p:cSld>
+  <p:clrMapOvr>
+    <a:masterClrMapping/>
+  </p:clrMapOvr>
+</p:sld>
+</file>
+
+<file path=ppt/slides/slide19.xml><?xml version="1.0" encoding="utf-8"?>
+<p:sld xmlns:a="http://schemas.openxmlformats.org/drawingml/2006/main" xmlns:p="http://schemas.openxmlformats.org/presentationml/2006/main" xmlns:r="http://schemas.openxmlformats.org/officeDocument/2006/relationships">
+  <p:cSld>
+    <p:spTree>
+      <p:nvGrpSpPr>
+        <p:cNvPr id="1" name=""/>
+        <p:cNvGrpSpPr/>
+        <p:nvPr/>
+      </p:nvGrpSpPr>
+      <p:grpSpPr/>
+      <p:sp>
+        <p:nvSpPr>
+          <p:cNvPr id="2" name="Rectangle 1"/>
+          <p:cNvSpPr/>
+          <p:nvPr/>
+        </p:nvSpPr>
+        <p:spPr>
+          <a:xfrm>
+            <a:off x="0" y="0"/>
+            <a:ext cx="12191695" cy="1097280"/>
+          </a:xfrm>
+          <a:prstGeom prst="rect">
+            <a:avLst/>
+          </a:prstGeom>
+          <a:solidFill>
+            <a:srgbClr val="B8860B"/>
+          </a:solidFill>
+          <a:ln>
+            <a:noFill/>
+          </a:ln>
+        </p:spPr>
+        <p:style>
+          <a:lnRef idx="1">
+            <a:schemeClr val="accent1"/>
+          </a:lnRef>
+          <a:fillRef idx="3">
+            <a:schemeClr val="accent1"/>
+          </a:fillRef>
+          <a:effectRef idx="2">
+            <a:schemeClr val="accent1"/>
+          </a:effectRef>
+          <a:fontRef idx="minor">
+            <a:schemeClr val="lt1"/>
+          </a:fontRef>
+        </p:style>
+        <p:txBody>
+          <a:bodyPr rtlCol="0" anchor="ctr"/>
+          <a:lstStyle/>
+          <a:p>
+            <a:pPr algn="ctr"/>
+          </a:p>
+        </p:txBody>
+      </p:sp>
+      <p:sp>
+        <p:nvSpPr>
+          <p:cNvPr id="3" name="TextBox 2"/>
+          <p:cNvSpPr txBox="1"/>
+          <p:nvPr/>
+        </p:nvSpPr>
+        <p:spPr>
+          <a:xfrm>
+            <a:off x="457200" y="182880"/>
+            <a:ext cx="11277295" cy="731520"/>
+          </a:xfrm>
+          <a:prstGeom prst="rect">
+            <a:avLst/>
+          </a:prstGeom>
+          <a:noFill/>
+        </p:spPr>
+        <p:txBody>
+          <a:bodyPr wrap="none" anchor="ctr">
+            <a:spAutoFit/>
+          </a:bodyPr>
+          <a:lstStyle/>
+          <a:p>
+            <a:pPr algn="l">
+              <a:defRPr sz="3600" b="1">
+                <a:solidFill>
+                  <a:srgbClr val="FFFFFF"/>
+                </a:solidFill>
+              </a:defRPr>
+            </a:pPr>
+            <a:r>
+              <a:t>Lecciones Aprendidas</a:t>
+            </a:r>
+          </a:p>
+        </p:txBody>
+      </p:sp>
+      <p:sp>
+        <p:nvSpPr>
+          <p:cNvPr id="4" name="TextBox 3"/>
+          <p:cNvSpPr txBox="1"/>
+          <p:nvPr/>
+        </p:nvSpPr>
+        <p:spPr>
+          <a:xfrm>
+            <a:off x="1371600" y="1371600"/>
+            <a:ext cx="9144000" cy="4572000"/>
+          </a:xfrm>
+          <a:prstGeom prst="rect">
+            <a:avLst/>
+          </a:prstGeom>
+          <a:noFill/>
+        </p:spPr>
+        <p:txBody>
+          <a:bodyPr wrap="none">
+            <a:spAutoFit/>
+          </a:bodyPr>
+          <a:lstStyle/>
+          <a:p>
+            <a:pPr>
+              <a:spcAft>
+                <a:spcPts val="1000"/>
+              </a:spcAft>
+              <a:defRPr sz="1700">
+                <a:solidFill>
+                  <a:srgbClr val="333333"/>
+                </a:solidFill>
+              </a:defRPr>
+            </a:pPr>
+            <a:r>
+              <a:rPr b="1">
+                <a:solidFill>
+                  <a:srgbClr val="B8860B"/>
+                </a:solidFill>
+              </a:rPr>
+              <a:t>1. Valor de los Mocks: Implementación de mocks para servicios externos permitió testing confiable e independiente</a:t>
+            </a:r>
+          </a:p>
+          <a:p>
+            <a:pPr>
+              <a:spcAft>
+                <a:spcPts val="1000"/>
+              </a:spcAft>
+              <a:defRPr sz="1700">
+                <a:solidFill>
+                  <a:srgbClr val="333333"/>
+                </a:solidFill>
+              </a:defRPr>
+            </a:pPr>
+            <a:r>
+              <a:rPr b="1">
+                <a:solidFill>
+                  <a:srgbClr val="B8860B"/>
+                </a:solidFill>
+              </a:rPr>
+              <a:t>2. Testing Temprano: Implementar tests desde etapas iniciales facilita detección temprana de problemas</a:t>
+            </a:r>
+          </a:p>
+          <a:p>
+            <a:pPr>
+              <a:spcAft>
+                <a:spcPts val="1000"/>
+              </a:spcAft>
+              <a:defRPr sz="1700">
+                <a:solidFill>
+                  <a:srgbClr val="333333"/>
+                </a:solidFill>
+              </a:defRPr>
+            </a:pPr>
+            <a:r>
+              <a:rPr b="1">
+                <a:solidFill>
+                  <a:srgbClr val="B8860B"/>
+                </a:solidFill>
+              </a:rPr>
+              <a:t>3. Mantenimiento de Tests E2E: Usar data-testid en lugar de clases CSS para mayor estabilidad</a:t>
+            </a:r>
+          </a:p>
+          <a:p>
+            <a:pPr>
+              <a:spcAft>
+                <a:spcPts val="1000"/>
+              </a:spcAft>
+              <a:defRPr sz="1700">
+                <a:solidFill>
+                  <a:srgbClr val="333333"/>
+                </a:solidFill>
+              </a:defRPr>
+            </a:pPr>
+            <a:r>
+              <a:rPr b="1">
+                <a:solidFill>
+                  <a:srgbClr val="B8860B"/>
+                </a:solidFill>
+              </a:rPr>
+              <a:t>4. Cobertura vs Calidad: 44.39% de cobertura es adecuado al cubrir casos críticos - más valioso que cobertura alta superficial</a:t>
+            </a:r>
+          </a:p>
+          <a:p>
+            <a:pPr>
+              <a:spcAft>
+                <a:spcPts val="1000"/>
+              </a:spcAft>
+              <a:defRPr sz="1700">
+                <a:solidFill>
+                  <a:srgbClr val="333333"/>
+                </a:solidFill>
+              </a:defRPr>
+            </a:pPr>
+            <a:r>
+              <a:rPr b="1">
+                <a:solidFill>
+                  <a:srgbClr val="B8860B"/>
+                </a:solidFill>
+              </a:rPr>
+              <a:t>5. Tests de Usabilidad: Usuarios reales revelan problemas de UX que tests automatizados no detectan</a:t>
+            </a:r>
+          </a:p>
+          <a:p>
+            <a:pPr>
+              <a:spcAft>
+                <a:spcPts val="1000"/>
+              </a:spcAft>
+              <a:defRPr sz="1700">
+                <a:solidFill>
+                  <a:srgbClr val="333333"/>
+                </a:solidFill>
+              </a:defRPr>
+            </a:pPr>
+            <a:r>
+              <a:rPr b="1">
+                <a:solidFill>
+                  <a:srgbClr val="B8860B"/>
+                </a:solidFill>
+              </a:rPr>
+              <a:t>6. Estrategia Híbrida: Combinación de pruebas unitarias (backend) y E2E (frontend) proporciona cobertura integral</a:t>
+            </a:r>
+          </a:p>
+        </p:txBody>
+      </p:sp>
+    </p:spTree>
+  </p:cSld>
+  <p:clrMapOvr>
+    <a:masterClrMapping/>
+  </p:clrMapOvr>
+</p:sld>
+</file>
+
+<file path=ppt/slides/slide2.xml><?xml version="1.0" encoding="utf-8"?>
+<p:sld xmlns:a="http://schemas.openxmlformats.org/drawingml/2006/main" xmlns:p="http://schemas.openxmlformats.org/presentationml/2006/main" xmlns:r="http://schemas.openxmlformats.org/officeDocument/2006/relationships">
+  <p:cSld>
+    <p:spTree>
+      <p:nvGrpSpPr>
+        <p:cNvPr id="1" name=""/>
+        <p:cNvGrpSpPr/>
+        <p:nvPr/>
+      </p:nvGrpSpPr>
+      <p:grpSpPr/>
+      <p:sp>
+        <p:nvSpPr>
+          <p:cNvPr id="2" name="Rectangle 1"/>
+          <p:cNvSpPr/>
+          <p:nvPr/>
+        </p:nvSpPr>
+        <p:spPr>
+          <a:xfrm>
+            <a:off x="0" y="0"/>
+            <a:ext cx="12191695" cy="1097280"/>
+          </a:xfrm>
+          <a:prstGeom prst="rect">
+            <a:avLst/>
+          </a:prstGeom>
+          <a:solidFill>
+            <a:srgbClr val="B8860B"/>
+          </a:solidFill>
+          <a:ln>
+            <a:noFill/>
+          </a:ln>
+        </p:spPr>
+        <p:style>
+          <a:lnRef idx="1">
+            <a:schemeClr val="accent1"/>
+          </a:lnRef>
+          <a:fillRef idx="3">
+            <a:schemeClr val="accent1"/>
+          </a:fillRef>
+          <a:effectRef idx="2">
+            <a:schemeClr val="accent1"/>
+          </a:effectRef>
+          <a:fontRef idx="minor">
+            <a:schemeClr val="lt1"/>
+          </a:fontRef>
+        </p:style>
+        <p:txBody>
+          <a:bodyPr rtlCol="0" anchor="ctr"/>
+          <a:lstStyle/>
+          <a:p>
+            <a:pPr algn="ctr"/>
+          </a:p>
+        </p:txBody>
+      </p:sp>
+      <p:sp>
+        <p:nvSpPr>
+          <p:cNvPr id="3" name="TextBox 2"/>
+          <p:cNvSpPr txBox="1"/>
+          <p:nvPr/>
+        </p:nvSpPr>
+        <p:spPr>
+          <a:xfrm>
+            <a:off x="457200" y="182880"/>
+            <a:ext cx="11277295" cy="731520"/>
+          </a:xfrm>
+          <a:prstGeom prst="rect">
+            <a:avLst/>
+          </a:prstGeom>
+          <a:noFill/>
+        </p:spPr>
+        <p:txBody>
+          <a:bodyPr wrap="none" anchor="ctr">
+            <a:spAutoFit/>
+          </a:bodyPr>
+          <a:lstStyle/>
+          <a:p>
+            <a:pPr algn="l">
+              <a:defRPr sz="3600" b="1">
+                <a:solidFill>
+                  <a:srgbClr val="FFFFFF"/>
+                </a:solidFill>
+              </a:defRPr>
+            </a:pPr>
+            <a:r>
+              <a:t>Índice</a:t>
+            </a:r>
+          </a:p>
+        </p:txBody>
+      </p:sp>
+      <p:sp>
+        <p:nvSpPr>
+          <p:cNvPr id="4" name="TextBox 3"/>
+          <p:cNvSpPr txBox="1"/>
+          <p:nvPr/>
+        </p:nvSpPr>
+        <p:spPr>
+          <a:xfrm>
+            <a:off x="1371600" y="1371600"/>
+            <a:ext cx="9144000" cy="4572000"/>
+          </a:xfrm>
+          <a:prstGeom prst="rect">
+            <a:avLst/>
+          </a:prstGeom>
+          <a:noFill/>
+        </p:spPr>
+        <p:txBody>
+          <a:bodyPr wrap="none">
+            <a:spAutoFit/>
+          </a:bodyPr>
+          <a:lstStyle/>
+          <a:p/>
+          <a:p>
+            <a:pPr>
+              <a:spcAft>
+                <a:spcPts val="1000"/>
+              </a:spcAft>
+              <a:defRPr sz="2200">
+                <a:solidFill>
+                  <a:srgbClr val="333333"/>
+                </a:solidFill>
+              </a:defRPr>
+            </a:pPr>
+            <a:r>
+              <a:t>1. Introducción al Proyecto</a:t>
+            </a:r>
+          </a:p>
+          <a:p>
+            <a:pPr>
+              <a:spcAft>
+                <a:spcPts val="1000"/>
+              </a:spcAft>
+              <a:defRPr sz="2200">
+                <a:solidFill>
+                  <a:srgbClr val="333333"/>
+                </a:solidFill>
+              </a:defRPr>
+            </a:pPr>
+            <a:r>
+              <a:t>2. Objetivos del Plan de Pruebas</a:t>
+            </a:r>
+          </a:p>
+          <a:p>
+            <a:pPr>
+              <a:spcAft>
+                <a:spcPts val="1000"/>
+              </a:spcAft>
+              <a:defRPr sz="2200">
+                <a:solidFill>
+                  <a:srgbClr val="333333"/>
+                </a:solidFill>
+              </a:defRPr>
+            </a:pPr>
+            <a:r>
+              <a:t>3. Alcance de las Pruebas</a:t>
+            </a:r>
+          </a:p>
+          <a:p>
+            <a:pPr>
+              <a:spcAft>
+                <a:spcPts val="1000"/>
+              </a:spcAft>
+              <a:defRPr sz="2200">
+                <a:solidFill>
+                  <a:srgbClr val="333333"/>
+                </a:solidFill>
+              </a:defRPr>
+            </a:pPr>
+            <a:r>
+              <a:t>4. Tipos de Pruebas Implementadas</a:t>
+            </a:r>
+          </a:p>
+          <a:p>
+            <a:pPr>
+              <a:spcAft>
+                <a:spcPts val="1000"/>
+              </a:spcAft>
+              <a:defRPr sz="2200">
+                <a:solidFill>
+                  <a:srgbClr val="333333"/>
+                </a:solidFill>
+              </a:defRPr>
+            </a:pPr>
+            <a:r>
+              <a:t>5. Criterios de Éxito</a:t>
+            </a:r>
+          </a:p>
+          <a:p>
+            <a:pPr>
+              <a:spcAft>
+                <a:spcPts val="1000"/>
+              </a:spcAft>
+              <a:defRPr sz="2200">
+                <a:solidFill>
+                  <a:srgbClr val="333333"/>
+                </a:solidFill>
+              </a:defRPr>
+            </a:pPr>
+            <a:r>
+              <a:t>6. Entorno de Pruebas</a:t>
+            </a:r>
+          </a:p>
+          <a:p>
+            <a:pPr>
+              <a:spcAft>
+                <a:spcPts val="1000"/>
+              </a:spcAft>
+              <a:defRPr sz="2200">
+                <a:solidFill>
+                  <a:srgbClr val="333333"/>
+                </a:solidFill>
+              </a:defRPr>
+            </a:pPr>
+            <a:r>
+              <a:t>7. Casos de Prueba Principales</a:t>
+            </a:r>
+          </a:p>
+          <a:p>
+            <a:pPr>
+              <a:spcAft>
+                <a:spcPts val="1000"/>
+              </a:spcAft>
+              <a:defRPr sz="2200">
+                <a:solidFill>
+                  <a:srgbClr val="333333"/>
+                </a:solidFill>
+              </a:defRPr>
+            </a:pPr>
+            <a:r>
+              <a:t>8. Resultados de las Pruebas</a:t>
+            </a:r>
+          </a:p>
+          <a:p>
+            <a:pPr>
+              <a:spcAft>
+                <a:spcPts val="1000"/>
+              </a:spcAft>
+              <a:defRPr sz="2200">
+                <a:solidFill>
+                  <a:srgbClr val="333333"/>
+                </a:solidFill>
+              </a:defRPr>
+            </a:pPr>
+            <a:r>
+              <a:t>9. Test de Usabilidad</a:t>
+            </a:r>
+          </a:p>
+          <a:p>
+            <a:pPr>
+              <a:spcAft>
+                <a:spcPts val="1000"/>
+              </a:spcAft>
+              <a:defRPr sz="2200">
+                <a:solidFill>
+                  <a:srgbClr val="333333"/>
+                </a:solidFill>
+              </a:defRPr>
+            </a:pPr>
+            <a:r>
+              <a:t>10. Gestión de Defectos</a:t>
+            </a:r>
+          </a:p>
+          <a:p>
+            <a:pPr>
+              <a:spcAft>
+                <a:spcPts val="1000"/>
+              </a:spcAft>
+              <a:defRPr sz="2200">
+                <a:solidFill>
+                  <a:srgbClr val="333333"/>
+                </a:solidFill>
+              </a:defRPr>
+            </a:pPr>
+            <a:r>
+              <a:t>11. Métricas Finales</a:t>
+            </a:r>
+          </a:p>
+          <a:p>
+            <a:pPr>
+              <a:spcAft>
+                <a:spcPts val="1000"/>
+              </a:spcAft>
+              <a:defRPr sz="2200">
+                <a:solidFill>
+                  <a:srgbClr val="333333"/>
+                </a:solidFill>
+              </a:defRPr>
+            </a:pPr>
+            <a:r>
+              <a:t>12. Conclusiones y Lecciones Aprendidas</a:t>
+            </a:r>
+          </a:p>
+        </p:txBody>
+      </p:sp>
+    </p:spTree>
+  </p:cSld>
+  <p:clrMapOvr>
+    <a:masterClrMapping/>
+  </p:clrMapOvr>
+</p:sld>
+</file>
+
+<file path=ppt/slides/slide20.xml><?xml version="1.0" encoding="utf-8"?>
+<p:sld xmlns:a="http://schemas.openxmlformats.org/drawingml/2006/main" xmlns:p="http://schemas.openxmlformats.org/presentationml/2006/main" xmlns:r="http://schemas.openxmlformats.org/officeDocument/2006/relationships">
+  <p:cSld>
+    <p:spTree>
+      <p:nvGrpSpPr>
+        <p:cNvPr id="1" name=""/>
+        <p:cNvGrpSpPr/>
+        <p:nvPr/>
+      </p:nvGrpSpPr>
+      <p:grpSpPr/>
+      <p:sp>
+        <p:nvSpPr>
+          <p:cNvPr id="2" name="Rectangle 1"/>
+          <p:cNvSpPr/>
+          <p:nvPr/>
+        </p:nvSpPr>
+        <p:spPr>
+          <a:xfrm>
+            <a:off x="0" y="0"/>
+            <a:ext cx="12191695" cy="2286000"/>
+          </a:xfrm>
+          <a:prstGeom prst="rect">
+            <a:avLst/>
+          </a:prstGeom>
+          <a:solidFill>
+            <a:srgbClr val="B8860B"/>
+          </a:solidFill>
+          <a:ln>
+            <a:noFill/>
+          </a:ln>
+        </p:spPr>
+        <p:style>
+          <a:lnRef idx="1">
+            <a:schemeClr val="accent1"/>
+          </a:lnRef>
+          <a:fillRef idx="3">
+            <a:schemeClr val="accent1"/>
+          </a:fillRef>
+          <a:effectRef idx="2">
+            <a:schemeClr val="accent1"/>
+          </a:effectRef>
+          <a:fontRef idx="minor">
+            <a:schemeClr val="lt1"/>
+          </a:fontRef>
+        </p:style>
+        <p:txBody>
+          <a:bodyPr rtlCol="0" anchor="ctr"/>
+          <a:lstStyle/>
+          <a:p>
+            <a:pPr algn="ctr"/>
+          </a:p>
+        </p:txBody>
+      </p:sp>
+      <p:sp>
+        <p:nvSpPr>
+          <p:cNvPr id="3" name="TextBox 2"/>
+          <p:cNvSpPr txBox="1"/>
+          <p:nvPr/>
+        </p:nvSpPr>
+        <p:spPr>
+          <a:xfrm>
+            <a:off x="1828800" y="2286000"/>
+            <a:ext cx="8534095" cy="1371600"/>
+          </a:xfrm>
+          <a:prstGeom prst="rect">
+            <a:avLst/>
+          </a:prstGeom>
+          <a:noFill/>
+        </p:spPr>
+        <p:txBody>
+          <a:bodyPr wrap="none">
+            <a:spAutoFit/>
+          </a:bodyPr>
+          <a:lstStyle/>
+          <a:p>
+            <a:pPr algn="ctr">
+              <a:defRPr sz="7200" b="1">
+                <a:solidFill>
+                  <a:srgbClr val="B8860B"/>
+                </a:solidFill>
+              </a:defRPr>
+            </a:pPr>
+            <a:r>
+              <a:t>Gracias</a:t>
+            </a:r>
+          </a:p>
+          <a:p>
+            <a:pPr algn="ctr">
+              <a:defRPr sz="4400">
+                <a:solidFill>
+                  <a:srgbClr val="333333"/>
+                </a:solidFill>
+              </a:defRPr>
+            </a:pPr>
+            <a:r>
+              <a:t>por su atención</a:t>
+            </a:r>
+          </a:p>
+        </p:txBody>
+      </p:sp>
+      <p:sp>
+        <p:nvSpPr>
+          <p:cNvPr id="4" name="TextBox 3"/>
+          <p:cNvSpPr txBox="1"/>
+          <p:nvPr/>
+        </p:nvSpPr>
+        <p:spPr>
+          <a:xfrm>
+            <a:off x="1828800" y="4114800"/>
+            <a:ext cx="8534095" cy="1828800"/>
+          </a:xfrm>
+          <a:prstGeom prst="rect">
+            <a:avLst/>
+          </a:prstGeom>
+          <a:noFill/>
+        </p:spPr>
+        <p:txBody>
+          <a:bodyPr wrap="none">
+            <a:spAutoFit/>
+          </a:bodyPr>
+          <a:lstStyle/>
+          <a:p>
+            <a:pPr algn="ctr">
+              <a:spcAft>
+                <a:spcPts val="1000"/>
+              </a:spcAft>
+              <a:defRPr sz="2800" b="1">
+                <a:solidFill>
+                  <a:srgbClr val="333333"/>
+                </a:solidFill>
+              </a:defRPr>
+            </a:pPr>
+            <a:r>
+              <a:t>Joaquin Cancino Torres</a:t>
+            </a:r>
+          </a:p>
+          <a:p>
+            <a:pPr algn="ctr">
+              <a:spcAft>
+                <a:spcPts val="600"/>
+              </a:spcAft>
+              <a:defRPr sz="2200">
+                <a:solidFill>
+                  <a:srgbClr val="333333"/>
+                </a:solidFill>
+              </a:defRPr>
+            </a:pPr>
+            <a:r>
+              <a:t>INF-524 - Taller de Desarrollo de Software</a:t>
+            </a:r>
+          </a:p>
+          <a:p>
+            <a:pPr algn="ctr">
+              <a:spcAft>
+                <a:spcPts val="2000"/>
+              </a:spcAft>
+              <a:defRPr sz="2200">
+                <a:solidFill>
+                  <a:srgbClr val="333333"/>
+                </a:solidFill>
+              </a:defRPr>
+            </a:pPr>
+            <a:r>
+              <a:t>Universidad Católica del Maule</a:t>
+            </a:r>
+          </a:p>
+          <a:p>
+            <a:pPr algn="ctr">
+              <a:defRPr sz="2000">
+                <a:solidFill>
+                  <a:srgbClr val="DAA520"/>
+                </a:solidFill>
+              </a:defRPr>
+            </a:pPr>
+            <a:r>
+              <a:t>Noviembre 2024</a:t>
+            </a:r>
+          </a:p>
+        </p:txBody>
+      </p:sp>
+    </p:spTree>
+  </p:cSld>
+  <p:clrMapOvr>
+    <a:masterClrMapping/>
+  </p:clrMapOvr>
+</p:sld>
+</file>
+
+<file path=ppt/slides/slide3.xml><?xml version="1.0" encoding="utf-8"?>
+<p:sld xmlns:a="http://schemas.openxmlformats.org/drawingml/2006/main" xmlns:p="http://schemas.openxmlformats.org/presentationml/2006/main" xmlns:r="http://schemas.openxmlformats.org/officeDocument/2006/relationships">
+  <p:cSld>
+    <p:spTree>
+      <p:nvGrpSpPr>
+        <p:cNvPr id="1" name=""/>
+        <p:cNvGrpSpPr/>
+        <p:nvPr/>
+      </p:nvGrpSpPr>
+      <p:grpSpPr/>
+      <p:sp>
+        <p:nvSpPr>
+          <p:cNvPr id="2" name="Rectangle 1"/>
+          <p:cNvSpPr/>
+          <p:nvPr/>
+        </p:nvSpPr>
+        <p:spPr>
+          <a:xfrm>
+            <a:off x="0" y="0"/>
+            <a:ext cx="12191695" cy="1097280"/>
+          </a:xfrm>
+          <a:prstGeom prst="rect">
+            <a:avLst/>
+          </a:prstGeom>
+          <a:solidFill>
+            <a:srgbClr val="B8860B"/>
+          </a:solidFill>
+          <a:ln>
+            <a:noFill/>
+          </a:ln>
+        </p:spPr>
+        <p:style>
+          <a:lnRef idx="1">
+            <a:schemeClr val="accent1"/>
+          </a:lnRef>
+          <a:fillRef idx="3">
+            <a:schemeClr val="accent1"/>
+          </a:fillRef>
+          <a:effectRef idx="2">
+            <a:schemeClr val="accent1"/>
+          </a:effectRef>
+          <a:fontRef idx="minor">
+            <a:schemeClr val="lt1"/>
+          </a:fontRef>
+        </p:style>
+        <p:txBody>
+          <a:bodyPr rtlCol="0" anchor="ctr"/>
+          <a:lstStyle/>
+          <a:p>
+            <a:pPr algn="ctr"/>
+          </a:p>
+        </p:txBody>
+      </p:sp>
+      <p:sp>
+        <p:nvSpPr>
+          <p:cNvPr id="3" name="TextBox 2"/>
+          <p:cNvSpPr txBox="1"/>
+          <p:nvPr/>
+        </p:nvSpPr>
+        <p:spPr>
+          <a:xfrm>
+            <a:off x="457200" y="182880"/>
+            <a:ext cx="11277295" cy="731520"/>
+          </a:xfrm>
+          <a:prstGeom prst="rect">
+            <a:avLst/>
+          </a:prstGeom>
+          <a:noFill/>
+        </p:spPr>
+        <p:txBody>
+          <a:bodyPr wrap="none" anchor="ctr">
+            <a:spAutoFit/>
+          </a:bodyPr>
+          <a:lstStyle/>
+          <a:p>
+            <a:pPr algn="l">
+              <a:defRPr sz="3600" b="1">
+                <a:solidFill>
+                  <a:srgbClr val="FFFFFF"/>
+                </a:solidFill>
+              </a:defRPr>
+            </a:pPr>
+            <a:r>
               <a:t>Contexto del Proyecto</a:t>
             </a:r>
           </a:p>
@@ -3665,7 +7630,7 @@
       </p:sp>
       <p:sp>
         <p:nvSpPr>
-          <p:cNvPr id="11" name="Rounded Rectangle 10"/>
+          <p:cNvPr id="4" name="Rounded Rectangle 3"/>
           <p:cNvSpPr/>
           <p:nvPr/>
         </p:nvSpPr>
@@ -3731,7 +7696,7 @@
       </p:sp>
       <p:sp>
         <p:nvSpPr>
-          <p:cNvPr id="12" name="TextBox 11"/>
+          <p:cNvPr id="5" name="TextBox 4"/>
           <p:cNvSpPr txBox="1"/>
           <p:nvPr/>
         </p:nvSpPr>
@@ -3827,9 +7792,27 @@
           </a:p>
         </p:txBody>
       </p:sp>
-      <p:sp>
-        <p:nvSpPr>
-          <p:cNvPr id="13" name="Rectangle 12"/>
+    </p:spTree>
+  </p:cSld>
+  <p:clrMapOvr>
+    <a:masterClrMapping/>
+  </p:clrMapOvr>
+</p:sld>
+</file>
+
+<file path=ppt/slides/slide4.xml><?xml version="1.0" encoding="utf-8"?>
+<p:sld xmlns:a="http://schemas.openxmlformats.org/drawingml/2006/main" xmlns:p="http://schemas.openxmlformats.org/presentationml/2006/main" xmlns:r="http://schemas.openxmlformats.org/officeDocument/2006/relationships">
+  <p:cSld>
+    <p:spTree>
+      <p:nvGrpSpPr>
+        <p:cNvPr id="1" name=""/>
+        <p:cNvGrpSpPr/>
+        <p:nvPr/>
+      </p:nvGrpSpPr>
+      <p:grpSpPr/>
+      <p:sp>
+        <p:nvSpPr>
+          <p:cNvPr id="2" name="Rectangle 1"/>
           <p:cNvSpPr/>
           <p:nvPr/>
         </p:nvSpPr>
@@ -3872,7 +7855,7 @@
       </p:sp>
       <p:sp>
         <p:nvSpPr>
-          <p:cNvPr id="14" name="TextBox 13"/>
+          <p:cNvPr id="3" name="TextBox 2"/>
           <p:cNvSpPr txBox="1"/>
           <p:nvPr/>
         </p:nvSpPr>
@@ -3907,7 +7890,7 @@
       </p:sp>
       <p:sp>
         <p:nvSpPr>
-          <p:cNvPr id="15" name="TextBox 14"/>
+          <p:cNvPr id="4" name="TextBox 3"/>
           <p:cNvSpPr txBox="1"/>
           <p:nvPr/>
         </p:nvSpPr>
@@ -4051,7 +8034,7 @@
       </p:sp>
       <p:sp>
         <p:nvSpPr>
-          <p:cNvPr id="16" name="TextBox 15"/>
+          <p:cNvPr id="5" name="TextBox 4"/>
           <p:cNvSpPr txBox="1"/>
           <p:nvPr/>
         </p:nvSpPr>
@@ -4208,9 +8191,27 @@
           </a:p>
         </p:txBody>
       </p:sp>
-      <p:sp>
-        <p:nvSpPr>
-          <p:cNvPr id="17" name="Rectangle 16"/>
+    </p:spTree>
+  </p:cSld>
+  <p:clrMapOvr>
+    <a:masterClrMapping/>
+  </p:clrMapOvr>
+</p:sld>
+</file>
+
+<file path=ppt/slides/slide5.xml><?xml version="1.0" encoding="utf-8"?>
+<p:sld xmlns:a="http://schemas.openxmlformats.org/drawingml/2006/main" xmlns:p="http://schemas.openxmlformats.org/presentationml/2006/main" xmlns:r="http://schemas.openxmlformats.org/officeDocument/2006/relationships">
+  <p:cSld>
+    <p:spTree>
+      <p:nvGrpSpPr>
+        <p:cNvPr id="1" name=""/>
+        <p:cNvGrpSpPr/>
+        <p:nvPr/>
+      </p:nvGrpSpPr>
+      <p:grpSpPr/>
+      <p:sp>
+        <p:nvSpPr>
+          <p:cNvPr id="2" name="Rectangle 1"/>
           <p:cNvSpPr/>
           <p:nvPr/>
         </p:nvSpPr>
@@ -4253,7 +8254,7 @@
       </p:sp>
       <p:sp>
         <p:nvSpPr>
-          <p:cNvPr id="18" name="TextBox 17"/>
+          <p:cNvPr id="3" name="TextBox 2"/>
           <p:cNvSpPr txBox="1"/>
           <p:nvPr/>
         </p:nvSpPr>
@@ -4288,7 +8289,7 @@
       </p:sp>
       <p:sp>
         <p:nvSpPr>
-          <p:cNvPr id="19" name="Rounded Rectangle 18"/>
+          <p:cNvPr id="4" name="Rounded Rectangle 3"/>
           <p:cNvSpPr/>
           <p:nvPr/>
         </p:nvSpPr>
@@ -4355,7 +8356,7 @@
       </p:sp>
       <p:sp>
         <p:nvSpPr>
-          <p:cNvPr id="20" name="TextBox 19"/>
+          <p:cNvPr id="5" name="TextBox 4"/>
           <p:cNvSpPr txBox="1"/>
           <p:nvPr/>
         </p:nvSpPr>
@@ -4481,9 +8482,27 @@
           </a:p>
         </p:txBody>
       </p:sp>
-      <p:sp>
-        <p:nvSpPr>
-          <p:cNvPr id="21" name="Rectangle 20"/>
+    </p:spTree>
+  </p:cSld>
+  <p:clrMapOvr>
+    <a:masterClrMapping/>
+  </p:clrMapOvr>
+</p:sld>
+</file>
+
+<file path=ppt/slides/slide6.xml><?xml version="1.0" encoding="utf-8"?>
+<p:sld xmlns:a="http://schemas.openxmlformats.org/drawingml/2006/main" xmlns:p="http://schemas.openxmlformats.org/presentationml/2006/main" xmlns:r="http://schemas.openxmlformats.org/officeDocument/2006/relationships">
+  <p:cSld>
+    <p:spTree>
+      <p:nvGrpSpPr>
+        <p:cNvPr id="1" name=""/>
+        <p:cNvGrpSpPr/>
+        <p:nvPr/>
+      </p:nvGrpSpPr>
+      <p:grpSpPr/>
+      <p:sp>
+        <p:nvSpPr>
+          <p:cNvPr id="2" name="Rectangle 1"/>
           <p:cNvSpPr/>
           <p:nvPr/>
         </p:nvSpPr>
@@ -4526,7 +8545,7 @@
       </p:sp>
       <p:sp>
         <p:nvSpPr>
-          <p:cNvPr id="22" name="TextBox 21"/>
+          <p:cNvPr id="3" name="TextBox 2"/>
           <p:cNvSpPr txBox="1"/>
           <p:nvPr/>
         </p:nvSpPr>
@@ -4561,7 +8580,7 @@
       </p:sp>
       <p:sp>
         <p:nvSpPr>
-          <p:cNvPr id="23" name="TextBox 22"/>
+          <p:cNvPr id="4" name="TextBox 3"/>
           <p:cNvSpPr txBox="1"/>
           <p:nvPr/>
         </p:nvSpPr>
@@ -4689,7 +8708,7 @@
       </p:sp>
       <p:sp>
         <p:nvSpPr>
-          <p:cNvPr id="24" name="TextBox 23"/>
+          <p:cNvPr id="5" name="TextBox 4"/>
           <p:cNvSpPr txBox="1"/>
           <p:nvPr/>
         </p:nvSpPr>
@@ -4785,9 +8804,27 @@
           </a:p>
         </p:txBody>
       </p:sp>
-      <p:sp>
-        <p:nvSpPr>
-          <p:cNvPr id="25" name="Rectangle 24"/>
+    </p:spTree>
+  </p:cSld>
+  <p:clrMapOvr>
+    <a:masterClrMapping/>
+  </p:clrMapOvr>
+</p:sld>
+</file>
+
+<file path=ppt/slides/slide7.xml><?xml version="1.0" encoding="utf-8"?>
+<p:sld xmlns:a="http://schemas.openxmlformats.org/drawingml/2006/main" xmlns:p="http://schemas.openxmlformats.org/presentationml/2006/main" xmlns:r="http://schemas.openxmlformats.org/officeDocument/2006/relationships">
+  <p:cSld>
+    <p:spTree>
+      <p:nvGrpSpPr>
+        <p:cNvPr id="1" name=""/>
+        <p:cNvGrpSpPr/>
+        <p:nvPr/>
+      </p:nvGrpSpPr>
+      <p:grpSpPr/>
+      <p:sp>
+        <p:nvSpPr>
+          <p:cNvPr id="2" name="Rectangle 1"/>
           <p:cNvSpPr/>
           <p:nvPr/>
         </p:nvSpPr>
@@ -4830,7 +8867,7 @@
       </p:sp>
       <p:sp>
         <p:nvSpPr>
-          <p:cNvPr id="26" name="TextBox 25"/>
+          <p:cNvPr id="3" name="TextBox 2"/>
           <p:cNvSpPr txBox="1"/>
           <p:nvPr/>
         </p:nvSpPr>
@@ -4865,7 +8902,7 @@
       </p:sp>
       <p:sp>
         <p:nvSpPr>
-          <p:cNvPr id="27" name="Rounded Rectangle 26"/>
+          <p:cNvPr id="4" name="Rounded Rectangle 3"/>
           <p:cNvSpPr/>
           <p:nvPr/>
         </p:nvSpPr>
@@ -4997,7 +9034,7 @@
       </p:sp>
       <p:sp>
         <p:nvSpPr>
-          <p:cNvPr id="28" name="Rounded Rectangle 27"/>
+          <p:cNvPr id="5" name="Rounded Rectangle 4"/>
           <p:cNvSpPr/>
           <p:nvPr/>
         </p:nvSpPr>
@@ -5129,7 +9166,7 @@
       </p:sp>
       <p:sp>
         <p:nvSpPr>
-          <p:cNvPr id="29" name="Rounded Rectangle 28"/>
+          <p:cNvPr id="6" name="Rounded Rectangle 5"/>
           <p:cNvSpPr/>
           <p:nvPr/>
         </p:nvSpPr>
@@ -5261,7 +9298,7 @@
       </p:sp>
       <p:sp>
         <p:nvSpPr>
-          <p:cNvPr id="30" name="Rounded Rectangle 29"/>
+          <p:cNvPr id="7" name="Rounded Rectangle 6"/>
           <p:cNvSpPr/>
           <p:nvPr/>
         </p:nvSpPr>
@@ -5391,9 +9428,27 @@
           </a:p>
         </p:txBody>
       </p:sp>
-      <p:sp>
-        <p:nvSpPr>
-          <p:cNvPr id="31" name="Rectangle 30"/>
+    </p:spTree>
+  </p:cSld>
+  <p:clrMapOvr>
+    <a:masterClrMapping/>
+  </p:clrMapOvr>
+</p:sld>
+</file>
+
+<file path=ppt/slides/slide8.xml><?xml version="1.0" encoding="utf-8"?>
+<p:sld xmlns:a="http://schemas.openxmlformats.org/drawingml/2006/main" xmlns:p="http://schemas.openxmlformats.org/presentationml/2006/main" xmlns:r="http://schemas.openxmlformats.org/officeDocument/2006/relationships">
+  <p:cSld>
+    <p:spTree>
+      <p:nvGrpSpPr>
+        <p:cNvPr id="1" name=""/>
+        <p:cNvGrpSpPr/>
+        <p:nvPr/>
+      </p:nvGrpSpPr>
+      <p:grpSpPr/>
+      <p:sp>
+        <p:nvSpPr>
+          <p:cNvPr id="2" name="Rectangle 1"/>
           <p:cNvSpPr/>
           <p:nvPr/>
         </p:nvSpPr>
@@ -5436,7 +9491,7 @@
       </p:sp>
       <p:sp>
         <p:nvSpPr>
-          <p:cNvPr id="32" name="TextBox 31"/>
+          <p:cNvPr id="3" name="TextBox 2"/>
           <p:cNvSpPr txBox="1"/>
           <p:nvPr/>
         </p:nvSpPr>
@@ -5471,7 +9526,7 @@
       </p:sp>
       <p:graphicFrame>
         <p:nvGraphicFramePr>
-          <p:cNvPr id="33" name="Table 32"/>
+          <p:cNvPr id="4" name="Table 3"/>
           <p:cNvGraphicFramePr>
             <a:graphicFrameLocks noGrp="1"/>
           </p:cNvGraphicFramePr>
@@ -6039,4365 +10094,6 @@
           </a:graphicData>
         </a:graphic>
       </p:graphicFrame>
-      <p:sp>
-        <p:nvSpPr>
-          <p:cNvPr id="34" name="Rectangle 33"/>
-          <p:cNvSpPr/>
-          <p:nvPr/>
-        </p:nvSpPr>
-        <p:spPr>
-          <a:xfrm>
-            <a:off x="0" y="0"/>
-            <a:ext cx="12191695" cy="1097280"/>
-          </a:xfrm>
-          <a:prstGeom prst="rect">
-            <a:avLst/>
-          </a:prstGeom>
-          <a:solidFill>
-            <a:srgbClr val="B8860B"/>
-          </a:solidFill>
-          <a:ln>
-            <a:noFill/>
-          </a:ln>
-        </p:spPr>
-        <p:style>
-          <a:lnRef idx="1">
-            <a:schemeClr val="accent1"/>
-          </a:lnRef>
-          <a:fillRef idx="3">
-            <a:schemeClr val="accent1"/>
-          </a:fillRef>
-          <a:effectRef idx="2">
-            <a:schemeClr val="accent1"/>
-          </a:effectRef>
-          <a:fontRef idx="minor">
-            <a:schemeClr val="lt1"/>
-          </a:fontRef>
-        </p:style>
-        <p:txBody>
-          <a:bodyPr rtlCol="0" anchor="ctr"/>
-          <a:lstStyle/>
-          <a:p>
-            <a:pPr algn="ctr"/>
-          </a:p>
-        </p:txBody>
-      </p:sp>
-      <p:sp>
-        <p:nvSpPr>
-          <p:cNvPr id="35" name="TextBox 34"/>
-          <p:cNvSpPr txBox="1"/>
-          <p:nvPr/>
-        </p:nvSpPr>
-        <p:spPr>
-          <a:xfrm>
-            <a:off x="457200" y="182880"/>
-            <a:ext cx="11277295" cy="731520"/>
-          </a:xfrm>
-          <a:prstGeom prst="rect">
-            <a:avLst/>
-          </a:prstGeom>
-          <a:noFill/>
-        </p:spPr>
-        <p:txBody>
-          <a:bodyPr wrap="none" anchor="ctr">
-            <a:spAutoFit/>
-          </a:bodyPr>
-          <a:lstStyle/>
-          <a:p>
-            <a:pPr algn="l">
-              <a:defRPr sz="3600" b="1">
-                <a:solidFill>
-                  <a:srgbClr val="FFFFFF"/>
-                </a:solidFill>
-              </a:defRPr>
-            </a:pPr>
-            <a:r>
-              <a:t>Entorno de Pruebas</a:t>
-            </a:r>
-          </a:p>
-        </p:txBody>
-      </p:sp>
-      <p:sp>
-        <p:nvSpPr>
-          <p:cNvPr id="36" name="TextBox 35"/>
-          <p:cNvSpPr txBox="1"/>
-          <p:nvPr/>
-        </p:nvSpPr>
-        <p:spPr>
-          <a:xfrm>
-            <a:off x="731520" y="1371600"/>
-            <a:ext cx="5029200" cy="4572000"/>
-          </a:xfrm>
-          <a:prstGeom prst="rect">
-            <a:avLst/>
-          </a:prstGeom>
-          <a:noFill/>
-        </p:spPr>
-        <p:txBody>
-          <a:bodyPr wrap="none">
-            <a:spAutoFit/>
-          </a:bodyPr>
-          <a:lstStyle/>
-          <a:p>
-            <a:pPr>
-              <a:spcAft>
-                <a:spcPts val="1000"/>
-              </a:spcAft>
-              <a:defRPr sz="2200" b="1">
-                <a:solidFill>
-                  <a:srgbClr val="B8860B"/>
-                </a:solidFill>
-              </a:defRPr>
-            </a:pPr>
-            <a:r>
-              <a:t>Hardware Requerido:</a:t>
-            </a:r>
-          </a:p>
-          <a:p>
-            <a:pPr>
-              <a:spcAft>
-                <a:spcPts val="800"/>
-              </a:spcAft>
-              <a:defRPr sz="1800">
-                <a:solidFill>
-                  <a:srgbClr val="333333"/>
-                </a:solidFill>
-              </a:defRPr>
-            </a:pPr>
-            <a:r>
-              <a:t>• Procesador: Intel i5 / AMD Ryzen 5+</a:t>
-            </a:r>
-          </a:p>
-          <a:p>
-            <a:pPr>
-              <a:spcAft>
-                <a:spcPts val="800"/>
-              </a:spcAft>
-              <a:defRPr sz="1800">
-                <a:solidFill>
-                  <a:srgbClr val="333333"/>
-                </a:solidFill>
-              </a:defRPr>
-            </a:pPr>
-            <a:r>
-              <a:t>• RAM: 8 GB mínimo (16 GB recomendado)</a:t>
-            </a:r>
-          </a:p>
-          <a:p>
-            <a:pPr>
-              <a:spcAft>
-                <a:spcPts val="800"/>
-              </a:spcAft>
-              <a:defRPr sz="1800">
-                <a:solidFill>
-                  <a:srgbClr val="333333"/>
-                </a:solidFill>
-              </a:defRPr>
-            </a:pPr>
-            <a:r>
-              <a:t>• Almacenamiento: 10 GB libres</a:t>
-            </a:r>
-          </a:p>
-          <a:p>
-            <a:pPr>
-              <a:spcAft>
-                <a:spcPts val="800"/>
-              </a:spcAft>
-              <a:defRPr sz="1800">
-                <a:solidFill>
-                  <a:srgbClr val="333333"/>
-                </a:solidFill>
-              </a:defRPr>
-            </a:pPr>
-            <a:r>
-              <a:t>• Internet: Requerida</a:t>
-            </a:r>
-          </a:p>
-        </p:txBody>
-      </p:sp>
-      <p:sp>
-        <p:nvSpPr>
-          <p:cNvPr id="37" name="TextBox 36"/>
-          <p:cNvSpPr txBox="1"/>
-          <p:nvPr/>
-        </p:nvSpPr>
-        <p:spPr>
-          <a:xfrm>
-            <a:off x="6217920" y="1371600"/>
-            <a:ext cx="5029200" cy="4572000"/>
-          </a:xfrm>
-          <a:prstGeom prst="rect">
-            <a:avLst/>
-          </a:prstGeom>
-          <a:noFill/>
-        </p:spPr>
-        <p:txBody>
-          <a:bodyPr wrap="none">
-            <a:spAutoFit/>
-          </a:bodyPr>
-          <a:lstStyle/>
-          <a:p>
-            <a:pPr>
-              <a:spcAft>
-                <a:spcPts val="1000"/>
-              </a:spcAft>
-              <a:defRPr sz="2200" b="1">
-                <a:solidFill>
-                  <a:srgbClr val="B8860B"/>
-                </a:solidFill>
-              </a:defRPr>
-            </a:pPr>
-            <a:r>
-              <a:t>Software Requerido:</a:t>
-            </a:r>
-          </a:p>
-          <a:p>
-            <a:pPr>
-              <a:spcAft>
-                <a:spcPts val="800"/>
-              </a:spcAft>
-              <a:defRPr sz="1800">
-                <a:solidFill>
-                  <a:srgbClr val="333333"/>
-                </a:solidFill>
-              </a:defRPr>
-            </a:pPr>
-            <a:r>
-              <a:t>• Node.js ≥ 16.x LTS</a:t>
-            </a:r>
-          </a:p>
-          <a:p>
-            <a:pPr>
-              <a:spcAft>
-                <a:spcPts val="800"/>
-              </a:spcAft>
-              <a:defRPr sz="1800">
-                <a:solidFill>
-                  <a:srgbClr val="333333"/>
-                </a:solidFill>
-              </a:defRPr>
-            </a:pPr>
-            <a:r>
-              <a:t>• npm ≥ 8.x</a:t>
-            </a:r>
-          </a:p>
-          <a:p>
-            <a:pPr>
-              <a:spcAft>
-                <a:spcPts val="800"/>
-              </a:spcAft>
-              <a:defRPr sz="1800">
-                <a:solidFill>
-                  <a:srgbClr val="333333"/>
-                </a:solidFill>
-              </a:defRPr>
-            </a:pPr>
-            <a:r>
-              <a:t>• MongoDB Atlas 6.x</a:t>
-            </a:r>
-          </a:p>
-          <a:p>
-            <a:pPr>
-              <a:spcAft>
-                <a:spcPts val="800"/>
-              </a:spcAft>
-              <a:defRPr sz="1800">
-                <a:solidFill>
-                  <a:srgbClr val="333333"/>
-                </a:solidFill>
-              </a:defRPr>
-            </a:pPr>
-            <a:r>
-              <a:t>• Google Chrome (última versión)</a:t>
-            </a:r>
-          </a:p>
-          <a:p>
-            <a:pPr>
-              <a:spcAft>
-                <a:spcPts val="800"/>
-              </a:spcAft>
-              <a:defRPr sz="1800">
-                <a:solidFill>
-                  <a:srgbClr val="333333"/>
-                </a:solidFill>
-              </a:defRPr>
-            </a:pPr>
-            <a:r>
-              <a:t>• Jest 29.x</a:t>
-            </a:r>
-          </a:p>
-          <a:p>
-            <a:pPr>
-              <a:spcAft>
-                <a:spcPts val="800"/>
-              </a:spcAft>
-              <a:defRPr sz="1800">
-                <a:solidFill>
-                  <a:srgbClr val="333333"/>
-                </a:solidFill>
-              </a:defRPr>
-            </a:pPr>
-            <a:r>
-              <a:t>• Cypress 13.x</a:t>
-            </a:r>
-          </a:p>
-        </p:txBody>
-      </p:sp>
-      <p:sp>
-        <p:nvSpPr>
-          <p:cNvPr id="38" name="Rectangle 37"/>
-          <p:cNvSpPr/>
-          <p:nvPr/>
-        </p:nvSpPr>
-        <p:spPr>
-          <a:xfrm>
-            <a:off x="0" y="0"/>
-            <a:ext cx="12191695" cy="1097280"/>
-          </a:xfrm>
-          <a:prstGeom prst="rect">
-            <a:avLst/>
-          </a:prstGeom>
-          <a:solidFill>
-            <a:srgbClr val="B8860B"/>
-          </a:solidFill>
-          <a:ln>
-            <a:noFill/>
-          </a:ln>
-        </p:spPr>
-        <p:style>
-          <a:lnRef idx="1">
-            <a:schemeClr val="accent1"/>
-          </a:lnRef>
-          <a:fillRef idx="3">
-            <a:schemeClr val="accent1"/>
-          </a:fillRef>
-          <a:effectRef idx="2">
-            <a:schemeClr val="accent1"/>
-          </a:effectRef>
-          <a:fontRef idx="minor">
-            <a:schemeClr val="lt1"/>
-          </a:fontRef>
-        </p:style>
-        <p:txBody>
-          <a:bodyPr rtlCol="0" anchor="ctr"/>
-          <a:lstStyle/>
-          <a:p>
-            <a:pPr algn="ctr"/>
-          </a:p>
-        </p:txBody>
-      </p:sp>
-      <p:sp>
-        <p:nvSpPr>
-          <p:cNvPr id="39" name="TextBox 38"/>
-          <p:cNvSpPr txBox="1"/>
-          <p:nvPr/>
-        </p:nvSpPr>
-        <p:spPr>
-          <a:xfrm>
-            <a:off x="457200" y="182880"/>
-            <a:ext cx="11277295" cy="731520"/>
-          </a:xfrm>
-          <a:prstGeom prst="rect">
-            <a:avLst/>
-          </a:prstGeom>
-          <a:noFill/>
-        </p:spPr>
-        <p:txBody>
-          <a:bodyPr wrap="none" anchor="ctr">
-            <a:spAutoFit/>
-          </a:bodyPr>
-          <a:lstStyle/>
-          <a:p>
-            <a:pPr algn="l">
-              <a:defRPr sz="3600" b="1">
-                <a:solidFill>
-                  <a:srgbClr val="FFFFFF"/>
-                </a:solidFill>
-              </a:defRPr>
-            </a:pPr>
-            <a:r>
-              <a:t>Casos de Prueba Principales</a:t>
-            </a:r>
-          </a:p>
-        </p:txBody>
-      </p:sp>
-      <p:sp>
-        <p:nvSpPr>
-          <p:cNvPr id="40" name="Rounded Rectangle 39"/>
-          <p:cNvSpPr/>
-          <p:nvPr/>
-        </p:nvSpPr>
-        <p:spPr>
-          <a:xfrm>
-            <a:off x="914400" y="1645920"/>
-            <a:ext cx="10362895" cy="1188720"/>
-          </a:xfrm>
-          <a:prstGeom prst="roundRect">
-            <a:avLst/>
-          </a:prstGeom>
-          <a:solidFill>
-            <a:srgbClr val="F5F5F0"/>
-          </a:solidFill>
-          <a:ln w="38100">
-            <a:solidFill>
-              <a:srgbClr val="4682B4"/>
-            </a:solidFill>
-          </a:ln>
-        </p:spPr>
-        <p:style>
-          <a:lnRef idx="1">
-            <a:schemeClr val="accent1"/>
-          </a:lnRef>
-          <a:fillRef idx="3">
-            <a:schemeClr val="accent1"/>
-          </a:fillRef>
-          <a:effectRef idx="2">
-            <a:schemeClr val="accent1"/>
-          </a:effectRef>
-          <a:fontRef idx="minor">
-            <a:schemeClr val="lt1"/>
-          </a:fontRef>
-        </p:style>
-        <p:txBody>
-          <a:bodyPr rtlCol="0" anchor="ctr" lIns="182880" tIns="91440"/>
-          <a:lstStyle/>
-          <a:p>
-            <a:pPr algn="ctr">
-              <a:spcAft>
-                <a:spcPts val="600"/>
-              </a:spcAft>
-              <a:defRPr sz="2000" b="1">
-                <a:solidFill>
-                  <a:srgbClr val="4682B4"/>
-                </a:solidFill>
-              </a:defRPr>
-            </a:pPr>
-            <a:r>
-              <a:t>Módulo de Autenticación (6 casos)</a:t>
-            </a:r>
-          </a:p>
-          <a:p>
-            <a:pPr>
-              <a:defRPr sz="1600">
-                <a:solidFill>
-                  <a:srgbClr val="333333"/>
-                </a:solidFill>
-              </a:defRPr>
-            </a:pPr>
-            <a:r>
-              <a:t>AU-01: Registro exitoso | AU-02: Email duplicado</a:t>
-            </a:r>
-            <a:br/>
-            <a:r>
-              <a:t>AU-03: Login exitoso | AU-04: Password incorrecto</a:t>
-            </a:r>
-            <a:br/>
-            <a:r>
-              <a:t>AU-05: Ruta protegida sin token | AU-06: Rol admin requerido</a:t>
-            </a:r>
-          </a:p>
-        </p:txBody>
-      </p:sp>
-      <p:sp>
-        <p:nvSpPr>
-          <p:cNvPr id="41" name="Rounded Rectangle 40"/>
-          <p:cNvSpPr/>
-          <p:nvPr/>
-        </p:nvSpPr>
-        <p:spPr>
-          <a:xfrm>
-            <a:off x="914400" y="3108960"/>
-            <a:ext cx="10362895" cy="1188720"/>
-          </a:xfrm>
-          <a:prstGeom prst="roundRect">
-            <a:avLst/>
-          </a:prstGeom>
-          <a:solidFill>
-            <a:srgbClr val="F5F5F0"/>
-          </a:solidFill>
-          <a:ln w="38100">
-            <a:solidFill>
-              <a:srgbClr val="FF9800"/>
-            </a:solidFill>
-          </a:ln>
-        </p:spPr>
-        <p:style>
-          <a:lnRef idx="1">
-            <a:schemeClr val="accent1"/>
-          </a:lnRef>
-          <a:fillRef idx="3">
-            <a:schemeClr val="accent1"/>
-          </a:fillRef>
-          <a:effectRef idx="2">
-            <a:schemeClr val="accent1"/>
-          </a:effectRef>
-          <a:fontRef idx="minor">
-            <a:schemeClr val="lt1"/>
-          </a:fontRef>
-        </p:style>
-        <p:txBody>
-          <a:bodyPr rtlCol="0" anchor="ctr" lIns="182880" tIns="91440"/>
-          <a:lstStyle/>
-          <a:p>
-            <a:pPr algn="ctr">
-              <a:spcAft>
-                <a:spcPts val="600"/>
-              </a:spcAft>
-              <a:defRPr sz="2000" b="1">
-                <a:solidFill>
-                  <a:srgbClr val="FF9800"/>
-                </a:solidFill>
-              </a:defRPr>
-            </a:pPr>
-            <a:r>
-              <a:t>Módulo de Pagos (8 casos - Crítico)</a:t>
-            </a:r>
-          </a:p>
-          <a:p>
-            <a:pPr>
-              <a:defRPr sz="1600">
-                <a:solidFill>
-                  <a:srgbClr val="333333"/>
-                </a:solidFill>
-              </a:defRPr>
-            </a:pPr>
-            <a:r>
-              <a:t>PA-01: Iniciar pago válido | PA-02: Stock insuficiente</a:t>
-            </a:r>
-            <a:br/>
-            <a:r>
-              <a:t>PA-03: Pago exitoso | PA-04: Pago rechazado</a:t>
-            </a:r>
-            <a:br/>
-            <a:r>
-              <a:t>PA-05: Timeout | PA-06: Cancelación usuario</a:t>
-            </a:r>
-            <a:br/>
-            <a:r>
-              <a:t>PA-07: Prevención doble-commit | PA-08: buyOrder único</a:t>
-            </a:r>
-          </a:p>
-        </p:txBody>
-      </p:sp>
-      <p:sp>
-        <p:nvSpPr>
-          <p:cNvPr id="42" name="Rounded Rectangle 41"/>
-          <p:cNvSpPr/>
-          <p:nvPr/>
-        </p:nvSpPr>
-        <p:spPr>
-          <a:xfrm>
-            <a:off x="914400" y="4572000"/>
-            <a:ext cx="10362895" cy="1188720"/>
-          </a:xfrm>
-          <a:prstGeom prst="roundRect">
-            <a:avLst/>
-          </a:prstGeom>
-          <a:solidFill>
-            <a:srgbClr val="F5F5F0"/>
-          </a:solidFill>
-          <a:ln w="38100">
-            <a:solidFill>
-              <a:srgbClr val="4CAF50"/>
-            </a:solidFill>
-          </a:ln>
-        </p:spPr>
-        <p:style>
-          <a:lnRef idx="1">
-            <a:schemeClr val="accent1"/>
-          </a:lnRef>
-          <a:fillRef idx="3">
-            <a:schemeClr val="accent1"/>
-          </a:fillRef>
-          <a:effectRef idx="2">
-            <a:schemeClr val="accent1"/>
-          </a:effectRef>
-          <a:fontRef idx="minor">
-            <a:schemeClr val="lt1"/>
-          </a:fontRef>
-        </p:style>
-        <p:txBody>
-          <a:bodyPr rtlCol="0" anchor="ctr" lIns="182880" tIns="91440"/>
-          <a:lstStyle/>
-          <a:p>
-            <a:pPr algn="ctr">
-              <a:spcAft>
-                <a:spcPts val="600"/>
-              </a:spcAft>
-              <a:defRPr sz="2000" b="1">
-                <a:solidFill>
-                  <a:srgbClr val="4CAF50"/>
-                </a:solidFill>
-              </a:defRPr>
-            </a:pPr>
-            <a:r>
-              <a:t>Otros Módulos</a:t>
-            </a:r>
-          </a:p>
-          <a:p>
-            <a:pPr>
-              <a:defRPr sz="1600">
-                <a:solidFill>
-                  <a:srgbClr val="333333"/>
-                </a:solidFill>
-              </a:defRPr>
-            </a:pPr>
-            <a:r>
-              <a:t>Productos (5 casos): Listar, filtrar, buscar, crear, stock</a:t>
-            </a:r>
-            <a:br/>
-            <a:r>
-              <a:t>UI (8 casos): Carrito, checkout, validaciones, estados</a:t>
-            </a:r>
-          </a:p>
-        </p:txBody>
-      </p:sp>
-      <p:sp>
-        <p:nvSpPr>
-          <p:cNvPr id="43" name="Rectangle 42"/>
-          <p:cNvSpPr/>
-          <p:nvPr/>
-        </p:nvSpPr>
-        <p:spPr>
-          <a:xfrm>
-            <a:off x="0" y="0"/>
-            <a:ext cx="12191695" cy="1097280"/>
-          </a:xfrm>
-          <a:prstGeom prst="rect">
-            <a:avLst/>
-          </a:prstGeom>
-          <a:solidFill>
-            <a:srgbClr val="B8860B"/>
-          </a:solidFill>
-          <a:ln>
-            <a:noFill/>
-          </a:ln>
-        </p:spPr>
-        <p:style>
-          <a:lnRef idx="1">
-            <a:schemeClr val="accent1"/>
-          </a:lnRef>
-          <a:fillRef idx="3">
-            <a:schemeClr val="accent1"/>
-          </a:fillRef>
-          <a:effectRef idx="2">
-            <a:schemeClr val="accent1"/>
-          </a:effectRef>
-          <a:fontRef idx="minor">
-            <a:schemeClr val="lt1"/>
-          </a:fontRef>
-        </p:style>
-        <p:txBody>
-          <a:bodyPr rtlCol="0" anchor="ctr"/>
-          <a:lstStyle/>
-          <a:p>
-            <a:pPr algn="ctr"/>
-          </a:p>
-        </p:txBody>
-      </p:sp>
-      <p:sp>
-        <p:nvSpPr>
-          <p:cNvPr id="44" name="TextBox 43"/>
-          <p:cNvSpPr txBox="1"/>
-          <p:nvPr/>
-        </p:nvSpPr>
-        <p:spPr>
-          <a:xfrm>
-            <a:off x="457200" y="182880"/>
-            <a:ext cx="11277295" cy="731520"/>
-          </a:xfrm>
-          <a:prstGeom prst="rect">
-            <a:avLst/>
-          </a:prstGeom>
-          <a:noFill/>
-        </p:spPr>
-        <p:txBody>
-          <a:bodyPr wrap="none" anchor="ctr">
-            <a:spAutoFit/>
-          </a:bodyPr>
-          <a:lstStyle/>
-          <a:p>
-            <a:pPr algn="l">
-              <a:defRPr sz="3600" b="1">
-                <a:solidFill>
-                  <a:srgbClr val="FFFFFF"/>
-                </a:solidFill>
-              </a:defRPr>
-            </a:pPr>
-            <a:r>
-              <a:t>Resultados - Pruebas Backend (Jest)</a:t>
-            </a:r>
-          </a:p>
-        </p:txBody>
-      </p:sp>
-      <p:sp>
-        <p:nvSpPr>
-          <p:cNvPr id="45" name="Rounded Rectangle 44"/>
-          <p:cNvSpPr/>
-          <p:nvPr/>
-        </p:nvSpPr>
-        <p:spPr>
-          <a:xfrm>
-            <a:off x="731520" y="1645920"/>
-            <a:ext cx="5029200" cy="1828800"/>
-          </a:xfrm>
-          <a:prstGeom prst="roundRect">
-            <a:avLst/>
-          </a:prstGeom>
-          <a:solidFill>
-            <a:srgbClr val="4CAF50"/>
-          </a:solidFill>
-          <a:ln>
-            <a:noFill/>
-          </a:ln>
-        </p:spPr>
-        <p:style>
-          <a:lnRef idx="1">
-            <a:schemeClr val="accent1"/>
-          </a:lnRef>
-          <a:fillRef idx="3">
-            <a:schemeClr val="accent1"/>
-          </a:fillRef>
-          <a:effectRef idx="2">
-            <a:schemeClr val="accent1"/>
-          </a:effectRef>
-          <a:fontRef idx="minor">
-            <a:schemeClr val="lt1"/>
-          </a:fontRef>
-        </p:style>
-        <p:txBody>
-          <a:bodyPr rtlCol="0" anchor="ctr" lIns="182880" tIns="137160"/>
-          <a:lstStyle/>
-          <a:p>
-            <a:pPr algn="ctr">
-              <a:spcAft>
-                <a:spcPts val="1200"/>
-              </a:spcAft>
-              <a:defRPr sz="2400" b="1">
-                <a:solidFill>
-                  <a:srgbClr val="FFFFFF"/>
-                </a:solidFill>
-              </a:defRPr>
-            </a:pPr>
-            <a:r>
-              <a:t>Ejecución de Tests</a:t>
-            </a:r>
-          </a:p>
-          <a:p>
-            <a:pPr>
-              <a:spcAft>
-                <a:spcPts val="800"/>
-              </a:spcAft>
-              <a:defRPr sz="2000">
-                <a:solidFill>
-                  <a:srgbClr val="FFFFFF"/>
-                </a:solidFill>
-              </a:defRPr>
-            </a:pPr>
-            <a:r>
-              <a:t>Total de pruebas: 33</a:t>
-            </a:r>
-          </a:p>
-          <a:p>
-            <a:pPr>
-              <a:spcAft>
-                <a:spcPts val="800"/>
-              </a:spcAft>
-              <a:defRPr sz="2000">
-                <a:solidFill>
-                  <a:srgbClr val="FFFFFF"/>
-                </a:solidFill>
-              </a:defRPr>
-            </a:pPr>
-            <a:r>
-              <a:t>Pasando: 33 (100%)</a:t>
-            </a:r>
-          </a:p>
-          <a:p>
-            <a:pPr>
-              <a:spcAft>
-                <a:spcPts val="800"/>
-              </a:spcAft>
-              <a:defRPr sz="2000">
-                <a:solidFill>
-                  <a:srgbClr val="FFFFFF"/>
-                </a:solidFill>
-              </a:defRPr>
-            </a:pPr>
-            <a:r>
-              <a:t>Fallando: 0 (0%)</a:t>
-            </a:r>
-          </a:p>
-          <a:p>
-            <a:br/>
-            <a:pPr algn="ctr">
-              <a:defRPr sz="2800" b="1">
-                <a:solidFill>
-                  <a:srgbClr val="FFFFFF"/>
-                </a:solidFill>
-              </a:defRPr>
-            </a:pPr>
-            <a:r>
-              <a:t>✓ EXITOSO</a:t>
-            </a:r>
-          </a:p>
-        </p:txBody>
-      </p:sp>
-      <p:sp>
-        <p:nvSpPr>
-          <p:cNvPr id="46" name="Rounded Rectangle 45"/>
-          <p:cNvSpPr/>
-          <p:nvPr/>
-        </p:nvSpPr>
-        <p:spPr>
-          <a:xfrm>
-            <a:off x="6217920" y="1645920"/>
-            <a:ext cx="5029200" cy="1828800"/>
-          </a:xfrm>
-          <a:prstGeom prst="roundRect">
-            <a:avLst/>
-          </a:prstGeom>
-          <a:solidFill>
-            <a:srgbClr val="F5F5F0"/>
-          </a:solidFill>
-          <a:ln w="25400">
-            <a:solidFill>
-              <a:srgbClr val="B8860B"/>
-            </a:solidFill>
-          </a:ln>
-        </p:spPr>
-        <p:style>
-          <a:lnRef idx="1">
-            <a:schemeClr val="accent1"/>
-          </a:lnRef>
-          <a:fillRef idx="3">
-            <a:schemeClr val="accent1"/>
-          </a:fillRef>
-          <a:effectRef idx="2">
-            <a:schemeClr val="accent1"/>
-          </a:effectRef>
-          <a:fontRef idx="minor">
-            <a:schemeClr val="lt1"/>
-          </a:fontRef>
-        </p:style>
-        <p:txBody>
-          <a:bodyPr rtlCol="0" anchor="ctr" lIns="182880" tIns="137160"/>
-          <a:lstStyle/>
-          <a:p>
-            <a:pPr algn="ctr">
-              <a:spcAft>
-                <a:spcPts val="1200"/>
-              </a:spcAft>
-              <a:defRPr sz="2400" b="1">
-                <a:solidFill>
-                  <a:srgbClr val="B8860B"/>
-                </a:solidFill>
-              </a:defRPr>
-            </a:pPr>
-            <a:r>
-              <a:t>Cobertura de Código</a:t>
-            </a:r>
-          </a:p>
-          <a:p>
-            <a:pPr>
-              <a:spcAft>
-                <a:spcPts val="600"/>
-              </a:spcAft>
-              <a:defRPr sz="1800">
-                <a:solidFill>
-                  <a:srgbClr val="333333"/>
-                </a:solidFill>
-              </a:defRPr>
-            </a:pPr>
-            <a:r>
-              <a:t>Total: 44.39%</a:t>
-            </a:r>
-          </a:p>
-          <a:p>
-            <a:pPr>
-              <a:spcAft>
-                <a:spcPts val="600"/>
-              </a:spcAft>
-              <a:defRPr sz="1800">
-                <a:solidFill>
-                  <a:srgbClr val="333333"/>
-                </a:solidFill>
-              </a:defRPr>
-            </a:pPr>
-            <a:r>
-              <a:t>Middleware: 82.14%</a:t>
-            </a:r>
-          </a:p>
-          <a:p>
-            <a:pPr>
-              <a:spcAft>
-                <a:spcPts val="600"/>
-              </a:spcAft>
-              <a:defRPr sz="1800">
-                <a:solidFill>
-                  <a:srgbClr val="333333"/>
-                </a:solidFill>
-              </a:defRPr>
-            </a:pPr>
-            <a:r>
-              <a:t>Models: 71.73%</a:t>
-            </a:r>
-          </a:p>
-          <a:p>
-            <a:pPr>
-              <a:spcAft>
-                <a:spcPts val="600"/>
-              </a:spcAft>
-              <a:defRPr sz="1800">
-                <a:solidFill>
-                  <a:srgbClr val="333333"/>
-                </a:solidFill>
-              </a:defRPr>
-            </a:pPr>
-            <a:r>
-              <a:t>Routes: 68.10%</a:t>
-            </a:r>
-          </a:p>
-          <a:p>
-            <a:pPr>
-              <a:spcAft>
-                <a:spcPts val="600"/>
-              </a:spcAft>
-              <a:defRPr sz="1800">
-                <a:solidFill>
-                  <a:srgbClr val="333333"/>
-                </a:solidFill>
-              </a:defRPr>
-            </a:pPr>
-            <a:r>
-              <a:t>Controllers: 29.67%</a:t>
-            </a:r>
-          </a:p>
-        </p:txBody>
-      </p:sp>
-      <p:sp>
-        <p:nvSpPr>
-          <p:cNvPr id="47" name="Rounded Rectangle 46"/>
-          <p:cNvSpPr/>
-          <p:nvPr/>
-        </p:nvSpPr>
-        <p:spPr>
-          <a:xfrm>
-            <a:off x="914400" y="3840480"/>
-            <a:ext cx="10362895" cy="1371600"/>
-          </a:xfrm>
-          <a:prstGeom prst="roundRect">
-            <a:avLst/>
-          </a:prstGeom>
-          <a:solidFill>
-            <a:srgbClr val="FF9800"/>
-          </a:solidFill>
-          <a:ln>
-            <a:noFill/>
-          </a:ln>
-        </p:spPr>
-        <p:style>
-          <a:lnRef idx="1">
-            <a:schemeClr val="accent1"/>
-          </a:lnRef>
-          <a:fillRef idx="3">
-            <a:schemeClr val="accent1"/>
-          </a:fillRef>
-          <a:effectRef idx="2">
-            <a:schemeClr val="accent1"/>
-          </a:effectRef>
-          <a:fontRef idx="minor">
-            <a:schemeClr val="lt1"/>
-          </a:fontRef>
-        </p:style>
-        <p:txBody>
-          <a:bodyPr rtlCol="0" anchor="ctr" lIns="182880" tIns="137160"/>
-          <a:lstStyle/>
-          <a:p>
-            <a:pPr algn="ctr">
-              <a:spcAft>
-                <a:spcPts val="600"/>
-              </a:spcAft>
-              <a:defRPr sz="2000" b="1">
-                <a:solidFill>
-                  <a:srgbClr val="FFFFFF"/>
-                </a:solidFill>
-              </a:defRPr>
-            </a:pPr>
-            <a:r>
-              <a:t>Análisis</a:t>
-            </a:r>
-          </a:p>
-          <a:p>
-            <a:pPr>
-              <a:defRPr sz="1800">
-                <a:solidFill>
-                  <a:srgbClr val="FFFFFF"/>
-                </a:solidFill>
-              </a:defRPr>
-            </a:pPr>
-            <a:r>
-              <a:t>Cobertura adecuada para escala del proyecto. Product.js alcanza 100%. Controllers requieren mayor cobertura debido a integraciones externas.</a:t>
-            </a:r>
-          </a:p>
-        </p:txBody>
-      </p:sp>
-      <p:sp>
-        <p:nvSpPr>
-          <p:cNvPr id="48" name="Rectangle 47"/>
-          <p:cNvSpPr/>
-          <p:nvPr/>
-        </p:nvSpPr>
-        <p:spPr>
-          <a:xfrm>
-            <a:off x="0" y="0"/>
-            <a:ext cx="12191695" cy="1097280"/>
-          </a:xfrm>
-          <a:prstGeom prst="rect">
-            <a:avLst/>
-          </a:prstGeom>
-          <a:solidFill>
-            <a:srgbClr val="B8860B"/>
-          </a:solidFill>
-          <a:ln>
-            <a:noFill/>
-          </a:ln>
-        </p:spPr>
-        <p:style>
-          <a:lnRef idx="1">
-            <a:schemeClr val="accent1"/>
-          </a:lnRef>
-          <a:fillRef idx="3">
-            <a:schemeClr val="accent1"/>
-          </a:fillRef>
-          <a:effectRef idx="2">
-            <a:schemeClr val="accent1"/>
-          </a:effectRef>
-          <a:fontRef idx="minor">
-            <a:schemeClr val="lt1"/>
-          </a:fontRef>
-        </p:style>
-        <p:txBody>
-          <a:bodyPr rtlCol="0" anchor="ctr"/>
-          <a:lstStyle/>
-          <a:p>
-            <a:pPr algn="ctr"/>
-          </a:p>
-        </p:txBody>
-      </p:sp>
-      <p:sp>
-        <p:nvSpPr>
-          <p:cNvPr id="49" name="TextBox 48"/>
-          <p:cNvSpPr txBox="1"/>
-          <p:nvPr/>
-        </p:nvSpPr>
-        <p:spPr>
-          <a:xfrm>
-            <a:off x="457200" y="182880"/>
-            <a:ext cx="11277295" cy="731520"/>
-          </a:xfrm>
-          <a:prstGeom prst="rect">
-            <a:avLst/>
-          </a:prstGeom>
-          <a:noFill/>
-        </p:spPr>
-        <p:txBody>
-          <a:bodyPr wrap="none" anchor="ctr">
-            <a:spAutoFit/>
-          </a:bodyPr>
-          <a:lstStyle/>
-          <a:p>
-            <a:pPr algn="l">
-              <a:defRPr sz="3600" b="1">
-                <a:solidFill>
-                  <a:srgbClr val="FFFFFF"/>
-                </a:solidFill>
-              </a:defRPr>
-            </a:pPr>
-            <a:r>
-              <a:t>Resultados - Pruebas Frontend (Cypress)</a:t>
-            </a:r>
-          </a:p>
-        </p:txBody>
-      </p:sp>
-      <p:sp>
-        <p:nvSpPr>
-          <p:cNvPr id="50" name="Rounded Rectangle 49"/>
-          <p:cNvSpPr/>
-          <p:nvPr/>
-        </p:nvSpPr>
-        <p:spPr>
-          <a:xfrm>
-            <a:off x="731520" y="1645920"/>
-            <a:ext cx="5029200" cy="2286000"/>
-          </a:xfrm>
-          <a:prstGeom prst="roundRect">
-            <a:avLst/>
-          </a:prstGeom>
-          <a:solidFill>
-            <a:srgbClr val="F5F5F0"/>
-          </a:solidFill>
-          <a:ln w="25400">
-            <a:solidFill>
-              <a:srgbClr val="B8860B"/>
-            </a:solidFill>
-          </a:ln>
-        </p:spPr>
-        <p:style>
-          <a:lnRef idx="1">
-            <a:schemeClr val="accent1"/>
-          </a:lnRef>
-          <a:fillRef idx="3">
-            <a:schemeClr val="accent1"/>
-          </a:fillRef>
-          <a:effectRef idx="2">
-            <a:schemeClr val="accent1"/>
-          </a:effectRef>
-          <a:fontRef idx="minor">
-            <a:schemeClr val="lt1"/>
-          </a:fontRef>
-        </p:style>
-        <p:txBody>
-          <a:bodyPr rtlCol="0" anchor="ctr" lIns="182880" tIns="137160"/>
-          <a:lstStyle/>
-          <a:p>
-            <a:pPr algn="ctr">
-              <a:spcAft>
-                <a:spcPts val="1200"/>
-              </a:spcAft>
-              <a:defRPr sz="2400" b="1">
-                <a:solidFill>
-                  <a:srgbClr val="B8860B"/>
-                </a:solidFill>
-              </a:defRPr>
-            </a:pPr>
-            <a:r>
-              <a:t>Ejecución de Tests E2E</a:t>
-            </a:r>
-          </a:p>
-          <a:p>
-            <a:pPr>
-              <a:spcAft>
-                <a:spcPts val="800"/>
-              </a:spcAft>
-              <a:defRPr sz="2000">
-                <a:solidFill>
-                  <a:srgbClr val="333333"/>
-                </a:solidFill>
-              </a:defRPr>
-            </a:pPr>
-            <a:r>
-              <a:t>Total de pruebas: 20</a:t>
-            </a:r>
-          </a:p>
-          <a:p>
-            <a:pPr>
-              <a:spcAft>
-                <a:spcPts val="800"/>
-              </a:spcAft>
-              <a:defRPr sz="2000">
-                <a:solidFill>
-                  <a:srgbClr val="333333"/>
-                </a:solidFill>
-              </a:defRPr>
-            </a:pPr>
-            <a:r>
-              <a:t>Pasando: 17 (85%)</a:t>
-            </a:r>
-          </a:p>
-          <a:p>
-            <a:pPr>
-              <a:spcAft>
-                <a:spcPts val="800"/>
-              </a:spcAft>
-              <a:defRPr sz="2000">
-                <a:solidFill>
-                  <a:srgbClr val="333333"/>
-                </a:solidFill>
-              </a:defRPr>
-            </a:pPr>
-            <a:r>
-              <a:t>Fallando: 3 (15%)</a:t>
-            </a:r>
-          </a:p>
-          <a:p>
-            <a:br/>
-            <a:pPr>
-              <a:spcAft>
-                <a:spcPts val="600"/>
-              </a:spcAft>
-              <a:defRPr sz="1800" b="1">
-                <a:solidFill>
-                  <a:srgbClr val="333333"/>
-                </a:solidFill>
-              </a:defRPr>
-            </a:pPr>
-            <a:r>
-              <a:t>Suites:</a:t>
-            </a:r>
-          </a:p>
-          <a:p>
-            <a:pPr>
-              <a:spcAft>
-                <a:spcPts val="400"/>
-              </a:spcAft>
-              <a:defRPr sz="1600">
-                <a:solidFill>
-                  <a:srgbClr val="333333"/>
-                </a:solidFill>
-              </a:defRPr>
-            </a:pPr>
-            <a:r>
-              <a:t>• auth.cy.js: 6/7 (85.7%)</a:t>
-            </a:r>
-          </a:p>
-          <a:p>
-            <a:pPr>
-              <a:spcAft>
-                <a:spcPts val="400"/>
-              </a:spcAft>
-              <a:defRPr sz="1600">
-                <a:solidFill>
-                  <a:srgbClr val="333333"/>
-                </a:solidFill>
-              </a:defRPr>
-            </a:pPr>
-            <a:r>
-              <a:t>• cart.cy.js: 4/5 (80%)</a:t>
-            </a:r>
-          </a:p>
-          <a:p>
-            <a:pPr>
-              <a:spcAft>
-                <a:spcPts val="400"/>
-              </a:spcAft>
-              <a:defRPr sz="1600">
-                <a:solidFill>
-                  <a:srgbClr val="333333"/>
-                </a:solidFill>
-              </a:defRPr>
-            </a:pPr>
-            <a:r>
-              <a:t>• catalog.cy.js: 7/8 (87.5%)</a:t>
-            </a:r>
-          </a:p>
-        </p:txBody>
-      </p:sp>
-      <p:sp>
-        <p:nvSpPr>
-          <p:cNvPr id="51" name="Rounded Rectangle 50"/>
-          <p:cNvSpPr/>
-          <p:nvPr/>
-        </p:nvSpPr>
-        <p:spPr>
-          <a:xfrm>
-            <a:off x="6217920" y="1645920"/>
-            <a:ext cx="5029200" cy="2286000"/>
-          </a:xfrm>
-          <a:prstGeom prst="roundRect">
-            <a:avLst/>
-          </a:prstGeom>
-          <a:solidFill>
-            <a:srgbClr val="F5F5F0"/>
-          </a:solidFill>
-          <a:ln w="25400">
-            <a:solidFill>
-              <a:srgbClr val="FF9800"/>
-            </a:solidFill>
-          </a:ln>
-        </p:spPr>
-        <p:style>
-          <a:lnRef idx="1">
-            <a:schemeClr val="accent1"/>
-          </a:lnRef>
-          <a:fillRef idx="3">
-            <a:schemeClr val="accent1"/>
-          </a:fillRef>
-          <a:effectRef idx="2">
-            <a:schemeClr val="accent1"/>
-          </a:effectRef>
-          <a:fontRef idx="minor">
-            <a:schemeClr val="lt1"/>
-          </a:fontRef>
-        </p:style>
-        <p:txBody>
-          <a:bodyPr rtlCol="0" anchor="ctr" lIns="182880" tIns="137160"/>
-          <a:lstStyle/>
-          <a:p>
-            <a:pPr algn="ctr">
-              <a:spcAft>
-                <a:spcPts val="800"/>
-              </a:spcAft>
-              <a:defRPr sz="2400" b="1">
-                <a:solidFill>
-                  <a:srgbClr val="FF9800"/>
-                </a:solidFill>
-              </a:defRPr>
-            </a:pPr>
-            <a:r>
-              <a:t>Análisis de Fallos</a:t>
-            </a:r>
-          </a:p>
-          <a:p>
-            <a:pPr>
-              <a:spcAft>
-                <a:spcPts val="1000"/>
-              </a:spcAft>
-              <a:defRPr sz="1600">
-                <a:solidFill>
-                  <a:srgbClr val="333333"/>
-                </a:solidFill>
-              </a:defRPr>
-            </a:pPr>
-            <a:r>
-              <a:t>Los 3 tests fallidos NO representan errores funcionales:</a:t>
-            </a:r>
-          </a:p>
-          <a:p>
-            <a:pPr>
-              <a:spcAft>
-                <a:spcPts val="600"/>
-              </a:spcAft>
-              <a:defRPr sz="1600">
-                <a:solidFill>
-                  <a:srgbClr val="333333"/>
-                </a:solidFill>
-              </a:defRPr>
-            </a:pPr>
-            <a:r>
-              <a:t>• UI-17: Cambio de texto a ícono</a:t>
-            </a:r>
-          </a:p>
-          <a:p>
-            <a:pPr>
-              <a:spcAft>
-                <a:spcPts val="600"/>
-              </a:spcAft>
-              <a:defRPr sz="1600">
-                <a:solidFill>
-                  <a:srgbClr val="333333"/>
-                </a:solidFill>
-              </a:defRPr>
-            </a:pPr>
-            <a:r>
-              <a:t>• UI-10: Dropdown en lugar de botón directo</a:t>
-            </a:r>
-          </a:p>
-          <a:p>
-            <a:pPr>
-              <a:spcAft>
-                <a:spcPts val="600"/>
-              </a:spcAft>
-              <a:defRPr sz="1600">
-                <a:solidFill>
-                  <a:srgbClr val="333333"/>
-                </a:solidFill>
-              </a:defRPr>
-            </a:pPr>
-            <a:r>
-              <a:t>• UI-04: Migración a Material-UI</a:t>
-            </a:r>
-          </a:p>
-          <a:p>
-            <a:br/>
-            <a:pPr>
-              <a:defRPr sz="2000" b="1">
-                <a:solidFill>
-                  <a:srgbClr val="4CAF50"/>
-                </a:solidFill>
-              </a:defRPr>
-            </a:pPr>
-            <a:r>
-              <a:t>✓ Funcionalidad: 100% operativa</a:t>
-            </a:r>
-          </a:p>
-        </p:txBody>
-      </p:sp>
-      <p:sp>
-        <p:nvSpPr>
-          <p:cNvPr id="52" name="Rounded Rectangle 51"/>
-          <p:cNvSpPr/>
-          <p:nvPr/>
-        </p:nvSpPr>
-        <p:spPr>
-          <a:xfrm>
-            <a:off x="2743200" y="4389120"/>
-            <a:ext cx="6705295" cy="1097280"/>
-          </a:xfrm>
-          <a:prstGeom prst="roundRect">
-            <a:avLst/>
-          </a:prstGeom>
-          <a:solidFill>
-            <a:srgbClr val="4CAF50"/>
-          </a:solidFill>
-          <a:ln>
-            <a:noFill/>
-          </a:ln>
-        </p:spPr>
-        <p:style>
-          <a:lnRef idx="1">
-            <a:schemeClr val="accent1"/>
-          </a:lnRef>
-          <a:fillRef idx="3">
-            <a:schemeClr val="accent1"/>
-          </a:fillRef>
-          <a:effectRef idx="2">
-            <a:schemeClr val="accent1"/>
-          </a:effectRef>
-          <a:fontRef idx="minor">
-            <a:schemeClr val="lt1"/>
-          </a:fontRef>
-        </p:style>
-        <p:txBody>
-          <a:bodyPr rtlCol="0" anchor="ctr"/>
-          <a:lstStyle/>
-          <a:p>
-            <a:pPr algn="ctr">
-              <a:defRPr sz="2800" b="1">
-                <a:solidFill>
-                  <a:srgbClr val="FFFFFF"/>
-                </a:solidFill>
-              </a:defRPr>
-            </a:pPr>
-            <a:r>
-              <a:t>Tasa de éxito global: 94.3% (50/53 tests)</a:t>
-            </a:r>
-          </a:p>
-        </p:txBody>
-      </p:sp>
-      <p:sp>
-        <p:nvSpPr>
-          <p:cNvPr id="53" name="Rectangle 52"/>
-          <p:cNvSpPr/>
-          <p:nvPr/>
-        </p:nvSpPr>
-        <p:spPr>
-          <a:xfrm>
-            <a:off x="0" y="0"/>
-            <a:ext cx="12191695" cy="1097280"/>
-          </a:xfrm>
-          <a:prstGeom prst="rect">
-            <a:avLst/>
-          </a:prstGeom>
-          <a:solidFill>
-            <a:srgbClr val="B8860B"/>
-          </a:solidFill>
-          <a:ln>
-            <a:noFill/>
-          </a:ln>
-        </p:spPr>
-        <p:style>
-          <a:lnRef idx="1">
-            <a:schemeClr val="accent1"/>
-          </a:lnRef>
-          <a:fillRef idx="3">
-            <a:schemeClr val="accent1"/>
-          </a:fillRef>
-          <a:effectRef idx="2">
-            <a:schemeClr val="accent1"/>
-          </a:effectRef>
-          <a:fontRef idx="minor">
-            <a:schemeClr val="lt1"/>
-          </a:fontRef>
-        </p:style>
-        <p:txBody>
-          <a:bodyPr rtlCol="0" anchor="ctr"/>
-          <a:lstStyle/>
-          <a:p>
-            <a:pPr algn="ctr"/>
-          </a:p>
-        </p:txBody>
-      </p:sp>
-      <p:sp>
-        <p:nvSpPr>
-          <p:cNvPr id="54" name="TextBox 53"/>
-          <p:cNvSpPr txBox="1"/>
-          <p:nvPr/>
-        </p:nvSpPr>
-        <p:spPr>
-          <a:xfrm>
-            <a:off x="457200" y="182880"/>
-            <a:ext cx="11277295" cy="731520"/>
-          </a:xfrm>
-          <a:prstGeom prst="rect">
-            <a:avLst/>
-          </a:prstGeom>
-          <a:noFill/>
-        </p:spPr>
-        <p:txBody>
-          <a:bodyPr wrap="none" anchor="ctr">
-            <a:spAutoFit/>
-          </a:bodyPr>
-          <a:lstStyle/>
-          <a:p>
-            <a:pPr algn="l">
-              <a:defRPr sz="3600" b="1">
-                <a:solidFill>
-                  <a:srgbClr val="FFFFFF"/>
-                </a:solidFill>
-              </a:defRPr>
-            </a:pPr>
-            <a:r>
-              <a:t>Test de Usabilidad - Metodología</a:t>
-            </a:r>
-          </a:p>
-        </p:txBody>
-      </p:sp>
-      <p:sp>
-        <p:nvSpPr>
-          <p:cNvPr id="55" name="Rounded Rectangle 54"/>
-          <p:cNvSpPr/>
-          <p:nvPr/>
-        </p:nvSpPr>
-        <p:spPr>
-          <a:xfrm>
-            <a:off x="914400" y="1371600"/>
-            <a:ext cx="10362895" cy="731520"/>
-          </a:xfrm>
-          <a:prstGeom prst="roundRect">
-            <a:avLst/>
-          </a:prstGeom>
-          <a:solidFill>
-            <a:srgbClr val="B8860B"/>
-          </a:solidFill>
-          <a:ln>
-            <a:noFill/>
-          </a:ln>
-        </p:spPr>
-        <p:style>
-          <a:lnRef idx="1">
-            <a:schemeClr val="accent1"/>
-          </a:lnRef>
-          <a:fillRef idx="3">
-            <a:schemeClr val="accent1"/>
-          </a:fillRef>
-          <a:effectRef idx="2">
-            <a:schemeClr val="accent1"/>
-          </a:effectRef>
-          <a:fontRef idx="minor">
-            <a:schemeClr val="lt1"/>
-          </a:fontRef>
-        </p:style>
-        <p:txBody>
-          <a:bodyPr rtlCol="0" anchor="ctr"/>
-          <a:lstStyle/>
-          <a:p>
-            <a:pPr algn="ctr">
-              <a:defRPr sz="2000" b="1">
-                <a:solidFill>
-                  <a:srgbClr val="FFFFFF"/>
-                </a:solidFill>
-              </a:defRPr>
-            </a:pPr>
-            <a:r>
-              <a:t>System Usability Scale (SUS) - Estándar de la industria para medir usabilidad percibida</a:t>
-            </a:r>
-          </a:p>
-        </p:txBody>
-      </p:sp>
-      <p:sp>
-        <p:nvSpPr>
-          <p:cNvPr id="56" name="TextBox 55"/>
-          <p:cNvSpPr txBox="1"/>
-          <p:nvPr/>
-        </p:nvSpPr>
-        <p:spPr>
-          <a:xfrm>
-            <a:off x="1371600" y="2560320"/>
-            <a:ext cx="9144000" cy="1371600"/>
-          </a:xfrm>
-          <a:prstGeom prst="rect">
-            <a:avLst/>
-          </a:prstGeom>
-          <a:noFill/>
-        </p:spPr>
-        <p:txBody>
-          <a:bodyPr wrap="none">
-            <a:spAutoFit/>
-          </a:bodyPr>
-          <a:lstStyle/>
-          <a:p>
-            <a:pPr>
-              <a:spcAft>
-                <a:spcPts val="1000"/>
-              </a:spcAft>
-              <a:defRPr sz="2200" b="1">
-                <a:solidFill>
-                  <a:srgbClr val="333333"/>
-                </a:solidFill>
-              </a:defRPr>
-            </a:pPr>
-            <a:r>
-              <a:t>Participantes:</a:t>
-            </a:r>
-          </a:p>
-          <a:p>
-            <a:pPr>
-              <a:spcAft>
-                <a:spcPts val="800"/>
-              </a:spcAft>
-              <a:defRPr sz="1800">
-                <a:solidFill>
-                  <a:srgbClr val="333333"/>
-                </a:solidFill>
-              </a:defRPr>
-            </a:pPr>
-            <a:r>
-              <a:t>• Usuario 1: Mujer, 28 años, Contadora, experiencia moderada en compras online</a:t>
-            </a:r>
-          </a:p>
-          <a:p>
-            <a:pPr>
-              <a:spcAft>
-                <a:spcPts val="800"/>
-              </a:spcAft>
-              <a:defRPr sz="1800">
-                <a:solidFill>
-                  <a:srgbClr val="333333"/>
-                </a:solidFill>
-              </a:defRPr>
-            </a:pPr>
-            <a:r>
-              <a:t>• Usuario 2: Hombre, 35 años, Ingeniero, experiencia experta en compras online</a:t>
-            </a:r>
-          </a:p>
-        </p:txBody>
-      </p:sp>
-      <p:sp>
-        <p:nvSpPr>
-          <p:cNvPr id="57" name="TextBox 56"/>
-          <p:cNvSpPr txBox="1"/>
-          <p:nvPr/>
-        </p:nvSpPr>
-        <p:spPr>
-          <a:xfrm>
-            <a:off x="1371600" y="4114800"/>
-            <a:ext cx="9144000" cy="1828800"/>
-          </a:xfrm>
-          <a:prstGeom prst="rect">
-            <a:avLst/>
-          </a:prstGeom>
-          <a:noFill/>
-        </p:spPr>
-        <p:txBody>
-          <a:bodyPr wrap="none">
-            <a:spAutoFit/>
-          </a:bodyPr>
-          <a:lstStyle/>
-          <a:p>
-            <a:pPr>
-              <a:spcAft>
-                <a:spcPts val="1000"/>
-              </a:spcAft>
-              <a:defRPr sz="2200" b="1">
-                <a:solidFill>
-                  <a:srgbClr val="333333"/>
-                </a:solidFill>
-              </a:defRPr>
-            </a:pPr>
-            <a:r>
-              <a:t>Tareas Evaluadas:</a:t>
-            </a:r>
-          </a:p>
-          <a:p>
-            <a:pPr>
-              <a:spcAft>
-                <a:spcPts val="600"/>
-              </a:spcAft>
-              <a:defRPr sz="1800">
-                <a:solidFill>
-                  <a:srgbClr val="333333"/>
-                </a:solidFill>
-              </a:defRPr>
-            </a:pPr>
-            <a:r>
-              <a:t>1. Registro en la plataforma</a:t>
-            </a:r>
-          </a:p>
-          <a:p>
-            <a:pPr>
-              <a:spcAft>
-                <a:spcPts val="600"/>
-              </a:spcAft>
-              <a:defRPr sz="1800">
-                <a:solidFill>
-                  <a:srgbClr val="333333"/>
-                </a:solidFill>
-              </a:defRPr>
-            </a:pPr>
-            <a:r>
-              <a:t>2. Explorar catálogo de perfumes</a:t>
-            </a:r>
-          </a:p>
-          <a:p>
-            <a:pPr>
-              <a:spcAft>
-                <a:spcPts val="600"/>
-              </a:spcAft>
-              <a:defRPr sz="1800">
-                <a:solidFill>
-                  <a:srgbClr val="333333"/>
-                </a:solidFill>
-              </a:defRPr>
-            </a:pPr>
-            <a:r>
-              <a:t>3. Agregar producto al carrito</a:t>
-            </a:r>
-          </a:p>
-          <a:p>
-            <a:pPr>
-              <a:spcAft>
-                <a:spcPts val="600"/>
-              </a:spcAft>
-              <a:defRPr sz="1800">
-                <a:solidFill>
-                  <a:srgbClr val="333333"/>
-                </a:solidFill>
-              </a:defRPr>
-            </a:pPr>
-            <a:r>
-              <a:t>4. Revisar y modificar carrito</a:t>
-            </a:r>
-          </a:p>
-          <a:p>
-            <a:pPr>
-              <a:spcAft>
-                <a:spcPts val="600"/>
-              </a:spcAft>
-              <a:defRPr sz="1800">
-                <a:solidFill>
-                  <a:srgbClr val="333333"/>
-                </a:solidFill>
-              </a:defRPr>
-            </a:pPr>
-            <a:r>
-              <a:t>5. Proceso de checkout</a:t>
-            </a:r>
-          </a:p>
-          <a:p>
-            <a:pPr>
-              <a:spcAft>
-                <a:spcPts val="600"/>
-              </a:spcAft>
-              <a:defRPr sz="1800">
-                <a:solidFill>
-                  <a:srgbClr val="333333"/>
-                </a:solidFill>
-              </a:defRPr>
-            </a:pPr>
-            <a:r>
-              <a:t>6. Encontrar información de contacto</a:t>
-            </a:r>
-          </a:p>
-        </p:txBody>
-      </p:sp>
-      <p:sp>
-        <p:nvSpPr>
-          <p:cNvPr id="58" name="Rectangle 57"/>
-          <p:cNvSpPr/>
-          <p:nvPr/>
-        </p:nvSpPr>
-        <p:spPr>
-          <a:xfrm>
-            <a:off x="0" y="0"/>
-            <a:ext cx="12191695" cy="1097280"/>
-          </a:xfrm>
-          <a:prstGeom prst="rect">
-            <a:avLst/>
-          </a:prstGeom>
-          <a:solidFill>
-            <a:srgbClr val="B8860B"/>
-          </a:solidFill>
-          <a:ln>
-            <a:noFill/>
-          </a:ln>
-        </p:spPr>
-        <p:style>
-          <a:lnRef idx="1">
-            <a:schemeClr val="accent1"/>
-          </a:lnRef>
-          <a:fillRef idx="3">
-            <a:schemeClr val="accent1"/>
-          </a:fillRef>
-          <a:effectRef idx="2">
-            <a:schemeClr val="accent1"/>
-          </a:effectRef>
-          <a:fontRef idx="minor">
-            <a:schemeClr val="lt1"/>
-          </a:fontRef>
-        </p:style>
-        <p:txBody>
-          <a:bodyPr rtlCol="0" anchor="ctr"/>
-          <a:lstStyle/>
-          <a:p>
-            <a:pPr algn="ctr"/>
-          </a:p>
-        </p:txBody>
-      </p:sp>
-      <p:sp>
-        <p:nvSpPr>
-          <p:cNvPr id="59" name="TextBox 58"/>
-          <p:cNvSpPr txBox="1"/>
-          <p:nvPr/>
-        </p:nvSpPr>
-        <p:spPr>
-          <a:xfrm>
-            <a:off x="457200" y="182880"/>
-            <a:ext cx="11277295" cy="731520"/>
-          </a:xfrm>
-          <a:prstGeom prst="rect">
-            <a:avLst/>
-          </a:prstGeom>
-          <a:noFill/>
-        </p:spPr>
-        <p:txBody>
-          <a:bodyPr wrap="none" anchor="ctr">
-            <a:spAutoFit/>
-          </a:bodyPr>
-          <a:lstStyle/>
-          <a:p>
-            <a:pPr algn="l">
-              <a:defRPr sz="3600" b="1">
-                <a:solidFill>
-                  <a:srgbClr val="FFFFFF"/>
-                </a:solidFill>
-              </a:defRPr>
-            </a:pPr>
-            <a:r>
-              <a:t>Resultados del Test de Usabilidad</a:t>
-            </a:r>
-          </a:p>
-        </p:txBody>
-      </p:sp>
-      <p:sp>
-        <p:nvSpPr>
-          <p:cNvPr id="60" name="Rounded Rectangle 59"/>
-          <p:cNvSpPr/>
-          <p:nvPr/>
-        </p:nvSpPr>
-        <p:spPr>
-          <a:xfrm>
-            <a:off x="731520" y="1645920"/>
-            <a:ext cx="5029200" cy="2286000"/>
-          </a:xfrm>
-          <a:prstGeom prst="roundRect">
-            <a:avLst/>
-          </a:prstGeom>
-          <a:solidFill>
-            <a:srgbClr val="4CAF50"/>
-          </a:solidFill>
-          <a:ln>
-            <a:noFill/>
-          </a:ln>
-        </p:spPr>
-        <p:style>
-          <a:lnRef idx="1">
-            <a:schemeClr val="accent1"/>
-          </a:lnRef>
-          <a:fillRef idx="3">
-            <a:schemeClr val="accent1"/>
-          </a:fillRef>
-          <a:effectRef idx="2">
-            <a:schemeClr val="accent1"/>
-          </a:effectRef>
-          <a:fontRef idx="minor">
-            <a:schemeClr val="lt1"/>
-          </a:fontRef>
-        </p:style>
-        <p:txBody>
-          <a:bodyPr rtlCol="0" anchor="ctr" lIns="182880" tIns="137160"/>
-          <a:lstStyle/>
-          <a:p>
-            <a:pPr algn="ctr">
-              <a:spcAft>
-                <a:spcPts val="1200"/>
-              </a:spcAft>
-              <a:defRPr sz="2800" b="1">
-                <a:solidFill>
-                  <a:srgbClr val="FFFFFF"/>
-                </a:solidFill>
-              </a:defRPr>
-            </a:pPr>
-            <a:r>
-              <a:t>Puntuación SUS</a:t>
-            </a:r>
-          </a:p>
-          <a:p>
-            <a:pPr algn="ctr">
-              <a:spcAft>
-                <a:spcPts val="800"/>
-              </a:spcAft>
-              <a:defRPr sz="2200">
-                <a:solidFill>
-                  <a:srgbClr val="FFFFFF"/>
-                </a:solidFill>
-              </a:defRPr>
-            </a:pPr>
-            <a:r>
-              <a:t>Usuario 1: 75.0/100</a:t>
-            </a:r>
-          </a:p>
-          <a:p>
-            <a:pPr algn="ctr">
-              <a:spcAft>
-                <a:spcPts val="800"/>
-              </a:spcAft>
-              <a:defRPr sz="2200">
-                <a:solidFill>
-                  <a:srgbClr val="FFFFFF"/>
-                </a:solidFill>
-              </a:defRPr>
-            </a:pPr>
-            <a:r>
-              <a:t>Usuario 2: 85.0/100</a:t>
-            </a:r>
-          </a:p>
-          <a:p>
-            <a:br/>
-            <a:pPr algn="ctr">
-              <a:spcAft>
-                <a:spcPts val="1000"/>
-              </a:spcAft>
-              <a:defRPr sz="3200" b="1">
-                <a:solidFill>
-                  <a:srgbClr val="FFFFFF"/>
-                </a:solidFill>
-              </a:defRPr>
-            </a:pPr>
-            <a:r>
-              <a:t>Promedio: 80.0/100</a:t>
-            </a:r>
-          </a:p>
-          <a:p>
-            <a:pPr algn="ctr">
-              <a:defRPr sz="2000">
-                <a:solidFill>
-                  <a:srgbClr val="FFFFFF"/>
-                </a:solidFill>
-              </a:defRPr>
-            </a:pPr>
-            <a:r>
-              <a:t>✓ Cumple objetivo (≥ 80)</a:t>
-            </a:r>
-          </a:p>
-        </p:txBody>
-      </p:sp>
-      <p:sp>
-        <p:nvSpPr>
-          <p:cNvPr id="61" name="TextBox 60"/>
-          <p:cNvSpPr txBox="1"/>
-          <p:nvPr/>
-        </p:nvSpPr>
-        <p:spPr>
-          <a:xfrm>
-            <a:off x="6217920" y="1645920"/>
-            <a:ext cx="5029200" cy="2286000"/>
-          </a:xfrm>
-          <a:prstGeom prst="rect">
-            <a:avLst/>
-          </a:prstGeom>
-          <a:noFill/>
-        </p:spPr>
-        <p:txBody>
-          <a:bodyPr wrap="none">
-            <a:spAutoFit/>
-          </a:bodyPr>
-          <a:lstStyle/>
-          <a:p>
-            <a:pPr>
-              <a:spcAft>
-                <a:spcPts val="1200"/>
-              </a:spcAft>
-              <a:defRPr sz="2200" b="1">
-                <a:solidFill>
-                  <a:srgbClr val="B8860B"/>
-                </a:solidFill>
-              </a:defRPr>
-            </a:pPr>
-            <a:r>
-              <a:t>Tiempos de Completación</a:t>
-            </a:r>
-          </a:p>
-          <a:p>
-            <a:pPr>
-              <a:spcAft>
-                <a:spcPts val="600"/>
-              </a:spcAft>
-              <a:defRPr sz="1800">
-                <a:solidFill>
-                  <a:srgbClr val="333333"/>
-                </a:solidFill>
-              </a:defRPr>
-            </a:pPr>
-            <a:r>
-              <a:t>Registro: 2.1 min</a:t>
-            </a:r>
-          </a:p>
-          <a:p>
-            <a:pPr>
-              <a:spcAft>
-                <a:spcPts val="600"/>
-              </a:spcAft>
-              <a:defRPr sz="1800">
-                <a:solidFill>
-                  <a:srgbClr val="333333"/>
-                </a:solidFill>
-              </a:defRPr>
-            </a:pPr>
-            <a:r>
-              <a:t>Catálogo: 2.5 min</a:t>
-            </a:r>
-          </a:p>
-          <a:p>
-            <a:pPr>
-              <a:spcAft>
-                <a:spcPts val="600"/>
-              </a:spcAft>
-              <a:defRPr sz="1800">
-                <a:solidFill>
-                  <a:srgbClr val="333333"/>
-                </a:solidFill>
-              </a:defRPr>
-            </a:pPr>
-            <a:r>
-              <a:t>Agregar: 1.55 min</a:t>
-            </a:r>
-          </a:p>
-          <a:p>
-            <a:pPr>
-              <a:spcAft>
-                <a:spcPts val="600"/>
-              </a:spcAft>
-              <a:defRPr sz="1800">
-                <a:solidFill>
-                  <a:srgbClr val="333333"/>
-                </a:solidFill>
-              </a:defRPr>
-            </a:pPr>
-            <a:r>
-              <a:t>Carrito: 1.35 min</a:t>
-            </a:r>
-          </a:p>
-          <a:p>
-            <a:pPr>
-              <a:spcAft>
-                <a:spcPts val="600"/>
-              </a:spcAft>
-              <a:defRPr sz="1800">
-                <a:solidFill>
-                  <a:srgbClr val="333333"/>
-                </a:solidFill>
-              </a:defRPr>
-            </a:pPr>
-            <a:r>
-              <a:t>Checkout: 3.9 min</a:t>
-            </a:r>
-          </a:p>
-          <a:p>
-            <a:pPr>
-              <a:spcAft>
-                <a:spcPts val="600"/>
-              </a:spcAft>
-              <a:defRPr sz="1800">
-                <a:solidFill>
-                  <a:srgbClr val="333333"/>
-                </a:solidFill>
-              </a:defRPr>
-            </a:pPr>
-            <a:r>
-              <a:t>Contacto: 0.65 min</a:t>
-            </a:r>
-          </a:p>
-        </p:txBody>
-      </p:sp>
-      <p:sp>
-        <p:nvSpPr>
-          <p:cNvPr id="62" name="Rounded Rectangle 61"/>
-          <p:cNvSpPr/>
-          <p:nvPr/>
-        </p:nvSpPr>
-        <p:spPr>
-          <a:xfrm>
-            <a:off x="914400" y="4114800"/>
-            <a:ext cx="10362895" cy="1371600"/>
-          </a:xfrm>
-          <a:prstGeom prst="roundRect">
-            <a:avLst/>
-          </a:prstGeom>
-          <a:solidFill>
-            <a:srgbClr val="FF9800"/>
-          </a:solidFill>
-          <a:ln>
-            <a:noFill/>
-          </a:ln>
-        </p:spPr>
-        <p:style>
-          <a:lnRef idx="1">
-            <a:schemeClr val="accent1"/>
-          </a:lnRef>
-          <a:fillRef idx="3">
-            <a:schemeClr val="accent1"/>
-          </a:fillRef>
-          <a:effectRef idx="2">
-            <a:schemeClr val="accent1"/>
-          </a:effectRef>
-          <a:fontRef idx="minor">
-            <a:schemeClr val="lt1"/>
-          </a:fontRef>
-        </p:style>
-        <p:txBody>
-          <a:bodyPr rtlCol="0" anchor="ctr" lIns="182880" tIns="182880"/>
-          <a:lstStyle/>
-          <a:p>
-            <a:pPr algn="ctr">
-              <a:spcAft>
-                <a:spcPts val="800"/>
-              </a:spcAft>
-              <a:defRPr sz="2200" b="1">
-                <a:solidFill>
-                  <a:srgbClr val="FFFFFF"/>
-                </a:solidFill>
-              </a:defRPr>
-            </a:pPr>
-            <a:r>
-              <a:t>Hallazgo Principal</a:t>
-            </a:r>
-          </a:p>
-          <a:p>
-            <a:pPr>
-              <a:defRPr sz="2000">
-                <a:solidFill>
-                  <a:srgbClr val="FFFFFF"/>
-                </a:solidFill>
-              </a:defRPr>
-            </a:pPr>
-            <a:r>
-              <a:t>Ambos usuarios reportaron dificultad para encontrar el botón "Agregar al carrito" (oculto en menú dropdown)</a:t>
-            </a:r>
-          </a:p>
-        </p:txBody>
-      </p:sp>
-      <p:sp>
-        <p:nvSpPr>
-          <p:cNvPr id="63" name="Rectangle 62"/>
-          <p:cNvSpPr/>
-          <p:nvPr/>
-        </p:nvSpPr>
-        <p:spPr>
-          <a:xfrm>
-            <a:off x="0" y="0"/>
-            <a:ext cx="12191695" cy="1097280"/>
-          </a:xfrm>
-          <a:prstGeom prst="rect">
-            <a:avLst/>
-          </a:prstGeom>
-          <a:solidFill>
-            <a:srgbClr val="B8860B"/>
-          </a:solidFill>
-          <a:ln>
-            <a:noFill/>
-          </a:ln>
-        </p:spPr>
-        <p:style>
-          <a:lnRef idx="1">
-            <a:schemeClr val="accent1"/>
-          </a:lnRef>
-          <a:fillRef idx="3">
-            <a:schemeClr val="accent1"/>
-          </a:fillRef>
-          <a:effectRef idx="2">
-            <a:schemeClr val="accent1"/>
-          </a:effectRef>
-          <a:fontRef idx="minor">
-            <a:schemeClr val="lt1"/>
-          </a:fontRef>
-        </p:style>
-        <p:txBody>
-          <a:bodyPr rtlCol="0" anchor="ctr"/>
-          <a:lstStyle/>
-          <a:p>
-            <a:pPr algn="ctr"/>
-          </a:p>
-        </p:txBody>
-      </p:sp>
-      <p:sp>
-        <p:nvSpPr>
-          <p:cNvPr id="64" name="TextBox 63"/>
-          <p:cNvSpPr txBox="1"/>
-          <p:nvPr/>
-        </p:nvSpPr>
-        <p:spPr>
-          <a:xfrm>
-            <a:off x="457200" y="182880"/>
-            <a:ext cx="11277295" cy="731520"/>
-          </a:xfrm>
-          <a:prstGeom prst="rect">
-            <a:avLst/>
-          </a:prstGeom>
-          <a:noFill/>
-        </p:spPr>
-        <p:txBody>
-          <a:bodyPr wrap="none" anchor="ctr">
-            <a:spAutoFit/>
-          </a:bodyPr>
-          <a:lstStyle/>
-          <a:p>
-            <a:pPr algn="l">
-              <a:defRPr sz="3600" b="1">
-                <a:solidFill>
-                  <a:srgbClr val="FFFFFF"/>
-                </a:solidFill>
-              </a:defRPr>
-            </a:pPr>
-            <a:r>
-              <a:t>Aspectos Positivos y Recomendaciones</a:t>
-            </a:r>
-          </a:p>
-        </p:txBody>
-      </p:sp>
-      <p:sp>
-        <p:nvSpPr>
-          <p:cNvPr id="65" name="TextBox 64"/>
-          <p:cNvSpPr txBox="1"/>
-          <p:nvPr/>
-        </p:nvSpPr>
-        <p:spPr>
-          <a:xfrm>
-            <a:off x="731520" y="1371600"/>
-            <a:ext cx="5029200" cy="4572000"/>
-          </a:xfrm>
-          <a:prstGeom prst="rect">
-            <a:avLst/>
-          </a:prstGeom>
-          <a:noFill/>
-        </p:spPr>
-        <p:txBody>
-          <a:bodyPr wrap="none">
-            <a:spAutoFit/>
-          </a:bodyPr>
-          <a:lstStyle/>
-          <a:p>
-            <a:pPr>
-              <a:spcAft>
-                <a:spcPts val="1200"/>
-              </a:spcAft>
-              <a:defRPr sz="2400" b="1">
-                <a:solidFill>
-                  <a:srgbClr val="4CAF50"/>
-                </a:solidFill>
-              </a:defRPr>
-            </a:pPr>
-            <a:r>
-              <a:t>✓ Aspectos Positivos:</a:t>
-            </a:r>
-          </a:p>
-          <a:p>
-            <a:pPr>
-              <a:spcAft>
-                <a:spcPts val="800"/>
-              </a:spcAft>
-              <a:defRPr sz="1800">
-                <a:solidFill>
-                  <a:srgbClr val="333333"/>
-                </a:solidFill>
-              </a:defRPr>
-            </a:pPr>
-            <a:r>
-              <a:t>• Diseño elegante y profesional</a:t>
-            </a:r>
-          </a:p>
-          <a:p>
-            <a:pPr>
-              <a:spcAft>
-                <a:spcPts val="800"/>
-              </a:spcAft>
-              <a:defRPr sz="1800">
-                <a:solidFill>
-                  <a:srgbClr val="333333"/>
-                </a:solidFill>
-              </a:defRPr>
-            </a:pPr>
-            <a:r>
-              <a:t>• Carrito funcional con actualización automática</a:t>
-            </a:r>
-          </a:p>
-          <a:p>
-            <a:pPr>
-              <a:spcAft>
-                <a:spcPts val="800"/>
-              </a:spcAft>
-              <a:defRPr sz="1800">
-                <a:solidFill>
-                  <a:srgbClr val="333333"/>
-                </a:solidFill>
-              </a:defRPr>
-            </a:pPr>
-            <a:r>
-              <a:t>• Integración Transbank genera confianza</a:t>
-            </a:r>
-          </a:p>
-          <a:p>
-            <a:pPr>
-              <a:spcAft>
-                <a:spcPts val="800"/>
-              </a:spcAft>
-              <a:defRPr sz="1800">
-                <a:solidFill>
-                  <a:srgbClr val="333333"/>
-                </a:solidFill>
-              </a:defRPr>
-            </a:pPr>
-            <a:r>
-              <a:t>• Buen rendimiento y velocidad</a:t>
-            </a:r>
-          </a:p>
-          <a:p>
-            <a:pPr>
-              <a:spcAft>
-                <a:spcPts val="800"/>
-              </a:spcAft>
-              <a:defRPr sz="1800">
-                <a:solidFill>
-                  <a:srgbClr val="333333"/>
-                </a:solidFill>
-              </a:defRPr>
-            </a:pPr>
-            <a:r>
-              <a:t>• Navegación por categorías intuitiva</a:t>
-            </a:r>
-          </a:p>
-        </p:txBody>
-      </p:sp>
-      <p:sp>
-        <p:nvSpPr>
-          <p:cNvPr id="66" name="TextBox 65"/>
-          <p:cNvSpPr txBox="1"/>
-          <p:nvPr/>
-        </p:nvSpPr>
-        <p:spPr>
-          <a:xfrm>
-            <a:off x="6217920" y="1371600"/>
-            <a:ext cx="5029200" cy="4572000"/>
-          </a:xfrm>
-          <a:prstGeom prst="rect">
-            <a:avLst/>
-          </a:prstGeom>
-          <a:noFill/>
-        </p:spPr>
-        <p:txBody>
-          <a:bodyPr wrap="none">
-            <a:spAutoFit/>
-          </a:bodyPr>
-          <a:lstStyle/>
-          <a:p>
-            <a:pPr>
-              <a:spcAft>
-                <a:spcPts val="1200"/>
-              </a:spcAft>
-              <a:defRPr sz="2400" b="1">
-                <a:solidFill>
-                  <a:srgbClr val="FF9800"/>
-                </a:solidFill>
-              </a:defRPr>
-            </a:pPr>
-            <a:r>
-              <a:t>⚠ Recomendaciones:</a:t>
-            </a:r>
-          </a:p>
-          <a:p>
-            <a:pPr>
-              <a:spcAft>
-                <a:spcPts val="600"/>
-              </a:spcAft>
-              <a:defRPr sz="2000" b="1">
-                <a:solidFill>
-                  <a:srgbClr val="333333"/>
-                </a:solidFill>
-              </a:defRPr>
-            </a:pPr>
-            <a:r>
-              <a:t>Alta Prioridad:</a:t>
-            </a:r>
-          </a:p>
-          <a:p>
-            <a:pPr>
-              <a:spcAft>
-                <a:spcPts val="600"/>
-              </a:spcAft>
-              <a:defRPr sz="1800">
-                <a:solidFill>
-                  <a:srgbClr val="333333"/>
-                </a:solidFill>
-              </a:defRPr>
-            </a:pPr>
-            <a:r>
-              <a:t>• Hacer botón "Agregar al carrito" más visible</a:t>
-            </a:r>
-          </a:p>
-          <a:p>
-            <a:pPr>
-              <a:spcAft>
-                <a:spcPts val="600"/>
-              </a:spcAft>
-              <a:defRPr sz="1800">
-                <a:solidFill>
-                  <a:srgbClr val="333333"/>
-                </a:solidFill>
-              </a:defRPr>
-            </a:pPr>
-            <a:r>
-              <a:t>• Mejorar visibilidad link de registro</a:t>
-            </a:r>
-          </a:p>
-          <a:p>
-            <a:br/>
-            <a:pPr>
-              <a:spcAft>
-                <a:spcPts val="600"/>
-              </a:spcAft>
-              <a:defRPr sz="2000" b="1">
-                <a:solidFill>
-                  <a:srgbClr val="333333"/>
-                </a:solidFill>
-              </a:defRPr>
-            </a:pPr>
-            <a:r>
-              <a:t>Mejoras Adicionales:</a:t>
-            </a:r>
-          </a:p>
-          <a:p>
-            <a:pPr>
-              <a:spcAft>
-                <a:spcPts val="600"/>
-              </a:spcAft>
-              <a:defRPr sz="1800">
-                <a:solidFill>
-                  <a:srgbClr val="333333"/>
-                </a:solidFill>
-              </a:defRPr>
-            </a:pPr>
-            <a:r>
-              <a:t>• Agregar placeholder en campo teléfono</a:t>
-            </a:r>
-          </a:p>
-          <a:p>
-            <a:pPr>
-              <a:spcAft>
-                <a:spcPts val="600"/>
-              </a:spcAft>
-              <a:defRPr sz="1800">
-                <a:solidFill>
-                  <a:srgbClr val="333333"/>
-                </a:solidFill>
-              </a:defRPr>
-            </a:pPr>
-            <a:r>
-              <a:t>• Implementar autocompletado región/ciudad</a:t>
-            </a:r>
-          </a:p>
-        </p:txBody>
-      </p:sp>
-      <p:sp>
-        <p:nvSpPr>
-          <p:cNvPr id="67" name="Rectangle 66"/>
-          <p:cNvSpPr/>
-          <p:nvPr/>
-        </p:nvSpPr>
-        <p:spPr>
-          <a:xfrm>
-            <a:off x="0" y="0"/>
-            <a:ext cx="12191695" cy="1097280"/>
-          </a:xfrm>
-          <a:prstGeom prst="rect">
-            <a:avLst/>
-          </a:prstGeom>
-          <a:solidFill>
-            <a:srgbClr val="B8860B"/>
-          </a:solidFill>
-          <a:ln>
-            <a:noFill/>
-          </a:ln>
-        </p:spPr>
-        <p:style>
-          <a:lnRef idx="1">
-            <a:schemeClr val="accent1"/>
-          </a:lnRef>
-          <a:fillRef idx="3">
-            <a:schemeClr val="accent1"/>
-          </a:fillRef>
-          <a:effectRef idx="2">
-            <a:schemeClr val="accent1"/>
-          </a:effectRef>
-          <a:fontRef idx="minor">
-            <a:schemeClr val="lt1"/>
-          </a:fontRef>
-        </p:style>
-        <p:txBody>
-          <a:bodyPr rtlCol="0" anchor="ctr"/>
-          <a:lstStyle/>
-          <a:p>
-            <a:pPr algn="ctr"/>
-          </a:p>
-        </p:txBody>
-      </p:sp>
-      <p:sp>
-        <p:nvSpPr>
-          <p:cNvPr id="68" name="TextBox 67"/>
-          <p:cNvSpPr txBox="1"/>
-          <p:nvPr/>
-        </p:nvSpPr>
-        <p:spPr>
-          <a:xfrm>
-            <a:off x="457200" y="182880"/>
-            <a:ext cx="11277295" cy="731520"/>
-          </a:xfrm>
-          <a:prstGeom prst="rect">
-            <a:avLst/>
-          </a:prstGeom>
-          <a:noFill/>
-        </p:spPr>
-        <p:txBody>
-          <a:bodyPr wrap="none" anchor="ctr">
-            <a:spAutoFit/>
-          </a:bodyPr>
-          <a:lstStyle/>
-          <a:p>
-            <a:pPr algn="l">
-              <a:defRPr sz="3600" b="1">
-                <a:solidFill>
-                  <a:srgbClr val="FFFFFF"/>
-                </a:solidFill>
-              </a:defRPr>
-            </a:pPr>
-            <a:r>
-              <a:t>Gestión de Defectos</a:t>
-            </a:r>
-          </a:p>
-        </p:txBody>
-      </p:sp>
-      <p:sp>
-        <p:nvSpPr>
-          <p:cNvPr id="69" name="Rounded Rectangle 68"/>
-          <p:cNvSpPr/>
-          <p:nvPr/>
-        </p:nvSpPr>
-        <p:spPr>
-          <a:xfrm>
-            <a:off x="1828800" y="1645920"/>
-            <a:ext cx="8534095" cy="1371600"/>
-          </a:xfrm>
-          <a:prstGeom prst="roundRect">
-            <a:avLst/>
-          </a:prstGeom>
-          <a:solidFill>
-            <a:srgbClr val="F5F5F0"/>
-          </a:solidFill>
-          <a:ln w="25400">
-            <a:solidFill>
-              <a:srgbClr val="B8860B"/>
-            </a:solidFill>
-          </a:ln>
-        </p:spPr>
-        <p:style>
-          <a:lnRef idx="1">
-            <a:schemeClr val="accent1"/>
-          </a:lnRef>
-          <a:fillRef idx="3">
-            <a:schemeClr val="accent1"/>
-          </a:fillRef>
-          <a:effectRef idx="2">
-            <a:schemeClr val="accent1"/>
-          </a:effectRef>
-          <a:fontRef idx="minor">
-            <a:schemeClr val="lt1"/>
-          </a:fontRef>
-        </p:style>
-        <p:txBody>
-          <a:bodyPr rtlCol="0" anchor="ctr" lIns="182880" tIns="182880"/>
-          <a:lstStyle/>
-          <a:p>
-            <a:pPr algn="ctr">
-              <a:spcAft>
-                <a:spcPts val="1000"/>
-              </a:spcAft>
-              <a:defRPr sz="2400" b="1">
-                <a:solidFill>
-                  <a:srgbClr val="B8860B"/>
-                </a:solidFill>
-              </a:defRPr>
-            </a:pPr>
-            <a:r>
-              <a:t>Clasificación por Severidad</a:t>
-            </a:r>
-          </a:p>
-          <a:p>
-            <a:pPr algn="ctr">
-              <a:spcAft>
-                <a:spcPts val="600"/>
-              </a:spcAft>
-              <a:defRPr sz="2000">
-                <a:solidFill>
-                  <a:srgbClr val="333333"/>
-                </a:solidFill>
-              </a:defRPr>
-            </a:pPr>
-            <a:r>
-              <a:t>Críticos: 0</a:t>
-            </a:r>
-          </a:p>
-          <a:p>
-            <a:pPr algn="ctr">
-              <a:spcAft>
-                <a:spcPts val="600"/>
-              </a:spcAft>
-              <a:defRPr sz="2000">
-                <a:solidFill>
-                  <a:srgbClr val="333333"/>
-                </a:solidFill>
-              </a:defRPr>
-            </a:pPr>
-            <a:r>
-              <a:t>Altos: 0</a:t>
-            </a:r>
-          </a:p>
-          <a:p>
-            <a:pPr algn="ctr">
-              <a:spcAft>
-                <a:spcPts val="600"/>
-              </a:spcAft>
-              <a:defRPr sz="2000">
-                <a:solidFill>
-                  <a:srgbClr val="333333"/>
-                </a:solidFill>
-              </a:defRPr>
-            </a:pPr>
-            <a:r>
-              <a:t>Medios: 3</a:t>
-            </a:r>
-          </a:p>
-          <a:p>
-            <a:pPr algn="ctr">
-              <a:spcAft>
-                <a:spcPts val="600"/>
-              </a:spcAft>
-              <a:defRPr sz="2000">
-                <a:solidFill>
-                  <a:srgbClr val="333333"/>
-                </a:solidFill>
-              </a:defRPr>
-            </a:pPr>
-            <a:r>
-              <a:t>Bajos: 2</a:t>
-            </a:r>
-          </a:p>
-        </p:txBody>
-      </p:sp>
-      <p:sp>
-        <p:nvSpPr>
-          <p:cNvPr id="70" name="TextBox 69"/>
-          <p:cNvSpPr txBox="1"/>
-          <p:nvPr/>
-        </p:nvSpPr>
-        <p:spPr>
-          <a:xfrm>
-            <a:off x="1371600" y="3474720"/>
-            <a:ext cx="9144000" cy="1828800"/>
-          </a:xfrm>
-          <a:prstGeom prst="rect">
-            <a:avLst/>
-          </a:prstGeom>
-          <a:noFill/>
-        </p:spPr>
-        <p:txBody>
-          <a:bodyPr wrap="none">
-            <a:spAutoFit/>
-          </a:bodyPr>
-          <a:lstStyle/>
-          <a:p>
-            <a:pPr>
-              <a:spcAft>
-                <a:spcPts val="1200"/>
-              </a:spcAft>
-              <a:defRPr sz="2200" b="1">
-                <a:solidFill>
-                  <a:srgbClr val="333333"/>
-                </a:solidFill>
-              </a:defRPr>
-            </a:pPr>
-            <a:r>
-              <a:t>Defectos Medios Identificados:</a:t>
-            </a:r>
-          </a:p>
-          <a:p>
-            <a:pPr>
-              <a:spcAft>
-                <a:spcPts val="800"/>
-              </a:spcAft>
-              <a:defRPr sz="1800">
-                <a:solidFill>
-                  <a:srgbClr val="333333"/>
-                </a:solidFill>
-              </a:defRPr>
-            </a:pPr>
-            <a:r>
-              <a:t>DEF-001: Botón "Agregar al carrito" poco visible (UX)</a:t>
-            </a:r>
-          </a:p>
-          <a:p>
-            <a:pPr>
-              <a:spcAft>
-                <a:spcPts val="800"/>
-              </a:spcAft>
-              <a:defRPr sz="1800">
-                <a:solidFill>
-                  <a:srgbClr val="333333"/>
-                </a:solidFill>
-              </a:defRPr>
-            </a:pPr>
-            <a:r>
-              <a:t>DEF-002: Link de registro con bajo contraste (UI)</a:t>
-            </a:r>
-          </a:p>
-          <a:p>
-            <a:pPr>
-              <a:spcAft>
-                <a:spcPts val="800"/>
-              </a:spcAft>
-              <a:defRPr sz="1800">
-                <a:solidFill>
-                  <a:srgbClr val="333333"/>
-                </a:solidFill>
-              </a:defRPr>
-            </a:pPr>
-            <a:r>
-              <a:t>DEF-003: Validación de teléfono sin indicación de formato (Validación)</a:t>
-            </a:r>
-          </a:p>
-        </p:txBody>
-      </p:sp>
-      <p:sp>
-        <p:nvSpPr>
-          <p:cNvPr id="71" name="Rounded Rectangle 70"/>
-          <p:cNvSpPr/>
-          <p:nvPr/>
-        </p:nvSpPr>
-        <p:spPr>
-          <a:xfrm>
-            <a:off x="2286000" y="5029200"/>
-            <a:ext cx="7619695" cy="731520"/>
-          </a:xfrm>
-          <a:prstGeom prst="roundRect">
-            <a:avLst/>
-          </a:prstGeom>
-          <a:solidFill>
-            <a:srgbClr val="4CAF50"/>
-          </a:solidFill>
-          <a:ln>
-            <a:noFill/>
-          </a:ln>
-        </p:spPr>
-        <p:style>
-          <a:lnRef idx="1">
-            <a:schemeClr val="accent1"/>
-          </a:lnRef>
-          <a:fillRef idx="3">
-            <a:schemeClr val="accent1"/>
-          </a:fillRef>
-          <a:effectRef idx="2">
-            <a:schemeClr val="accent1"/>
-          </a:effectRef>
-          <a:fontRef idx="minor">
-            <a:schemeClr val="lt1"/>
-          </a:fontRef>
-        </p:style>
-        <p:txBody>
-          <a:bodyPr rtlCol="0" anchor="ctr"/>
-          <a:lstStyle/>
-          <a:p>
-            <a:pPr algn="ctr">
-              <a:defRPr sz="2400" b="1">
-                <a:solidFill>
-                  <a:srgbClr val="FFFFFF"/>
-                </a:solidFill>
-              </a:defRPr>
-            </a:pPr>
-            <a:r>
-              <a:t>✓ Sistema estable sin defectos críticos o altos</a:t>
-            </a:r>
-          </a:p>
-        </p:txBody>
-      </p:sp>
-      <p:sp>
-        <p:nvSpPr>
-          <p:cNvPr id="72" name="Rectangle 71"/>
-          <p:cNvSpPr/>
-          <p:nvPr/>
-        </p:nvSpPr>
-        <p:spPr>
-          <a:xfrm>
-            <a:off x="0" y="0"/>
-            <a:ext cx="12191695" cy="1097280"/>
-          </a:xfrm>
-          <a:prstGeom prst="rect">
-            <a:avLst/>
-          </a:prstGeom>
-          <a:solidFill>
-            <a:srgbClr val="B8860B"/>
-          </a:solidFill>
-          <a:ln>
-            <a:noFill/>
-          </a:ln>
-        </p:spPr>
-        <p:style>
-          <a:lnRef idx="1">
-            <a:schemeClr val="accent1"/>
-          </a:lnRef>
-          <a:fillRef idx="3">
-            <a:schemeClr val="accent1"/>
-          </a:fillRef>
-          <a:effectRef idx="2">
-            <a:schemeClr val="accent1"/>
-          </a:effectRef>
-          <a:fontRef idx="minor">
-            <a:schemeClr val="lt1"/>
-          </a:fontRef>
-        </p:style>
-        <p:txBody>
-          <a:bodyPr rtlCol="0" anchor="ctr"/>
-          <a:lstStyle/>
-          <a:p>
-            <a:pPr algn="ctr"/>
-          </a:p>
-        </p:txBody>
-      </p:sp>
-      <p:sp>
-        <p:nvSpPr>
-          <p:cNvPr id="73" name="TextBox 72"/>
-          <p:cNvSpPr txBox="1"/>
-          <p:nvPr/>
-        </p:nvSpPr>
-        <p:spPr>
-          <a:xfrm>
-            <a:off x="457200" y="182880"/>
-            <a:ext cx="11277295" cy="731520"/>
-          </a:xfrm>
-          <a:prstGeom prst="rect">
-            <a:avLst/>
-          </a:prstGeom>
-          <a:noFill/>
-        </p:spPr>
-        <p:txBody>
-          <a:bodyPr wrap="none" anchor="ctr">
-            <a:spAutoFit/>
-          </a:bodyPr>
-          <a:lstStyle/>
-          <a:p>
-            <a:pPr algn="l">
-              <a:defRPr sz="3600" b="1">
-                <a:solidFill>
-                  <a:srgbClr val="FFFFFF"/>
-                </a:solidFill>
-              </a:defRPr>
-            </a:pPr>
-            <a:r>
-              <a:t>Métricas Finales del Proyecto</a:t>
-            </a:r>
-          </a:p>
-        </p:txBody>
-      </p:sp>
-      <p:graphicFrame>
-        <p:nvGraphicFramePr>
-          <p:cNvPr id="74" name="Table 73"/>
-          <p:cNvGraphicFramePr>
-            <a:graphicFrameLocks noGrp="1"/>
-          </p:cNvGraphicFramePr>
-          <p:nvPr/>
-        </p:nvGraphicFramePr>
-        <p:xfrm>
-          <a:off x="1371600" y="1645920"/>
-          <a:ext cx="9144000" cy="3200400"/>
-        </p:xfrm>
-        <a:graphic>
-          <a:graphicData uri="http://schemas.openxmlformats.org/drawingml/2006/table">
-            <a:tbl>
-              <a:tblPr firstRow="1" bandRow="1">
-                <a:tableStyleId>{5C22544A-7EE6-4342-B048-85BDC9FD1C3A}</a:tableStyleId>
-              </a:tblPr>
-              <a:tblGrid>
-                <a:gridCol w="5029200"/>
-                <a:gridCol w="2057400"/>
-                <a:gridCol w="2057400"/>
-              </a:tblGrid>
-              <a:tr h="457200">
-                <a:tc>
-                  <a:txBody>
-                    <a:bodyPr/>
-                    <a:lstStyle/>
-                    <a:p>
-                      <a:pPr algn="ctr">
-                        <a:defRPr sz="2000" b="1">
-                          <a:solidFill>
-                            <a:srgbClr val="FFFFFF"/>
-                          </a:solidFill>
-                        </a:defRPr>
-                      </a:pPr>
-                      <a:r>
-                        <a:t>Métrica</a:t>
-                      </a:r>
-                    </a:p>
-                  </a:txBody>
-                  <a:tcPr>
-                    <a:solidFill>
-                      <a:srgbClr val="B8860B"/>
-                    </a:solidFill>
-                  </a:tcPr>
-                </a:tc>
-                <a:tc>
-                  <a:txBody>
-                    <a:bodyPr/>
-                    <a:lstStyle/>
-                    <a:p>
-                      <a:pPr algn="ctr">
-                        <a:defRPr sz="2000" b="1">
-                          <a:solidFill>
-                            <a:srgbClr val="FFFFFF"/>
-                          </a:solidFill>
-                        </a:defRPr>
-                      </a:pPr>
-                      <a:r>
-                        <a:t>Objetivo</a:t>
-                      </a:r>
-                    </a:p>
-                  </a:txBody>
-                  <a:tcPr>
-                    <a:solidFill>
-                      <a:srgbClr val="B8860B"/>
-                    </a:solidFill>
-                  </a:tcPr>
-                </a:tc>
-                <a:tc>
-                  <a:txBody>
-                    <a:bodyPr/>
-                    <a:lstStyle/>
-                    <a:p>
-                      <a:pPr algn="ctr">
-                        <a:defRPr sz="2000" b="1">
-                          <a:solidFill>
-                            <a:srgbClr val="FFFFFF"/>
-                          </a:solidFill>
-                        </a:defRPr>
-                      </a:pPr>
-                      <a:r>
-                        <a:t>Obtenido</a:t>
-                      </a:r>
-                    </a:p>
-                  </a:txBody>
-                  <a:tcPr>
-                    <a:solidFill>
-                      <a:srgbClr val="B8860B"/>
-                    </a:solidFill>
-                  </a:tcPr>
-                </a:tc>
-              </a:tr>
-              <a:tr h="457200">
-                <a:tc>
-                  <a:txBody>
-                    <a:bodyPr/>
-                    <a:lstStyle/>
-                    <a:p>
-                      <a:pPr>
-                        <a:defRPr sz="1800">
-                          <a:solidFill>
-                            <a:srgbClr val="333333"/>
-                          </a:solidFill>
-                        </a:defRPr>
-                      </a:pPr>
-                      <a:r>
-                        <a:t>Pruebas unitarias pasadas</a:t>
-                      </a:r>
-                    </a:p>
-                  </a:txBody>
-                  <a:tcPr/>
-                </a:tc>
-                <a:tc>
-                  <a:txBody>
-                    <a:bodyPr/>
-                    <a:lstStyle/>
-                    <a:p>
-                      <a:pPr algn="ctr">
-                        <a:defRPr sz="1800">
-                          <a:solidFill>
-                            <a:srgbClr val="333333"/>
-                          </a:solidFill>
-                        </a:defRPr>
-                      </a:pPr>
-                      <a:r>
-                        <a:t>100%</a:t>
-                      </a:r>
-                    </a:p>
-                  </a:txBody>
-                  <a:tcPr/>
-                </a:tc>
-                <a:tc>
-                  <a:txBody>
-                    <a:bodyPr/>
-                    <a:lstStyle/>
-                    <a:p>
-                      <a:pPr algn="ctr">
-                        <a:defRPr sz="1800" b="1">
-                          <a:solidFill>
-                            <a:srgbClr val="4CAF50"/>
-                          </a:solidFill>
-                        </a:defRPr>
-                      </a:pPr>
-                      <a:r>
-                        <a:t>100% ✓</a:t>
-                      </a:r>
-                    </a:p>
-                  </a:txBody>
-                  <a:tcPr/>
-                </a:tc>
-              </a:tr>
-              <a:tr h="457200">
-                <a:tc>
-                  <a:txBody>
-                    <a:bodyPr/>
-                    <a:lstStyle/>
-                    <a:p>
-                      <a:pPr>
-                        <a:defRPr sz="1800">
-                          <a:solidFill>
-                            <a:srgbClr val="333333"/>
-                          </a:solidFill>
-                        </a:defRPr>
-                      </a:pPr>
-                      <a:r>
-                        <a:t>Cobertura de código</a:t>
-                      </a:r>
-                    </a:p>
-                  </a:txBody>
-                  <a:tcPr/>
-                </a:tc>
-                <a:tc>
-                  <a:txBody>
-                    <a:bodyPr/>
-                    <a:lstStyle/>
-                    <a:p>
-                      <a:pPr algn="ctr">
-                        <a:defRPr sz="1800">
-                          <a:solidFill>
-                            <a:srgbClr val="333333"/>
-                          </a:solidFill>
-                        </a:defRPr>
-                      </a:pPr>
-                      <a:r>
-                        <a:t>≥ 70%</a:t>
-                      </a:r>
-                    </a:p>
-                  </a:txBody>
-                  <a:tcPr/>
-                </a:tc>
-                <a:tc>
-                  <a:txBody>
-                    <a:bodyPr/>
-                    <a:lstStyle/>
-                    <a:p>
-                      <a:pPr algn="ctr">
-                        <a:defRPr sz="1800" b="1">
-                          <a:solidFill>
-                            <a:srgbClr val="FF9800"/>
-                          </a:solidFill>
-                        </a:defRPr>
-                      </a:pPr>
-                      <a:r>
-                        <a:t>44.39% ~</a:t>
-                      </a:r>
-                    </a:p>
-                  </a:txBody>
-                  <a:tcPr/>
-                </a:tc>
-              </a:tr>
-              <a:tr h="457200">
-                <a:tc>
-                  <a:txBody>
-                    <a:bodyPr/>
-                    <a:lstStyle/>
-                    <a:p>
-                      <a:pPr>
-                        <a:defRPr sz="1800">
-                          <a:solidFill>
-                            <a:srgbClr val="333333"/>
-                          </a:solidFill>
-                        </a:defRPr>
-                      </a:pPr>
-                      <a:r>
-                        <a:t>Defectos críticos</a:t>
-                      </a:r>
-                    </a:p>
-                  </a:txBody>
-                  <a:tcPr/>
-                </a:tc>
-                <a:tc>
-                  <a:txBody>
-                    <a:bodyPr/>
-                    <a:lstStyle/>
-                    <a:p>
-                      <a:pPr algn="ctr">
-                        <a:defRPr sz="1800">
-                          <a:solidFill>
-                            <a:srgbClr val="333333"/>
-                          </a:solidFill>
-                        </a:defRPr>
-                      </a:pPr>
-                      <a:r>
-                        <a:t>0</a:t>
-                      </a:r>
-                    </a:p>
-                  </a:txBody>
-                  <a:tcPr/>
-                </a:tc>
-                <a:tc>
-                  <a:txBody>
-                    <a:bodyPr/>
-                    <a:lstStyle/>
-                    <a:p>
-                      <a:pPr algn="ctr">
-                        <a:defRPr sz="1800" b="1">
-                          <a:solidFill>
-                            <a:srgbClr val="4CAF50"/>
-                          </a:solidFill>
-                        </a:defRPr>
-                      </a:pPr>
-                      <a:r>
-                        <a:t>0 ✓</a:t>
-                      </a:r>
-                    </a:p>
-                  </a:txBody>
-                  <a:tcPr/>
-                </a:tc>
-              </a:tr>
-              <a:tr h="457200">
-                <a:tc>
-                  <a:txBody>
-                    <a:bodyPr/>
-                    <a:lstStyle/>
-                    <a:p>
-                      <a:pPr>
-                        <a:defRPr sz="1800">
-                          <a:solidFill>
-                            <a:srgbClr val="333333"/>
-                          </a:solidFill>
-                        </a:defRPr>
-                      </a:pPr>
-                      <a:r>
-                        <a:t>Defectos altos</a:t>
-                      </a:r>
-                    </a:p>
-                  </a:txBody>
-                  <a:tcPr/>
-                </a:tc>
-                <a:tc>
-                  <a:txBody>
-                    <a:bodyPr/>
-                    <a:lstStyle/>
-                    <a:p>
-                      <a:pPr algn="ctr">
-                        <a:defRPr sz="1800">
-                          <a:solidFill>
-                            <a:srgbClr val="333333"/>
-                          </a:solidFill>
-                        </a:defRPr>
-                      </a:pPr>
-                      <a:r>
-                        <a:t>≤ 2</a:t>
-                      </a:r>
-                    </a:p>
-                  </a:txBody>
-                  <a:tcPr/>
-                </a:tc>
-                <a:tc>
-                  <a:txBody>
-                    <a:bodyPr/>
-                    <a:lstStyle/>
-                    <a:p>
-                      <a:pPr algn="ctr">
-                        <a:defRPr sz="1800" b="1">
-                          <a:solidFill>
-                            <a:srgbClr val="4CAF50"/>
-                          </a:solidFill>
-                        </a:defRPr>
-                      </a:pPr>
-                      <a:r>
-                        <a:t>0 ✓</a:t>
-                      </a:r>
-                    </a:p>
-                  </a:txBody>
-                  <a:tcPr/>
-                </a:tc>
-              </a:tr>
-              <a:tr h="457200">
-                <a:tc>
-                  <a:txBody>
-                    <a:bodyPr/>
-                    <a:lstStyle/>
-                    <a:p>
-                      <a:pPr>
-                        <a:defRPr sz="1800">
-                          <a:solidFill>
-                            <a:srgbClr val="333333"/>
-                          </a:solidFill>
-                        </a:defRPr>
-                      </a:pPr>
-                      <a:r>
-                        <a:t>Satisfacción usabilidad</a:t>
-                      </a:r>
-                    </a:p>
-                  </a:txBody>
-                  <a:tcPr/>
-                </a:tc>
-                <a:tc>
-                  <a:txBody>
-                    <a:bodyPr/>
-                    <a:lstStyle/>
-                    <a:p>
-                      <a:pPr algn="ctr">
-                        <a:defRPr sz="1800">
-                          <a:solidFill>
-                            <a:srgbClr val="333333"/>
-                          </a:solidFill>
-                        </a:defRPr>
-                      </a:pPr>
-                      <a:r>
-                        <a:t>≥ 80</a:t>
-                      </a:r>
-                    </a:p>
-                  </a:txBody>
-                  <a:tcPr/>
-                </a:tc>
-                <a:tc>
-                  <a:txBody>
-                    <a:bodyPr/>
-                    <a:lstStyle/>
-                    <a:p>
-                      <a:pPr algn="ctr">
-                        <a:defRPr sz="1800" b="1">
-                          <a:solidFill>
-                            <a:srgbClr val="4CAF50"/>
-                          </a:solidFill>
-                        </a:defRPr>
-                      </a:pPr>
-                      <a:r>
-                        <a:t>80.0 ✓</a:t>
-                      </a:r>
-                    </a:p>
-                  </a:txBody>
-                  <a:tcPr/>
-                </a:tc>
-              </a:tr>
-              <a:tr h="457200">
-                <a:tc>
-                  <a:txBody>
-                    <a:bodyPr/>
-                    <a:lstStyle/>
-                    <a:p>
-                      <a:pPr>
-                        <a:defRPr sz="1800">
-                          <a:solidFill>
-                            <a:srgbClr val="333333"/>
-                          </a:solidFill>
-                        </a:defRPr>
-                      </a:pPr>
-                      <a:r>
-                        <a:t>Funcionalidades implementadas</a:t>
-                      </a:r>
-                    </a:p>
-                  </a:txBody>
-                  <a:tcPr/>
-                </a:tc>
-                <a:tc>
-                  <a:txBody>
-                    <a:bodyPr/>
-                    <a:lstStyle/>
-                    <a:p>
-                      <a:pPr algn="ctr">
-                        <a:defRPr sz="1800">
-                          <a:solidFill>
-                            <a:srgbClr val="333333"/>
-                          </a:solidFill>
-                        </a:defRPr>
-                      </a:pPr>
-                      <a:r>
-                        <a:t>50%</a:t>
-                      </a:r>
-                    </a:p>
-                  </a:txBody>
-                  <a:tcPr/>
-                </a:tc>
-                <a:tc>
-                  <a:txBody>
-                    <a:bodyPr/>
-                    <a:lstStyle/>
-                    <a:p>
-                      <a:pPr algn="ctr">
-                        <a:defRPr sz="1800" b="1">
-                          <a:solidFill>
-                            <a:srgbClr val="4CAF50"/>
-                          </a:solidFill>
-                        </a:defRPr>
-                      </a:pPr>
-                      <a:r>
-                        <a:t>&gt;95% ✓</a:t>
-                      </a:r>
-                    </a:p>
-                  </a:txBody>
-                  <a:tcPr/>
-                </a:tc>
-              </a:tr>
-            </a:tbl>
-          </a:graphicData>
-        </a:graphic>
-      </p:graphicFrame>
-      <p:sp>
-        <p:nvSpPr>
-          <p:cNvPr id="75" name="Rounded Rectangle 74"/>
-          <p:cNvSpPr/>
-          <p:nvPr/>
-        </p:nvSpPr>
-        <p:spPr>
-          <a:xfrm>
-            <a:off x="3200400" y="5303520"/>
-            <a:ext cx="5790895" cy="731520"/>
-          </a:xfrm>
-          <a:prstGeom prst="roundRect">
-            <a:avLst/>
-          </a:prstGeom>
-          <a:solidFill>
-            <a:srgbClr val="4CAF50"/>
-          </a:solidFill>
-          <a:ln>
-            <a:noFill/>
-          </a:ln>
-        </p:spPr>
-        <p:style>
-          <a:lnRef idx="1">
-            <a:schemeClr val="accent1"/>
-          </a:lnRef>
-          <a:fillRef idx="3">
-            <a:schemeClr val="accent1"/>
-          </a:fillRef>
-          <a:effectRef idx="2">
-            <a:schemeClr val="accent1"/>
-          </a:effectRef>
-          <a:fontRef idx="minor">
-            <a:schemeClr val="lt1"/>
-          </a:fontRef>
-        </p:style>
-        <p:txBody>
-          <a:bodyPr rtlCol="0" anchor="ctr"/>
-          <a:lstStyle/>
-          <a:p>
-            <a:pPr algn="ctr">
-              <a:defRPr sz="2400" b="1">
-                <a:solidFill>
-                  <a:srgbClr val="FFFFFF"/>
-                </a:solidFill>
-              </a:defRPr>
-            </a:pPr>
-            <a:r>
-              <a:t>Tasa de Cumplimiento: 83.3% (5 de 6 objetivos)</a:t>
-            </a:r>
-          </a:p>
-        </p:txBody>
-      </p:sp>
-      <p:sp>
-        <p:nvSpPr>
-          <p:cNvPr id="76" name="Rectangle 75"/>
-          <p:cNvSpPr/>
-          <p:nvPr/>
-        </p:nvSpPr>
-        <p:spPr>
-          <a:xfrm>
-            <a:off x="0" y="0"/>
-            <a:ext cx="12191695" cy="1097280"/>
-          </a:xfrm>
-          <a:prstGeom prst="rect">
-            <a:avLst/>
-          </a:prstGeom>
-          <a:solidFill>
-            <a:srgbClr val="B8860B"/>
-          </a:solidFill>
-          <a:ln>
-            <a:noFill/>
-          </a:ln>
-        </p:spPr>
-        <p:style>
-          <a:lnRef idx="1">
-            <a:schemeClr val="accent1"/>
-          </a:lnRef>
-          <a:fillRef idx="3">
-            <a:schemeClr val="accent1"/>
-          </a:fillRef>
-          <a:effectRef idx="2">
-            <a:schemeClr val="accent1"/>
-          </a:effectRef>
-          <a:fontRef idx="minor">
-            <a:schemeClr val="lt1"/>
-          </a:fontRef>
-        </p:style>
-        <p:txBody>
-          <a:bodyPr rtlCol="0" anchor="ctr"/>
-          <a:lstStyle/>
-          <a:p>
-            <a:pPr algn="ctr"/>
-          </a:p>
-        </p:txBody>
-      </p:sp>
-      <p:sp>
-        <p:nvSpPr>
-          <p:cNvPr id="77" name="TextBox 76"/>
-          <p:cNvSpPr txBox="1"/>
-          <p:nvPr/>
-        </p:nvSpPr>
-        <p:spPr>
-          <a:xfrm>
-            <a:off x="457200" y="182880"/>
-            <a:ext cx="11277295" cy="731520"/>
-          </a:xfrm>
-          <a:prstGeom prst="rect">
-            <a:avLst/>
-          </a:prstGeom>
-          <a:noFill/>
-        </p:spPr>
-        <p:txBody>
-          <a:bodyPr wrap="none" anchor="ctr">
-            <a:spAutoFit/>
-          </a:bodyPr>
-          <a:lstStyle/>
-          <a:p>
-            <a:pPr algn="l">
-              <a:defRPr sz="3600" b="1">
-                <a:solidFill>
-                  <a:srgbClr val="FFFFFF"/>
-                </a:solidFill>
-              </a:defRPr>
-            </a:pPr>
-            <a:r>
-              <a:t>Conclusiones</a:t>
-            </a:r>
-          </a:p>
-        </p:txBody>
-      </p:sp>
-      <p:sp>
-        <p:nvSpPr>
-          <p:cNvPr id="78" name="TextBox 77"/>
-          <p:cNvSpPr txBox="1"/>
-          <p:nvPr/>
-        </p:nvSpPr>
-        <p:spPr>
-          <a:xfrm>
-            <a:off x="914400" y="1371600"/>
-            <a:ext cx="10362895" cy="2286000"/>
-          </a:xfrm>
-          <a:prstGeom prst="rect">
-            <a:avLst/>
-          </a:prstGeom>
-          <a:noFill/>
-        </p:spPr>
-        <p:txBody>
-          <a:bodyPr wrap="none">
-            <a:spAutoFit/>
-          </a:bodyPr>
-          <a:lstStyle/>
-          <a:p>
-            <a:pPr>
-              <a:spcAft>
-                <a:spcPts val="1000"/>
-              </a:spcAft>
-              <a:defRPr sz="2400" b="1">
-                <a:solidFill>
-                  <a:srgbClr val="4CAF50"/>
-                </a:solidFill>
-              </a:defRPr>
-            </a:pPr>
-            <a:r>
-              <a:t>Logros Principales:</a:t>
-            </a:r>
-          </a:p>
-          <a:p>
-            <a:pPr>
-              <a:spcAft>
-                <a:spcPts val="800"/>
-              </a:spcAft>
-              <a:defRPr sz="1800">
-                <a:solidFill>
-                  <a:srgbClr val="333333"/>
-                </a:solidFill>
-              </a:defRPr>
-            </a:pPr>
-            <a:r>
-              <a:t>✓ 100% de pruebas unitarias pasando - Backend estable y confiable</a:t>
-            </a:r>
-          </a:p>
-          <a:p>
-            <a:pPr>
-              <a:spcAft>
-                <a:spcPts val="800"/>
-              </a:spcAft>
-              <a:defRPr sz="1800">
-                <a:solidFill>
-                  <a:srgbClr val="333333"/>
-                </a:solidFill>
-              </a:defRPr>
-            </a:pPr>
-            <a:r>
-              <a:t>✓ 94.3% de pruebas totales exitosas - Alta calidad general</a:t>
-            </a:r>
-          </a:p>
-          <a:p>
-            <a:pPr>
-              <a:spcAft>
-                <a:spcPts val="800"/>
-              </a:spcAft>
-              <a:defRPr sz="1800">
-                <a:solidFill>
-                  <a:srgbClr val="333333"/>
-                </a:solidFill>
-              </a:defRPr>
-            </a:pPr>
-            <a:r>
-              <a:t>✓ 0 defectos críticos o altos - Sistema listo para producción</a:t>
-            </a:r>
-          </a:p>
-          <a:p>
-            <a:pPr>
-              <a:spcAft>
-                <a:spcPts val="800"/>
-              </a:spcAft>
-              <a:defRPr sz="1800">
-                <a:solidFill>
-                  <a:srgbClr val="333333"/>
-                </a:solidFill>
-              </a:defRPr>
-            </a:pPr>
-            <a:r>
-              <a:t>✓ SUS 80/100 - Muy buena usabilidad (sobre estándar industria)</a:t>
-            </a:r>
-          </a:p>
-          <a:p>
-            <a:pPr>
-              <a:spcAft>
-                <a:spcPts val="800"/>
-              </a:spcAft>
-              <a:defRPr sz="1800">
-                <a:solidFill>
-                  <a:srgbClr val="333333"/>
-                </a:solidFill>
-              </a:defRPr>
-            </a:pPr>
-            <a:r>
-              <a:t>✓ Integración Transbank validada - Pagos funcionando correctamente</a:t>
-            </a:r>
-          </a:p>
-        </p:txBody>
-      </p:sp>
-      <p:sp>
-        <p:nvSpPr>
-          <p:cNvPr id="79" name="TextBox 78"/>
-          <p:cNvSpPr txBox="1"/>
-          <p:nvPr/>
-        </p:nvSpPr>
-        <p:spPr>
-          <a:xfrm>
-            <a:off x="914400" y="3931920"/>
-            <a:ext cx="10362895" cy="1828800"/>
-          </a:xfrm>
-          <a:prstGeom prst="rect">
-            <a:avLst/>
-          </a:prstGeom>
-          <a:noFill/>
-        </p:spPr>
-        <p:txBody>
-          <a:bodyPr wrap="none">
-            <a:spAutoFit/>
-          </a:bodyPr>
-          <a:lstStyle/>
-          <a:p>
-            <a:pPr>
-              <a:spcAft>
-                <a:spcPts val="1000"/>
-              </a:spcAft>
-              <a:defRPr sz="2400" b="1">
-                <a:solidFill>
-                  <a:srgbClr val="FF9800"/>
-                </a:solidFill>
-              </a:defRPr>
-            </a:pPr>
-            <a:r>
-              <a:t>Áreas de Mejora Identificadas:</a:t>
-            </a:r>
-          </a:p>
-          <a:p>
-            <a:pPr>
-              <a:spcAft>
-                <a:spcPts val="800"/>
-              </a:spcAft>
-              <a:defRPr sz="1800">
-                <a:solidFill>
-                  <a:srgbClr val="333333"/>
-                </a:solidFill>
-              </a:defRPr>
-            </a:pPr>
-            <a:r>
-              <a:t>⚙ Aumentar cobertura de código en controladores (objetivo: 70%)</a:t>
-            </a:r>
-          </a:p>
-          <a:p>
-            <a:pPr>
-              <a:spcAft>
-                <a:spcPts val="800"/>
-              </a:spcAft>
-              <a:defRPr sz="1800">
-                <a:solidFill>
-                  <a:srgbClr val="333333"/>
-                </a:solidFill>
-              </a:defRPr>
-            </a:pPr>
-            <a:r>
-              <a:t>⚙ Mejorar visibilidad de elementos UI críticos</a:t>
-            </a:r>
-          </a:p>
-          <a:p>
-            <a:pPr>
-              <a:spcAft>
-                <a:spcPts val="800"/>
-              </a:spcAft>
-              <a:defRPr sz="1800">
-                <a:solidFill>
-                  <a:srgbClr val="333333"/>
-                </a:solidFill>
-              </a:defRPr>
-            </a:pPr>
-            <a:r>
-              <a:t>⚙ Implementar mejoras de usabilidad identificadas</a:t>
-            </a:r>
-          </a:p>
-        </p:txBody>
-      </p:sp>
-      <p:sp>
-        <p:nvSpPr>
-          <p:cNvPr id="80" name="Rectangle 79"/>
-          <p:cNvSpPr/>
-          <p:nvPr/>
-        </p:nvSpPr>
-        <p:spPr>
-          <a:xfrm>
-            <a:off x="0" y="0"/>
-            <a:ext cx="12191695" cy="1097280"/>
-          </a:xfrm>
-          <a:prstGeom prst="rect">
-            <a:avLst/>
-          </a:prstGeom>
-          <a:solidFill>
-            <a:srgbClr val="B8860B"/>
-          </a:solidFill>
-          <a:ln>
-            <a:noFill/>
-          </a:ln>
-        </p:spPr>
-        <p:style>
-          <a:lnRef idx="1">
-            <a:schemeClr val="accent1"/>
-          </a:lnRef>
-          <a:fillRef idx="3">
-            <a:schemeClr val="accent1"/>
-          </a:fillRef>
-          <a:effectRef idx="2">
-            <a:schemeClr val="accent1"/>
-          </a:effectRef>
-          <a:fontRef idx="minor">
-            <a:schemeClr val="lt1"/>
-          </a:fontRef>
-        </p:style>
-        <p:txBody>
-          <a:bodyPr rtlCol="0" anchor="ctr"/>
-          <a:lstStyle/>
-          <a:p>
-            <a:pPr algn="ctr"/>
-          </a:p>
-        </p:txBody>
-      </p:sp>
-      <p:sp>
-        <p:nvSpPr>
-          <p:cNvPr id="81" name="TextBox 80"/>
-          <p:cNvSpPr txBox="1"/>
-          <p:nvPr/>
-        </p:nvSpPr>
-        <p:spPr>
-          <a:xfrm>
-            <a:off x="457200" y="182880"/>
-            <a:ext cx="11277295" cy="731520"/>
-          </a:xfrm>
-          <a:prstGeom prst="rect">
-            <a:avLst/>
-          </a:prstGeom>
-          <a:noFill/>
-        </p:spPr>
-        <p:txBody>
-          <a:bodyPr wrap="none" anchor="ctr">
-            <a:spAutoFit/>
-          </a:bodyPr>
-          <a:lstStyle/>
-          <a:p>
-            <a:pPr algn="l">
-              <a:defRPr sz="3600" b="1">
-                <a:solidFill>
-                  <a:srgbClr val="FFFFFF"/>
-                </a:solidFill>
-              </a:defRPr>
-            </a:pPr>
-            <a:r>
-              <a:t>Lecciones Aprendidas</a:t>
-            </a:r>
-          </a:p>
-        </p:txBody>
-      </p:sp>
-      <p:sp>
-        <p:nvSpPr>
-          <p:cNvPr id="82" name="TextBox 81"/>
-          <p:cNvSpPr txBox="1"/>
-          <p:nvPr/>
-        </p:nvSpPr>
-        <p:spPr>
-          <a:xfrm>
-            <a:off x="1371600" y="1371600"/>
-            <a:ext cx="9144000" cy="4572000"/>
-          </a:xfrm>
-          <a:prstGeom prst="rect">
-            <a:avLst/>
-          </a:prstGeom>
-          <a:noFill/>
-        </p:spPr>
-        <p:txBody>
-          <a:bodyPr wrap="none">
-            <a:spAutoFit/>
-          </a:bodyPr>
-          <a:lstStyle/>
-          <a:p>
-            <a:pPr>
-              <a:spcAft>
-                <a:spcPts val="1000"/>
-              </a:spcAft>
-              <a:defRPr sz="1700">
-                <a:solidFill>
-                  <a:srgbClr val="333333"/>
-                </a:solidFill>
-              </a:defRPr>
-            </a:pPr>
-            <a:r>
-              <a:rPr b="1">
-                <a:solidFill>
-                  <a:srgbClr val="B8860B"/>
-                </a:solidFill>
-              </a:rPr>
-              <a:t>1. Valor de los Mocks: Implementación de mocks para servicios externos permitió testing confiable e independiente</a:t>
-            </a:r>
-          </a:p>
-          <a:p>
-            <a:pPr>
-              <a:spcAft>
-                <a:spcPts val="1000"/>
-              </a:spcAft>
-              <a:defRPr sz="1700">
-                <a:solidFill>
-                  <a:srgbClr val="333333"/>
-                </a:solidFill>
-              </a:defRPr>
-            </a:pPr>
-            <a:r>
-              <a:rPr b="1">
-                <a:solidFill>
-                  <a:srgbClr val="B8860B"/>
-                </a:solidFill>
-              </a:rPr>
-              <a:t>2. Testing Temprano: Implementar tests desde etapas iniciales facilita detección temprana de problemas</a:t>
-            </a:r>
-          </a:p>
-          <a:p>
-            <a:pPr>
-              <a:spcAft>
-                <a:spcPts val="1000"/>
-              </a:spcAft>
-              <a:defRPr sz="1700">
-                <a:solidFill>
-                  <a:srgbClr val="333333"/>
-                </a:solidFill>
-              </a:defRPr>
-            </a:pPr>
-            <a:r>
-              <a:rPr b="1">
-                <a:solidFill>
-                  <a:srgbClr val="B8860B"/>
-                </a:solidFill>
-              </a:rPr>
-              <a:t>3. Mantenimiento de Tests E2E: Usar data-testid en lugar de clases CSS para mayor estabilidad</a:t>
-            </a:r>
-          </a:p>
-          <a:p>
-            <a:pPr>
-              <a:spcAft>
-                <a:spcPts val="1000"/>
-              </a:spcAft>
-              <a:defRPr sz="1700">
-                <a:solidFill>
-                  <a:srgbClr val="333333"/>
-                </a:solidFill>
-              </a:defRPr>
-            </a:pPr>
-            <a:r>
-              <a:rPr b="1">
-                <a:solidFill>
-                  <a:srgbClr val="B8860B"/>
-                </a:solidFill>
-              </a:rPr>
-              <a:t>4. Cobertura vs Calidad: 44.39% de cobertura es adecuado al cubrir casos críticos - más valioso que cobertura alta superficial</a:t>
-            </a:r>
-          </a:p>
-          <a:p>
-            <a:pPr>
-              <a:spcAft>
-                <a:spcPts val="1000"/>
-              </a:spcAft>
-              <a:defRPr sz="1700">
-                <a:solidFill>
-                  <a:srgbClr val="333333"/>
-                </a:solidFill>
-              </a:defRPr>
-            </a:pPr>
-            <a:r>
-              <a:rPr b="1">
-                <a:solidFill>
-                  <a:srgbClr val="B8860B"/>
-                </a:solidFill>
-              </a:rPr>
-              <a:t>5. Tests de Usabilidad: Usuarios reales revelan problemas de UX que tests automatizados no detectan</a:t>
-            </a:r>
-          </a:p>
-          <a:p>
-            <a:pPr>
-              <a:spcAft>
-                <a:spcPts val="1000"/>
-              </a:spcAft>
-              <a:defRPr sz="1700">
-                <a:solidFill>
-                  <a:srgbClr val="333333"/>
-                </a:solidFill>
-              </a:defRPr>
-            </a:pPr>
-            <a:r>
-              <a:rPr b="1">
-                <a:solidFill>
-                  <a:srgbClr val="B8860B"/>
-                </a:solidFill>
-              </a:rPr>
-              <a:t>6. Estrategia Híbrida: Combinación de pruebas unitarias (backend) y E2E (frontend) proporciona cobertura integral</a:t>
-            </a:r>
-          </a:p>
-        </p:txBody>
-      </p:sp>
-      <p:sp>
-        <p:nvSpPr>
-          <p:cNvPr id="83" name="Rectangle 82"/>
-          <p:cNvSpPr/>
-          <p:nvPr/>
-        </p:nvSpPr>
-        <p:spPr>
-          <a:xfrm>
-            <a:off x="0" y="0"/>
-            <a:ext cx="12191695" cy="2286000"/>
-          </a:xfrm>
-          <a:prstGeom prst="rect">
-            <a:avLst/>
-          </a:prstGeom>
-          <a:solidFill>
-            <a:srgbClr val="B8860B"/>
-          </a:solidFill>
-          <a:ln>
-            <a:noFill/>
-          </a:ln>
-        </p:spPr>
-        <p:style>
-          <a:lnRef idx="1">
-            <a:schemeClr val="accent1"/>
-          </a:lnRef>
-          <a:fillRef idx="3">
-            <a:schemeClr val="accent1"/>
-          </a:fillRef>
-          <a:effectRef idx="2">
-            <a:schemeClr val="accent1"/>
-          </a:effectRef>
-          <a:fontRef idx="minor">
-            <a:schemeClr val="lt1"/>
-          </a:fontRef>
-        </p:style>
-        <p:txBody>
-          <a:bodyPr rtlCol="0" anchor="ctr"/>
-          <a:lstStyle/>
-          <a:p>
-            <a:pPr algn="ctr"/>
-          </a:p>
-        </p:txBody>
-      </p:sp>
-      <p:sp>
-        <p:nvSpPr>
-          <p:cNvPr id="84" name="TextBox 83"/>
-          <p:cNvSpPr txBox="1"/>
-          <p:nvPr/>
-        </p:nvSpPr>
-        <p:spPr>
-          <a:xfrm>
-            <a:off x="1828800" y="2286000"/>
-            <a:ext cx="8534095" cy="1371600"/>
-          </a:xfrm>
-          <a:prstGeom prst="rect">
-            <a:avLst/>
-          </a:prstGeom>
-          <a:noFill/>
-        </p:spPr>
-        <p:txBody>
-          <a:bodyPr wrap="none">
-            <a:spAutoFit/>
-          </a:bodyPr>
-          <a:lstStyle/>
-          <a:p>
-            <a:pPr algn="ctr">
-              <a:defRPr sz="7200" b="1">
-                <a:solidFill>
-                  <a:srgbClr val="B8860B"/>
-                </a:solidFill>
-              </a:defRPr>
-            </a:pPr>
-            <a:r>
-              <a:t>Gracias</a:t>
-            </a:r>
-          </a:p>
-          <a:p>
-            <a:pPr algn="ctr">
-              <a:defRPr sz="4400">
-                <a:solidFill>
-                  <a:srgbClr val="333333"/>
-                </a:solidFill>
-              </a:defRPr>
-            </a:pPr>
-            <a:r>
-              <a:t>por su atención</a:t>
-            </a:r>
-          </a:p>
-        </p:txBody>
-      </p:sp>
-      <p:sp>
-        <p:nvSpPr>
-          <p:cNvPr id="85" name="TextBox 84"/>
-          <p:cNvSpPr txBox="1"/>
-          <p:nvPr/>
-        </p:nvSpPr>
-        <p:spPr>
-          <a:xfrm>
-            <a:off x="1828800" y="4114800"/>
-            <a:ext cx="8534095" cy="1828800"/>
-          </a:xfrm>
-          <a:prstGeom prst="rect">
-            <a:avLst/>
-          </a:prstGeom>
-          <a:noFill/>
-        </p:spPr>
-        <p:txBody>
-          <a:bodyPr wrap="none">
-            <a:spAutoFit/>
-          </a:bodyPr>
-          <a:lstStyle/>
-          <a:p>
-            <a:pPr algn="ctr">
-              <a:spcAft>
-                <a:spcPts val="1000"/>
-              </a:spcAft>
-              <a:defRPr sz="2800" b="1">
-                <a:solidFill>
-                  <a:srgbClr val="333333"/>
-                </a:solidFill>
-              </a:defRPr>
-            </a:pPr>
-            <a:r>
-              <a:t>Joaquin Cancino Torres</a:t>
-            </a:r>
-          </a:p>
-          <a:p>
-            <a:pPr algn="ctr">
-              <a:spcAft>
-                <a:spcPts val="600"/>
-              </a:spcAft>
-              <a:defRPr sz="2200">
-                <a:solidFill>
-                  <a:srgbClr val="333333"/>
-                </a:solidFill>
-              </a:defRPr>
-            </a:pPr>
-            <a:r>
-              <a:t>INF-524 - Taller de Desarrollo de Software</a:t>
-            </a:r>
-          </a:p>
-          <a:p>
-            <a:pPr algn="ctr">
-              <a:spcAft>
-                <a:spcPts val="2000"/>
-              </a:spcAft>
-              <a:defRPr sz="2200">
-                <a:solidFill>
-                  <a:srgbClr val="333333"/>
-                </a:solidFill>
-              </a:defRPr>
-            </a:pPr>
-            <a:r>
-              <a:t>Universidad Católica del Maule</a:t>
-            </a:r>
-          </a:p>
-          <a:p>
-            <a:pPr algn="ctr">
-              <a:defRPr sz="2000">
-                <a:solidFill>
-                  <a:srgbClr val="DAA520"/>
-                </a:solidFill>
-              </a:defRPr>
-            </a:pPr>
-            <a:r>
-              <a:t>Noviembre 2024</a:t>
-            </a:r>
-          </a:p>
-        </p:txBody>
-      </p:sp>
-    </p:spTree>
-  </p:cSld>
-  <p:clrMapOvr>
-    <a:masterClrMapping/>
-  </p:clrMapOvr>
-</p:sld>
-</file>
-
-<file path=ppt/slides/slide10.xml><?xml version="1.0" encoding="utf-8"?>
-<p:sld xmlns:a="http://schemas.openxmlformats.org/drawingml/2006/main" xmlns:p="http://schemas.openxmlformats.org/presentationml/2006/main" xmlns:r="http://schemas.openxmlformats.org/officeDocument/2006/relationships">
-  <p:cSld>
-    <p:spTree>
-      <p:nvGrpSpPr>
-        <p:cNvPr id="1" name=""/>
-        <p:cNvGrpSpPr/>
-        <p:nvPr/>
-      </p:nvGrpSpPr>
-      <p:grpSpPr/>
-    </p:spTree>
-  </p:cSld>
-  <p:clrMapOvr>
-    <a:masterClrMapping/>
-  </p:clrMapOvr>
-</p:sld>
-</file>
-
-<file path=ppt/slides/slide11.xml><?xml version="1.0" encoding="utf-8"?>
-<p:sld xmlns:a="http://schemas.openxmlformats.org/drawingml/2006/main" xmlns:p="http://schemas.openxmlformats.org/presentationml/2006/main" xmlns:r="http://schemas.openxmlformats.org/officeDocument/2006/relationships">
-  <p:cSld>
-    <p:spTree>
-      <p:nvGrpSpPr>
-        <p:cNvPr id="1" name=""/>
-        <p:cNvGrpSpPr/>
-        <p:nvPr/>
-      </p:nvGrpSpPr>
-      <p:grpSpPr/>
-    </p:spTree>
-  </p:cSld>
-  <p:clrMapOvr>
-    <a:masterClrMapping/>
-  </p:clrMapOvr>
-</p:sld>
-</file>
-
-<file path=ppt/slides/slide12.xml><?xml version="1.0" encoding="utf-8"?>
-<p:sld xmlns:a="http://schemas.openxmlformats.org/drawingml/2006/main" xmlns:p="http://schemas.openxmlformats.org/presentationml/2006/main" xmlns:r="http://schemas.openxmlformats.org/officeDocument/2006/relationships">
-  <p:cSld>
-    <p:spTree>
-      <p:nvGrpSpPr>
-        <p:cNvPr id="1" name=""/>
-        <p:cNvGrpSpPr/>
-        <p:nvPr/>
-      </p:nvGrpSpPr>
-      <p:grpSpPr/>
-    </p:spTree>
-  </p:cSld>
-  <p:clrMapOvr>
-    <a:masterClrMapping/>
-  </p:clrMapOvr>
-</p:sld>
-</file>
-
-<file path=ppt/slides/slide13.xml><?xml version="1.0" encoding="utf-8"?>
-<p:sld xmlns:a="http://schemas.openxmlformats.org/drawingml/2006/main" xmlns:p="http://schemas.openxmlformats.org/presentationml/2006/main" xmlns:r="http://schemas.openxmlformats.org/officeDocument/2006/relationships">
-  <p:cSld>
-    <p:spTree>
-      <p:nvGrpSpPr>
-        <p:cNvPr id="1" name=""/>
-        <p:cNvGrpSpPr/>
-        <p:nvPr/>
-      </p:nvGrpSpPr>
-      <p:grpSpPr/>
-    </p:spTree>
-  </p:cSld>
-  <p:clrMapOvr>
-    <a:masterClrMapping/>
-  </p:clrMapOvr>
-</p:sld>
-</file>
-
-<file path=ppt/slides/slide14.xml><?xml version="1.0" encoding="utf-8"?>
-<p:sld xmlns:a="http://schemas.openxmlformats.org/drawingml/2006/main" xmlns:p="http://schemas.openxmlformats.org/presentationml/2006/main" xmlns:r="http://schemas.openxmlformats.org/officeDocument/2006/relationships">
-  <p:cSld>
-    <p:spTree>
-      <p:nvGrpSpPr>
-        <p:cNvPr id="1" name=""/>
-        <p:cNvGrpSpPr/>
-        <p:nvPr/>
-      </p:nvGrpSpPr>
-      <p:grpSpPr/>
-    </p:spTree>
-  </p:cSld>
-  <p:clrMapOvr>
-    <a:masterClrMapping/>
-  </p:clrMapOvr>
-</p:sld>
-</file>
-
-<file path=ppt/slides/slide15.xml><?xml version="1.0" encoding="utf-8"?>
-<p:sld xmlns:a="http://schemas.openxmlformats.org/drawingml/2006/main" xmlns:p="http://schemas.openxmlformats.org/presentationml/2006/main" xmlns:r="http://schemas.openxmlformats.org/officeDocument/2006/relationships">
-  <p:cSld>
-    <p:spTree>
-      <p:nvGrpSpPr>
-        <p:cNvPr id="1" name=""/>
-        <p:cNvGrpSpPr/>
-        <p:nvPr/>
-      </p:nvGrpSpPr>
-      <p:grpSpPr/>
-    </p:spTree>
-  </p:cSld>
-  <p:clrMapOvr>
-    <a:masterClrMapping/>
-  </p:clrMapOvr>
-</p:sld>
-</file>
-
-<file path=ppt/slides/slide16.xml><?xml version="1.0" encoding="utf-8"?>
-<p:sld xmlns:a="http://schemas.openxmlformats.org/drawingml/2006/main" xmlns:p="http://schemas.openxmlformats.org/presentationml/2006/main" xmlns:r="http://schemas.openxmlformats.org/officeDocument/2006/relationships">
-  <p:cSld>
-    <p:spTree>
-      <p:nvGrpSpPr>
-        <p:cNvPr id="1" name=""/>
-        <p:cNvGrpSpPr/>
-        <p:nvPr/>
-      </p:nvGrpSpPr>
-      <p:grpSpPr/>
-    </p:spTree>
-  </p:cSld>
-  <p:clrMapOvr>
-    <a:masterClrMapping/>
-  </p:clrMapOvr>
-</p:sld>
-</file>
-
-<file path=ppt/slides/slide17.xml><?xml version="1.0" encoding="utf-8"?>
-<p:sld xmlns:a="http://schemas.openxmlformats.org/drawingml/2006/main" xmlns:p="http://schemas.openxmlformats.org/presentationml/2006/main" xmlns:r="http://schemas.openxmlformats.org/officeDocument/2006/relationships">
-  <p:cSld>
-    <p:spTree>
-      <p:nvGrpSpPr>
-        <p:cNvPr id="1" name=""/>
-        <p:cNvGrpSpPr/>
-        <p:nvPr/>
-      </p:nvGrpSpPr>
-      <p:grpSpPr/>
-    </p:spTree>
-  </p:cSld>
-  <p:clrMapOvr>
-    <a:masterClrMapping/>
-  </p:clrMapOvr>
-</p:sld>
-</file>
-
-<file path=ppt/slides/slide18.xml><?xml version="1.0" encoding="utf-8"?>
-<p:sld xmlns:a="http://schemas.openxmlformats.org/drawingml/2006/main" xmlns:p="http://schemas.openxmlformats.org/presentationml/2006/main" xmlns:r="http://schemas.openxmlformats.org/officeDocument/2006/relationships">
-  <p:cSld>
-    <p:spTree>
-      <p:nvGrpSpPr>
-        <p:cNvPr id="1" name=""/>
-        <p:cNvGrpSpPr/>
-        <p:nvPr/>
-      </p:nvGrpSpPr>
-      <p:grpSpPr/>
-    </p:spTree>
-  </p:cSld>
-  <p:clrMapOvr>
-    <a:masterClrMapping/>
-  </p:clrMapOvr>
-</p:sld>
-</file>
-
-<file path=ppt/slides/slide19.xml><?xml version="1.0" encoding="utf-8"?>
-<p:sld xmlns:a="http://schemas.openxmlformats.org/drawingml/2006/main" xmlns:p="http://schemas.openxmlformats.org/presentationml/2006/main" xmlns:r="http://schemas.openxmlformats.org/officeDocument/2006/relationships">
-  <p:cSld>
-    <p:spTree>
-      <p:nvGrpSpPr>
-        <p:cNvPr id="1" name=""/>
-        <p:cNvGrpSpPr/>
-        <p:nvPr/>
-      </p:nvGrpSpPr>
-      <p:grpSpPr/>
-    </p:spTree>
-  </p:cSld>
-  <p:clrMapOvr>
-    <a:masterClrMapping/>
-  </p:clrMapOvr>
-</p:sld>
-</file>
-
-<file path=ppt/slides/slide2.xml><?xml version="1.0" encoding="utf-8"?>
-<p:sld xmlns:a="http://schemas.openxmlformats.org/drawingml/2006/main" xmlns:p="http://schemas.openxmlformats.org/presentationml/2006/main" xmlns:r="http://schemas.openxmlformats.org/officeDocument/2006/relationships">
-  <p:cSld>
-    <p:spTree>
-      <p:nvGrpSpPr>
-        <p:cNvPr id="1" name=""/>
-        <p:cNvGrpSpPr/>
-        <p:nvPr/>
-      </p:nvGrpSpPr>
-      <p:grpSpPr/>
-    </p:spTree>
-  </p:cSld>
-  <p:clrMapOvr>
-    <a:masterClrMapping/>
-  </p:clrMapOvr>
-</p:sld>
-</file>
-
-<file path=ppt/slides/slide20.xml><?xml version="1.0" encoding="utf-8"?>
-<p:sld xmlns:a="http://schemas.openxmlformats.org/drawingml/2006/main" xmlns:p="http://schemas.openxmlformats.org/presentationml/2006/main" xmlns:r="http://schemas.openxmlformats.org/officeDocument/2006/relationships">
-  <p:cSld>
-    <p:spTree>
-      <p:nvGrpSpPr>
-        <p:cNvPr id="1" name=""/>
-        <p:cNvGrpSpPr/>
-        <p:nvPr/>
-      </p:nvGrpSpPr>
-      <p:grpSpPr/>
-    </p:spTree>
-  </p:cSld>
-  <p:clrMapOvr>
-    <a:masterClrMapping/>
-  </p:clrMapOvr>
-</p:sld>
-</file>
-
-<file path=ppt/slides/slide3.xml><?xml version="1.0" encoding="utf-8"?>
-<p:sld xmlns:a="http://schemas.openxmlformats.org/drawingml/2006/main" xmlns:p="http://schemas.openxmlformats.org/presentationml/2006/main" xmlns:r="http://schemas.openxmlformats.org/officeDocument/2006/relationships">
-  <p:cSld>
-    <p:spTree>
-      <p:nvGrpSpPr>
-        <p:cNvPr id="1" name=""/>
-        <p:cNvGrpSpPr/>
-        <p:nvPr/>
-      </p:nvGrpSpPr>
-      <p:grpSpPr/>
-    </p:spTree>
-  </p:cSld>
-  <p:clrMapOvr>
-    <a:masterClrMapping/>
-  </p:clrMapOvr>
-</p:sld>
-</file>
-
-<file path=ppt/slides/slide4.xml><?xml version="1.0" encoding="utf-8"?>
-<p:sld xmlns:a="http://schemas.openxmlformats.org/drawingml/2006/main" xmlns:p="http://schemas.openxmlformats.org/presentationml/2006/main" xmlns:r="http://schemas.openxmlformats.org/officeDocument/2006/relationships">
-  <p:cSld>
-    <p:spTree>
-      <p:nvGrpSpPr>
-        <p:cNvPr id="1" name=""/>
-        <p:cNvGrpSpPr/>
-        <p:nvPr/>
-      </p:nvGrpSpPr>
-      <p:grpSpPr/>
-    </p:spTree>
-  </p:cSld>
-  <p:clrMapOvr>
-    <a:masterClrMapping/>
-  </p:clrMapOvr>
-</p:sld>
-</file>
-
-<file path=ppt/slides/slide5.xml><?xml version="1.0" encoding="utf-8"?>
-<p:sld xmlns:a="http://schemas.openxmlformats.org/drawingml/2006/main" xmlns:p="http://schemas.openxmlformats.org/presentationml/2006/main" xmlns:r="http://schemas.openxmlformats.org/officeDocument/2006/relationships">
-  <p:cSld>
-    <p:spTree>
-      <p:nvGrpSpPr>
-        <p:cNvPr id="1" name=""/>
-        <p:cNvGrpSpPr/>
-        <p:nvPr/>
-      </p:nvGrpSpPr>
-      <p:grpSpPr/>
-    </p:spTree>
-  </p:cSld>
-  <p:clrMapOvr>
-    <a:masterClrMapping/>
-  </p:clrMapOvr>
-</p:sld>
-</file>
-
-<file path=ppt/slides/slide6.xml><?xml version="1.0" encoding="utf-8"?>
-<p:sld xmlns:a="http://schemas.openxmlformats.org/drawingml/2006/main" xmlns:p="http://schemas.openxmlformats.org/presentationml/2006/main" xmlns:r="http://schemas.openxmlformats.org/officeDocument/2006/relationships">
-  <p:cSld>
-    <p:spTree>
-      <p:nvGrpSpPr>
-        <p:cNvPr id="1" name=""/>
-        <p:cNvGrpSpPr/>
-        <p:nvPr/>
-      </p:nvGrpSpPr>
-      <p:grpSpPr/>
-    </p:spTree>
-  </p:cSld>
-  <p:clrMapOvr>
-    <a:masterClrMapping/>
-  </p:clrMapOvr>
-</p:sld>
-</file>
-
-<file path=ppt/slides/slide7.xml><?xml version="1.0" encoding="utf-8"?>
-<p:sld xmlns:a="http://schemas.openxmlformats.org/drawingml/2006/main" xmlns:p="http://schemas.openxmlformats.org/presentationml/2006/main" xmlns:r="http://schemas.openxmlformats.org/officeDocument/2006/relationships">
-  <p:cSld>
-    <p:spTree>
-      <p:nvGrpSpPr>
-        <p:cNvPr id="1" name=""/>
-        <p:cNvGrpSpPr/>
-        <p:nvPr/>
-      </p:nvGrpSpPr>
-      <p:grpSpPr/>
-    </p:spTree>
-  </p:cSld>
-  <p:clrMapOvr>
-    <a:masterClrMapping/>
-  </p:clrMapOvr>
-</p:sld>
-</file>
-
-<file path=ppt/slides/slide8.xml><?xml version="1.0" encoding="utf-8"?>
-<p:sld xmlns:a="http://schemas.openxmlformats.org/drawingml/2006/main" xmlns:p="http://schemas.openxmlformats.org/presentationml/2006/main" xmlns:r="http://schemas.openxmlformats.org/officeDocument/2006/relationships">
-  <p:cSld>
-    <p:spTree>
-      <p:nvGrpSpPr>
-        <p:cNvPr id="1" name=""/>
-        <p:cNvGrpSpPr/>
-        <p:nvPr/>
-      </p:nvGrpSpPr>
-      <p:grpSpPr/>
     </p:spTree>
   </p:cSld>
   <p:clrMapOvr>
@@ -10416,6 +10112,310 @@
         <p:nvPr/>
       </p:nvGrpSpPr>
       <p:grpSpPr/>
+      <p:sp>
+        <p:nvSpPr>
+          <p:cNvPr id="2" name="Rectangle 1"/>
+          <p:cNvSpPr/>
+          <p:nvPr/>
+        </p:nvSpPr>
+        <p:spPr>
+          <a:xfrm>
+            <a:off x="0" y="0"/>
+            <a:ext cx="12191695" cy="1097280"/>
+          </a:xfrm>
+          <a:prstGeom prst="rect">
+            <a:avLst/>
+          </a:prstGeom>
+          <a:solidFill>
+            <a:srgbClr val="B8860B"/>
+          </a:solidFill>
+          <a:ln>
+            <a:noFill/>
+          </a:ln>
+        </p:spPr>
+        <p:style>
+          <a:lnRef idx="1">
+            <a:schemeClr val="accent1"/>
+          </a:lnRef>
+          <a:fillRef idx="3">
+            <a:schemeClr val="accent1"/>
+          </a:fillRef>
+          <a:effectRef idx="2">
+            <a:schemeClr val="accent1"/>
+          </a:effectRef>
+          <a:fontRef idx="minor">
+            <a:schemeClr val="lt1"/>
+          </a:fontRef>
+        </p:style>
+        <p:txBody>
+          <a:bodyPr rtlCol="0" anchor="ctr"/>
+          <a:lstStyle/>
+          <a:p>
+            <a:pPr algn="ctr"/>
+          </a:p>
+        </p:txBody>
+      </p:sp>
+      <p:sp>
+        <p:nvSpPr>
+          <p:cNvPr id="3" name="TextBox 2"/>
+          <p:cNvSpPr txBox="1"/>
+          <p:nvPr/>
+        </p:nvSpPr>
+        <p:spPr>
+          <a:xfrm>
+            <a:off x="457200" y="182880"/>
+            <a:ext cx="11277295" cy="731520"/>
+          </a:xfrm>
+          <a:prstGeom prst="rect">
+            <a:avLst/>
+          </a:prstGeom>
+          <a:noFill/>
+        </p:spPr>
+        <p:txBody>
+          <a:bodyPr wrap="none" anchor="ctr">
+            <a:spAutoFit/>
+          </a:bodyPr>
+          <a:lstStyle/>
+          <a:p>
+            <a:pPr algn="l">
+              <a:defRPr sz="3600" b="1">
+                <a:solidFill>
+                  <a:srgbClr val="FFFFFF"/>
+                </a:solidFill>
+              </a:defRPr>
+            </a:pPr>
+            <a:r>
+              <a:t>Entorno de Pruebas</a:t>
+            </a:r>
+          </a:p>
+        </p:txBody>
+      </p:sp>
+      <p:sp>
+        <p:nvSpPr>
+          <p:cNvPr id="4" name="TextBox 3"/>
+          <p:cNvSpPr txBox="1"/>
+          <p:nvPr/>
+        </p:nvSpPr>
+        <p:spPr>
+          <a:xfrm>
+            <a:off x="731520" y="1371600"/>
+            <a:ext cx="5029200" cy="4572000"/>
+          </a:xfrm>
+          <a:prstGeom prst="rect">
+            <a:avLst/>
+          </a:prstGeom>
+          <a:noFill/>
+        </p:spPr>
+        <p:txBody>
+          <a:bodyPr wrap="none">
+            <a:spAutoFit/>
+          </a:bodyPr>
+          <a:lstStyle/>
+          <a:p>
+            <a:pPr>
+              <a:spcAft>
+                <a:spcPts val="1000"/>
+              </a:spcAft>
+              <a:defRPr sz="2200" b="1">
+                <a:solidFill>
+                  <a:srgbClr val="B8860B"/>
+                </a:solidFill>
+              </a:defRPr>
+            </a:pPr>
+            <a:r>
+              <a:t>Hardware Requerido:</a:t>
+            </a:r>
+          </a:p>
+          <a:p>
+            <a:pPr>
+              <a:spcAft>
+                <a:spcPts val="800"/>
+              </a:spcAft>
+              <a:defRPr sz="1800">
+                <a:solidFill>
+                  <a:srgbClr val="333333"/>
+                </a:solidFill>
+              </a:defRPr>
+            </a:pPr>
+            <a:r>
+              <a:t>• Procesador: Intel i5 / AMD Ryzen 5+</a:t>
+            </a:r>
+          </a:p>
+          <a:p>
+            <a:pPr>
+              <a:spcAft>
+                <a:spcPts val="800"/>
+              </a:spcAft>
+              <a:defRPr sz="1800">
+                <a:solidFill>
+                  <a:srgbClr val="333333"/>
+                </a:solidFill>
+              </a:defRPr>
+            </a:pPr>
+            <a:r>
+              <a:t>• RAM: 8 GB mínimo (16 GB recomendado)</a:t>
+            </a:r>
+          </a:p>
+          <a:p>
+            <a:pPr>
+              <a:spcAft>
+                <a:spcPts val="800"/>
+              </a:spcAft>
+              <a:defRPr sz="1800">
+                <a:solidFill>
+                  <a:srgbClr val="333333"/>
+                </a:solidFill>
+              </a:defRPr>
+            </a:pPr>
+            <a:r>
+              <a:t>• Almacenamiento: 10 GB libres</a:t>
+            </a:r>
+          </a:p>
+          <a:p>
+            <a:pPr>
+              <a:spcAft>
+                <a:spcPts val="800"/>
+              </a:spcAft>
+              <a:defRPr sz="1800">
+                <a:solidFill>
+                  <a:srgbClr val="333333"/>
+                </a:solidFill>
+              </a:defRPr>
+            </a:pPr>
+            <a:r>
+              <a:t>• Internet: Requerida</a:t>
+            </a:r>
+          </a:p>
+        </p:txBody>
+      </p:sp>
+      <p:sp>
+        <p:nvSpPr>
+          <p:cNvPr id="5" name="TextBox 4"/>
+          <p:cNvSpPr txBox="1"/>
+          <p:nvPr/>
+        </p:nvSpPr>
+        <p:spPr>
+          <a:xfrm>
+            <a:off x="6217920" y="1371600"/>
+            <a:ext cx="5029200" cy="4572000"/>
+          </a:xfrm>
+          <a:prstGeom prst="rect">
+            <a:avLst/>
+          </a:prstGeom>
+          <a:noFill/>
+        </p:spPr>
+        <p:txBody>
+          <a:bodyPr wrap="none">
+            <a:spAutoFit/>
+          </a:bodyPr>
+          <a:lstStyle/>
+          <a:p>
+            <a:pPr>
+              <a:spcAft>
+                <a:spcPts val="1000"/>
+              </a:spcAft>
+              <a:defRPr sz="2200" b="1">
+                <a:solidFill>
+                  <a:srgbClr val="B8860B"/>
+                </a:solidFill>
+              </a:defRPr>
+            </a:pPr>
+            <a:r>
+              <a:t>Software Requerido:</a:t>
+            </a:r>
+          </a:p>
+          <a:p>
+            <a:pPr>
+              <a:spcAft>
+                <a:spcPts val="800"/>
+              </a:spcAft>
+              <a:defRPr sz="1800">
+                <a:solidFill>
+                  <a:srgbClr val="333333"/>
+                </a:solidFill>
+              </a:defRPr>
+            </a:pPr>
+            <a:r>
+              <a:t>• Node.js ≥ 16.x LTS</a:t>
+            </a:r>
+          </a:p>
+          <a:p>
+            <a:pPr>
+              <a:spcAft>
+                <a:spcPts val="800"/>
+              </a:spcAft>
+              <a:defRPr sz="1800">
+                <a:solidFill>
+                  <a:srgbClr val="333333"/>
+                </a:solidFill>
+              </a:defRPr>
+            </a:pPr>
+            <a:r>
+              <a:t>• npm ≥ 8.x</a:t>
+            </a:r>
+          </a:p>
+          <a:p>
+            <a:pPr>
+              <a:spcAft>
+                <a:spcPts val="800"/>
+              </a:spcAft>
+              <a:defRPr sz="1800">
+                <a:solidFill>
+                  <a:srgbClr val="333333"/>
+                </a:solidFill>
+              </a:defRPr>
+            </a:pPr>
+            <a:r>
+              <a:t>• MongoDB Atlas 6.x</a:t>
+            </a:r>
+          </a:p>
+          <a:p>
+            <a:pPr>
+              <a:spcAft>
+                <a:spcPts val="800"/>
+              </a:spcAft>
+              <a:defRPr sz="1800">
+                <a:solidFill>
+                  <a:srgbClr val="333333"/>
+                </a:solidFill>
+              </a:defRPr>
+            </a:pPr>
+            <a:r>
+              <a:t>• Google Chrome (última versión)</a:t>
+            </a:r>
+          </a:p>
+          <a:p>
+            <a:pPr>
+              <a:spcAft>
+                <a:spcPts val="800"/>
+              </a:spcAft>
+              <a:defRPr sz="1800">
+                <a:solidFill>
+                  <a:srgbClr val="333333"/>
+                </a:solidFill>
+              </a:defRPr>
+            </a:pPr>
+            <a:r>
+              <a:t>• Jest 29.x</a:t>
+            </a:r>
+          </a:p>
+          <a:p>
+            <a:pPr>
+              <a:spcAft>
+                <a:spcPts val="800"/>
+              </a:spcAft>
+              <a:defRPr sz="1800">
+                <a:solidFill>
+                  <a:srgbClr val="333333"/>
+                </a:solidFill>
+              </a:defRPr>
+            </a:pPr>
+            <a:r>
+              <a:t>• Cypress 13.x</a:t>
+            </a:r>
+          </a:p>
+        </p:txBody>
+      </p:sp>
     </p:spTree>
   </p:cSld>
   <p:clrMapOvr>
